--- a/branding/wave-3/Oslo/AgentCon Template.pptx
+++ b/branding/wave-3/Oslo/AgentCon Template.pptx
@@ -5,22 +5,34 @@
     <p:sldMasterId id="2147483648" r:id="rId1"/>
   </p:sldMasterIdLst>
   <p:handoutMasterIdLst>
-    <p:handoutMasterId r:id="rId5"/>
+    <p:handoutMasterId r:id="rId10"/>
   </p:handoutMasterIdLst>
   <p:sldIdLst>
     <p:sldId id="256" r:id="rId2"/>
     <p:sldId id="257" r:id="rId3"/>
-    <p:sldId id="258" r:id="rId4"/>
+    <p:sldId id="259" r:id="rId4"/>
+    <p:sldId id="260" r:id="rId5"/>
+    <p:sldId id="258" r:id="rId6"/>
+    <p:sldId id="261" r:id="rId7"/>
+    <p:sldId id="263" r:id="rId8"/>
+    <p:sldId id="262" r:id="rId9"/>
   </p:sldIdLst>
   <p:sldSz cx="12192000" cy="6858000"/>
   <p:notesSz cx="6858000" cy="9144000"/>
   <p:embeddedFontLst>
     <p:embeddedFont>
       <p:font typeface="Lufga" panose="00000500000000000000" pitchFamily="50" charset="0"/>
-      <p:regular r:id="rId6"/>
-      <p:bold r:id="rId7"/>
-      <p:italic r:id="rId8"/>
-      <p:boldItalic r:id="rId9"/>
+      <p:regular r:id="rId11"/>
+      <p:bold r:id="rId12"/>
+      <p:italic r:id="rId13"/>
+      <p:boldItalic r:id="rId14"/>
+    </p:embeddedFont>
+    <p:embeddedFont>
+      <p:font typeface="Montserrat" panose="00000500000000000000" pitchFamily="50" charset="0"/>
+      <p:regular r:id="rId15"/>
+      <p:bold r:id="rId16"/>
+      <p:italic r:id="rId17"/>
+      <p:boldItalic r:id="rId18"/>
     </p:embeddedFont>
   </p:embeddedFontLst>
   <p:defaultTextStyle>
@@ -223,7 +235,7 @@
           <a:p>
             <a:fld id="{DA2E83D4-0712-4B80-9A04-DAA4D13CDEEA}" type="datetimeFigureOut">
               <a:rPr lang="en-US" smtClean="0"/>
-              <a:t>2/2/2026</a:t>
+              <a:t>4/10/2026</a:t>
             </a:fld>
             <a:endParaRPr lang="en-US"/>
           </a:p>
@@ -465,7 +477,7 @@
           <a:p>
             <a:fld id="{0E070270-E84E-4A05-BDBE-19BEB135420D}" type="datetimeFigureOut">
               <a:rPr lang="en-US" smtClean="0"/>
-              <a:t>2/2/2026</a:t>
+              <a:t>4/10/2026</a:t>
             </a:fld>
             <a:endParaRPr lang="en-US"/>
           </a:p>
@@ -663,7 +675,7 @@
           <a:p>
             <a:fld id="{0E070270-E84E-4A05-BDBE-19BEB135420D}" type="datetimeFigureOut">
               <a:rPr lang="en-US" smtClean="0"/>
-              <a:t>2/2/2026</a:t>
+              <a:t>4/10/2026</a:t>
             </a:fld>
             <a:endParaRPr lang="en-US"/>
           </a:p>
@@ -720,6 +732,100 @@
               <a:t>‹#›</a:t>
             </a:fld>
             <a:endParaRPr lang="en-US"/>
+          </a:p>
+        </p:txBody>
+      </p:sp>
+      <p:sp>
+        <p:nvSpPr>
+          <p:cNvPr id="7" name="Rectangle 6">
+            <a:extLst>
+              <a:ext uri="{FF2B5EF4-FFF2-40B4-BE49-F238E27FC236}">
+                <a16:creationId xmlns:a16="http://schemas.microsoft.com/office/drawing/2014/main" id="{08CDFEA7-775B-5544-75BF-C7234CC9FA27}"/>
+              </a:ext>
+            </a:extLst>
+          </p:cNvPr>
+          <p:cNvSpPr/>
+          <p:nvPr userDrawn="1"/>
+        </p:nvSpPr>
+        <p:spPr>
+          <a:xfrm>
+            <a:off x="0" y="6516777"/>
+            <a:ext cx="12192000" cy="341223"/>
+          </a:xfrm>
+          <a:prstGeom prst="rect">
+            <a:avLst/>
+          </a:prstGeom>
+          <a:solidFill>
+            <a:srgbClr val="DDD7C0">
+              <a:alpha val="50000"/>
+            </a:srgbClr>
+          </a:solidFill>
+          <a:ln>
+            <a:noFill/>
+          </a:ln>
+        </p:spPr>
+        <p:style>
+          <a:lnRef idx="2">
+            <a:schemeClr val="accent1">
+              <a:shade val="15000"/>
+            </a:schemeClr>
+          </a:lnRef>
+          <a:fillRef idx="1">
+            <a:schemeClr val="accent1"/>
+          </a:fillRef>
+          <a:effectRef idx="0">
+            <a:schemeClr val="accent1"/>
+          </a:effectRef>
+          <a:fontRef idx="minor">
+            <a:schemeClr val="lt1"/>
+          </a:fontRef>
+        </p:style>
+        <p:txBody>
+          <a:bodyPr rtlCol="0" anchor="ctr"/>
+          <a:lstStyle/>
+          <a:p>
+            <a:pPr algn="ctr"/>
+            <a:endParaRPr lang="en-US"/>
+          </a:p>
+        </p:txBody>
+      </p:sp>
+      <p:sp>
+        <p:nvSpPr>
+          <p:cNvPr id="8" name="TextBox 7">
+            <a:extLst>
+              <a:ext uri="{FF2B5EF4-FFF2-40B4-BE49-F238E27FC236}">
+                <a16:creationId xmlns:a16="http://schemas.microsoft.com/office/drawing/2014/main" id="{DCBA4F31-C261-5E36-694B-22FCB49CE0F0}"/>
+              </a:ext>
+            </a:extLst>
+          </p:cNvPr>
+          <p:cNvSpPr txBox="1"/>
+          <p:nvPr userDrawn="1"/>
+        </p:nvSpPr>
+        <p:spPr>
+          <a:xfrm>
+            <a:off x="8782333" y="6555331"/>
+            <a:ext cx="3251211" cy="307777"/>
+          </a:xfrm>
+          <a:prstGeom prst="rect">
+            <a:avLst/>
+          </a:prstGeom>
+          <a:noFill/>
+        </p:spPr>
+        <p:txBody>
+          <a:bodyPr wrap="none" rtlCol="0">
+            <a:spAutoFit/>
+          </a:bodyPr>
+          <a:lstStyle/>
+          <a:p>
+            <a:r>
+              <a:rPr lang="en-US" sz="1400" b="1" dirty="0">
+                <a:solidFill>
+                  <a:srgbClr val="665649"/>
+                </a:solidFill>
+                <a:latin typeface="Lufga" panose="00000500000000000000" pitchFamily="50" charset="0"/>
+              </a:rPr>
+              <a:t>#AgentCon | @GlobalAICommunity</a:t>
+            </a:r>
           </a:p>
         </p:txBody>
       </p:sp>
@@ -871,7 +977,7 @@
           <a:p>
             <a:fld id="{0E070270-E84E-4A05-BDBE-19BEB135420D}" type="datetimeFigureOut">
               <a:rPr lang="en-US" smtClean="0"/>
-              <a:t>2/2/2026</a:t>
+              <a:t>4/10/2026</a:t>
             </a:fld>
             <a:endParaRPr lang="en-US"/>
           </a:p>
@@ -928,6 +1034,100 @@
               <a:t>‹#›</a:t>
             </a:fld>
             <a:endParaRPr lang="en-US"/>
+          </a:p>
+        </p:txBody>
+      </p:sp>
+      <p:sp>
+        <p:nvSpPr>
+          <p:cNvPr id="7" name="Rectangle 6">
+            <a:extLst>
+              <a:ext uri="{FF2B5EF4-FFF2-40B4-BE49-F238E27FC236}">
+                <a16:creationId xmlns:a16="http://schemas.microsoft.com/office/drawing/2014/main" id="{C183A543-B838-6D41-4BE1-5D34A14FAAFB}"/>
+              </a:ext>
+            </a:extLst>
+          </p:cNvPr>
+          <p:cNvSpPr/>
+          <p:nvPr userDrawn="1"/>
+        </p:nvSpPr>
+        <p:spPr>
+          <a:xfrm>
+            <a:off x="0" y="6516777"/>
+            <a:ext cx="12192000" cy="341223"/>
+          </a:xfrm>
+          <a:prstGeom prst="rect">
+            <a:avLst/>
+          </a:prstGeom>
+          <a:solidFill>
+            <a:srgbClr val="DDD7C0">
+              <a:alpha val="50000"/>
+            </a:srgbClr>
+          </a:solidFill>
+          <a:ln>
+            <a:noFill/>
+          </a:ln>
+        </p:spPr>
+        <p:style>
+          <a:lnRef idx="2">
+            <a:schemeClr val="accent1">
+              <a:shade val="15000"/>
+            </a:schemeClr>
+          </a:lnRef>
+          <a:fillRef idx="1">
+            <a:schemeClr val="accent1"/>
+          </a:fillRef>
+          <a:effectRef idx="0">
+            <a:schemeClr val="accent1"/>
+          </a:effectRef>
+          <a:fontRef idx="minor">
+            <a:schemeClr val="lt1"/>
+          </a:fontRef>
+        </p:style>
+        <p:txBody>
+          <a:bodyPr rtlCol="0" anchor="ctr"/>
+          <a:lstStyle/>
+          <a:p>
+            <a:pPr algn="ctr"/>
+            <a:endParaRPr lang="en-US"/>
+          </a:p>
+        </p:txBody>
+      </p:sp>
+      <p:sp>
+        <p:nvSpPr>
+          <p:cNvPr id="8" name="TextBox 7">
+            <a:extLst>
+              <a:ext uri="{FF2B5EF4-FFF2-40B4-BE49-F238E27FC236}">
+                <a16:creationId xmlns:a16="http://schemas.microsoft.com/office/drawing/2014/main" id="{52AB65E1-973A-9BC6-2268-C05634B4E528}"/>
+              </a:ext>
+            </a:extLst>
+          </p:cNvPr>
+          <p:cNvSpPr txBox="1"/>
+          <p:nvPr userDrawn="1"/>
+        </p:nvSpPr>
+        <p:spPr>
+          <a:xfrm>
+            <a:off x="8782333" y="6555331"/>
+            <a:ext cx="3251211" cy="307777"/>
+          </a:xfrm>
+          <a:prstGeom prst="rect">
+            <a:avLst/>
+          </a:prstGeom>
+          <a:noFill/>
+        </p:spPr>
+        <p:txBody>
+          <a:bodyPr wrap="none" rtlCol="0">
+            <a:spAutoFit/>
+          </a:bodyPr>
+          <a:lstStyle/>
+          <a:p>
+            <a:r>
+              <a:rPr lang="en-US" sz="1400" b="1" dirty="0">
+                <a:solidFill>
+                  <a:srgbClr val="665649"/>
+                </a:solidFill>
+                <a:latin typeface="Lufga" panose="00000500000000000000" pitchFamily="50" charset="0"/>
+              </a:rPr>
+              <a:t>#AgentCon | @GlobalAICommunity</a:t>
+            </a:r>
           </a:p>
         </p:txBody>
       </p:sp>
@@ -1069,7 +1269,7 @@
           <a:p>
             <a:fld id="{0E070270-E84E-4A05-BDBE-19BEB135420D}" type="datetimeFigureOut">
               <a:rPr lang="en-US" smtClean="0"/>
-              <a:t>2/2/2026</a:t>
+              <a:t>4/10/2026</a:t>
             </a:fld>
             <a:endParaRPr lang="en-US"/>
           </a:p>
@@ -1126,6 +1326,100 @@
               <a:t>‹#›</a:t>
             </a:fld>
             <a:endParaRPr lang="en-US"/>
+          </a:p>
+        </p:txBody>
+      </p:sp>
+      <p:sp>
+        <p:nvSpPr>
+          <p:cNvPr id="8" name="Rectangle 7">
+            <a:extLst>
+              <a:ext uri="{FF2B5EF4-FFF2-40B4-BE49-F238E27FC236}">
+                <a16:creationId xmlns:a16="http://schemas.microsoft.com/office/drawing/2014/main" id="{68C305EC-6B0E-C106-C7C3-C21594509DDC}"/>
+              </a:ext>
+            </a:extLst>
+          </p:cNvPr>
+          <p:cNvSpPr/>
+          <p:nvPr userDrawn="1"/>
+        </p:nvSpPr>
+        <p:spPr>
+          <a:xfrm>
+            <a:off x="0" y="6516777"/>
+            <a:ext cx="12192000" cy="341223"/>
+          </a:xfrm>
+          <a:prstGeom prst="rect">
+            <a:avLst/>
+          </a:prstGeom>
+          <a:solidFill>
+            <a:srgbClr val="DDD7C0">
+              <a:alpha val="50000"/>
+            </a:srgbClr>
+          </a:solidFill>
+          <a:ln>
+            <a:noFill/>
+          </a:ln>
+        </p:spPr>
+        <p:style>
+          <a:lnRef idx="2">
+            <a:schemeClr val="accent1">
+              <a:shade val="15000"/>
+            </a:schemeClr>
+          </a:lnRef>
+          <a:fillRef idx="1">
+            <a:schemeClr val="accent1"/>
+          </a:fillRef>
+          <a:effectRef idx="0">
+            <a:schemeClr val="accent1"/>
+          </a:effectRef>
+          <a:fontRef idx="minor">
+            <a:schemeClr val="lt1"/>
+          </a:fontRef>
+        </p:style>
+        <p:txBody>
+          <a:bodyPr rtlCol="0" anchor="ctr"/>
+          <a:lstStyle/>
+          <a:p>
+            <a:pPr algn="ctr"/>
+            <a:endParaRPr lang="en-US"/>
+          </a:p>
+        </p:txBody>
+      </p:sp>
+      <p:sp>
+        <p:nvSpPr>
+          <p:cNvPr id="9" name="TextBox 8">
+            <a:extLst>
+              <a:ext uri="{FF2B5EF4-FFF2-40B4-BE49-F238E27FC236}">
+                <a16:creationId xmlns:a16="http://schemas.microsoft.com/office/drawing/2014/main" id="{0930E74C-4634-6B5C-023D-FF24C77B4126}"/>
+              </a:ext>
+            </a:extLst>
+          </p:cNvPr>
+          <p:cNvSpPr txBox="1"/>
+          <p:nvPr userDrawn="1"/>
+        </p:nvSpPr>
+        <p:spPr>
+          <a:xfrm>
+            <a:off x="8782333" y="6555331"/>
+            <a:ext cx="3251211" cy="307777"/>
+          </a:xfrm>
+          <a:prstGeom prst="rect">
+            <a:avLst/>
+          </a:prstGeom>
+          <a:noFill/>
+        </p:spPr>
+        <p:txBody>
+          <a:bodyPr wrap="none" rtlCol="0">
+            <a:spAutoFit/>
+          </a:bodyPr>
+          <a:lstStyle/>
+          <a:p>
+            <a:r>
+              <a:rPr lang="en-US" sz="1400" b="1" dirty="0">
+                <a:solidFill>
+                  <a:srgbClr val="665649"/>
+                </a:solidFill>
+                <a:latin typeface="Lufga" panose="00000500000000000000" pitchFamily="50" charset="0"/>
+              </a:rPr>
+              <a:t>#AgentCon | @GlobalAICommunity</a:t>
+            </a:r>
           </a:p>
         </p:txBody>
       </p:sp>
@@ -1344,7 +1638,7 @@
           <a:p>
             <a:fld id="{0E070270-E84E-4A05-BDBE-19BEB135420D}" type="datetimeFigureOut">
               <a:rPr lang="en-US" smtClean="0"/>
-              <a:t>2/2/2026</a:t>
+              <a:t>4/10/2026</a:t>
             </a:fld>
             <a:endParaRPr lang="en-US"/>
           </a:p>
@@ -1401,6 +1695,100 @@
               <a:t>‹#›</a:t>
             </a:fld>
             <a:endParaRPr lang="en-US"/>
+          </a:p>
+        </p:txBody>
+      </p:sp>
+      <p:sp>
+        <p:nvSpPr>
+          <p:cNvPr id="7" name="Rectangle 6">
+            <a:extLst>
+              <a:ext uri="{FF2B5EF4-FFF2-40B4-BE49-F238E27FC236}">
+                <a16:creationId xmlns:a16="http://schemas.microsoft.com/office/drawing/2014/main" id="{E9A60D85-C288-2E3B-B8F0-E43709F40D1A}"/>
+              </a:ext>
+            </a:extLst>
+          </p:cNvPr>
+          <p:cNvSpPr/>
+          <p:nvPr userDrawn="1"/>
+        </p:nvSpPr>
+        <p:spPr>
+          <a:xfrm>
+            <a:off x="0" y="6516777"/>
+            <a:ext cx="12192000" cy="341223"/>
+          </a:xfrm>
+          <a:prstGeom prst="rect">
+            <a:avLst/>
+          </a:prstGeom>
+          <a:solidFill>
+            <a:srgbClr val="DDD7C0">
+              <a:alpha val="50000"/>
+            </a:srgbClr>
+          </a:solidFill>
+          <a:ln>
+            <a:noFill/>
+          </a:ln>
+        </p:spPr>
+        <p:style>
+          <a:lnRef idx="2">
+            <a:schemeClr val="accent1">
+              <a:shade val="15000"/>
+            </a:schemeClr>
+          </a:lnRef>
+          <a:fillRef idx="1">
+            <a:schemeClr val="accent1"/>
+          </a:fillRef>
+          <a:effectRef idx="0">
+            <a:schemeClr val="accent1"/>
+          </a:effectRef>
+          <a:fontRef idx="minor">
+            <a:schemeClr val="lt1"/>
+          </a:fontRef>
+        </p:style>
+        <p:txBody>
+          <a:bodyPr rtlCol="0" anchor="ctr"/>
+          <a:lstStyle/>
+          <a:p>
+            <a:pPr algn="ctr"/>
+            <a:endParaRPr lang="en-US"/>
+          </a:p>
+        </p:txBody>
+      </p:sp>
+      <p:sp>
+        <p:nvSpPr>
+          <p:cNvPr id="8" name="TextBox 7">
+            <a:extLst>
+              <a:ext uri="{FF2B5EF4-FFF2-40B4-BE49-F238E27FC236}">
+                <a16:creationId xmlns:a16="http://schemas.microsoft.com/office/drawing/2014/main" id="{CEC42EE8-02CA-BF54-F281-8CE989992960}"/>
+              </a:ext>
+            </a:extLst>
+          </p:cNvPr>
+          <p:cNvSpPr txBox="1"/>
+          <p:nvPr userDrawn="1"/>
+        </p:nvSpPr>
+        <p:spPr>
+          <a:xfrm>
+            <a:off x="8782333" y="6555331"/>
+            <a:ext cx="3251211" cy="307777"/>
+          </a:xfrm>
+          <a:prstGeom prst="rect">
+            <a:avLst/>
+          </a:prstGeom>
+          <a:noFill/>
+        </p:spPr>
+        <p:txBody>
+          <a:bodyPr wrap="none" rtlCol="0">
+            <a:spAutoFit/>
+          </a:bodyPr>
+          <a:lstStyle/>
+          <a:p>
+            <a:r>
+              <a:rPr lang="en-US" sz="1400" b="1" dirty="0">
+                <a:solidFill>
+                  <a:srgbClr val="665649"/>
+                </a:solidFill>
+                <a:latin typeface="Lufga" panose="00000500000000000000" pitchFamily="50" charset="0"/>
+              </a:rPr>
+              <a:t>#AgentCon | @GlobalAICommunity</a:t>
+            </a:r>
           </a:p>
         </p:txBody>
       </p:sp>
@@ -1609,7 +1997,7 @@
           <a:p>
             <a:fld id="{0E070270-E84E-4A05-BDBE-19BEB135420D}" type="datetimeFigureOut">
               <a:rPr lang="en-US" smtClean="0"/>
-              <a:t>2/2/2026</a:t>
+              <a:t>4/10/2026</a:t>
             </a:fld>
             <a:endParaRPr lang="en-US"/>
           </a:p>
@@ -1666,6 +2054,100 @@
               <a:t>‹#›</a:t>
             </a:fld>
             <a:endParaRPr lang="en-US"/>
+          </a:p>
+        </p:txBody>
+      </p:sp>
+      <p:sp>
+        <p:nvSpPr>
+          <p:cNvPr id="8" name="Rectangle 7">
+            <a:extLst>
+              <a:ext uri="{FF2B5EF4-FFF2-40B4-BE49-F238E27FC236}">
+                <a16:creationId xmlns:a16="http://schemas.microsoft.com/office/drawing/2014/main" id="{8E0597CE-7346-4A80-7F21-5594BD0EB867}"/>
+              </a:ext>
+            </a:extLst>
+          </p:cNvPr>
+          <p:cNvSpPr/>
+          <p:nvPr userDrawn="1"/>
+        </p:nvSpPr>
+        <p:spPr>
+          <a:xfrm>
+            <a:off x="0" y="6516777"/>
+            <a:ext cx="12192000" cy="341223"/>
+          </a:xfrm>
+          <a:prstGeom prst="rect">
+            <a:avLst/>
+          </a:prstGeom>
+          <a:solidFill>
+            <a:srgbClr val="DDD7C0">
+              <a:alpha val="50000"/>
+            </a:srgbClr>
+          </a:solidFill>
+          <a:ln>
+            <a:noFill/>
+          </a:ln>
+        </p:spPr>
+        <p:style>
+          <a:lnRef idx="2">
+            <a:schemeClr val="accent1">
+              <a:shade val="15000"/>
+            </a:schemeClr>
+          </a:lnRef>
+          <a:fillRef idx="1">
+            <a:schemeClr val="accent1"/>
+          </a:fillRef>
+          <a:effectRef idx="0">
+            <a:schemeClr val="accent1"/>
+          </a:effectRef>
+          <a:fontRef idx="minor">
+            <a:schemeClr val="lt1"/>
+          </a:fontRef>
+        </p:style>
+        <p:txBody>
+          <a:bodyPr rtlCol="0" anchor="ctr"/>
+          <a:lstStyle/>
+          <a:p>
+            <a:pPr algn="ctr"/>
+            <a:endParaRPr lang="en-US"/>
+          </a:p>
+        </p:txBody>
+      </p:sp>
+      <p:sp>
+        <p:nvSpPr>
+          <p:cNvPr id="9" name="TextBox 8">
+            <a:extLst>
+              <a:ext uri="{FF2B5EF4-FFF2-40B4-BE49-F238E27FC236}">
+                <a16:creationId xmlns:a16="http://schemas.microsoft.com/office/drawing/2014/main" id="{811313B7-7F9E-C4CC-31A1-A85242BDF637}"/>
+              </a:ext>
+            </a:extLst>
+          </p:cNvPr>
+          <p:cNvSpPr txBox="1"/>
+          <p:nvPr userDrawn="1"/>
+        </p:nvSpPr>
+        <p:spPr>
+          <a:xfrm>
+            <a:off x="8782333" y="6555331"/>
+            <a:ext cx="3251211" cy="307777"/>
+          </a:xfrm>
+          <a:prstGeom prst="rect">
+            <a:avLst/>
+          </a:prstGeom>
+          <a:noFill/>
+        </p:spPr>
+        <p:txBody>
+          <a:bodyPr wrap="none" rtlCol="0">
+            <a:spAutoFit/>
+          </a:bodyPr>
+          <a:lstStyle/>
+          <a:p>
+            <a:r>
+              <a:rPr lang="en-US" sz="1400" b="1" dirty="0">
+                <a:solidFill>
+                  <a:srgbClr val="665649"/>
+                </a:solidFill>
+                <a:latin typeface="Lufga" panose="00000500000000000000" pitchFamily="50" charset="0"/>
+              </a:rPr>
+              <a:t>#AgentCon | @GlobalAICommunity</a:t>
+            </a:r>
           </a:p>
         </p:txBody>
       </p:sp>
@@ -2021,7 +2503,7 @@
           <a:p>
             <a:fld id="{0E070270-E84E-4A05-BDBE-19BEB135420D}" type="datetimeFigureOut">
               <a:rPr lang="en-US" smtClean="0"/>
-              <a:t>2/2/2026</a:t>
+              <a:t>4/10/2026</a:t>
             </a:fld>
             <a:endParaRPr lang="en-US"/>
           </a:p>
@@ -2078,6 +2560,100 @@
               <a:t>‹#›</a:t>
             </a:fld>
             <a:endParaRPr lang="en-US"/>
+          </a:p>
+        </p:txBody>
+      </p:sp>
+      <p:sp>
+        <p:nvSpPr>
+          <p:cNvPr id="10" name="Rectangle 9">
+            <a:extLst>
+              <a:ext uri="{FF2B5EF4-FFF2-40B4-BE49-F238E27FC236}">
+                <a16:creationId xmlns:a16="http://schemas.microsoft.com/office/drawing/2014/main" id="{C58328CA-13D1-A7F5-8CCF-D31ECE645DA9}"/>
+              </a:ext>
+            </a:extLst>
+          </p:cNvPr>
+          <p:cNvSpPr/>
+          <p:nvPr userDrawn="1"/>
+        </p:nvSpPr>
+        <p:spPr>
+          <a:xfrm>
+            <a:off x="0" y="6516777"/>
+            <a:ext cx="12192000" cy="341223"/>
+          </a:xfrm>
+          <a:prstGeom prst="rect">
+            <a:avLst/>
+          </a:prstGeom>
+          <a:solidFill>
+            <a:srgbClr val="DDD7C0">
+              <a:alpha val="50000"/>
+            </a:srgbClr>
+          </a:solidFill>
+          <a:ln>
+            <a:noFill/>
+          </a:ln>
+        </p:spPr>
+        <p:style>
+          <a:lnRef idx="2">
+            <a:schemeClr val="accent1">
+              <a:shade val="15000"/>
+            </a:schemeClr>
+          </a:lnRef>
+          <a:fillRef idx="1">
+            <a:schemeClr val="accent1"/>
+          </a:fillRef>
+          <a:effectRef idx="0">
+            <a:schemeClr val="accent1"/>
+          </a:effectRef>
+          <a:fontRef idx="minor">
+            <a:schemeClr val="lt1"/>
+          </a:fontRef>
+        </p:style>
+        <p:txBody>
+          <a:bodyPr rtlCol="0" anchor="ctr"/>
+          <a:lstStyle/>
+          <a:p>
+            <a:pPr algn="ctr"/>
+            <a:endParaRPr lang="en-US"/>
+          </a:p>
+        </p:txBody>
+      </p:sp>
+      <p:sp>
+        <p:nvSpPr>
+          <p:cNvPr id="11" name="TextBox 10">
+            <a:extLst>
+              <a:ext uri="{FF2B5EF4-FFF2-40B4-BE49-F238E27FC236}">
+                <a16:creationId xmlns:a16="http://schemas.microsoft.com/office/drawing/2014/main" id="{931A273F-BDB5-C307-5B3E-2EA49659763C}"/>
+              </a:ext>
+            </a:extLst>
+          </p:cNvPr>
+          <p:cNvSpPr txBox="1"/>
+          <p:nvPr userDrawn="1"/>
+        </p:nvSpPr>
+        <p:spPr>
+          <a:xfrm>
+            <a:off x="8782333" y="6555331"/>
+            <a:ext cx="3251211" cy="307777"/>
+          </a:xfrm>
+          <a:prstGeom prst="rect">
+            <a:avLst/>
+          </a:prstGeom>
+          <a:noFill/>
+        </p:spPr>
+        <p:txBody>
+          <a:bodyPr wrap="none" rtlCol="0">
+            <a:spAutoFit/>
+          </a:bodyPr>
+          <a:lstStyle/>
+          <a:p>
+            <a:r>
+              <a:rPr lang="en-US" sz="1400" b="1" dirty="0">
+                <a:solidFill>
+                  <a:srgbClr val="665649"/>
+                </a:solidFill>
+                <a:latin typeface="Lufga" panose="00000500000000000000" pitchFamily="50" charset="0"/>
+              </a:rPr>
+              <a:t>#AgentCon | @GlobalAICommunity</a:t>
+            </a:r>
           </a:p>
         </p:txBody>
       </p:sp>
@@ -2162,7 +2738,7 @@
           <a:p>
             <a:fld id="{0E070270-E84E-4A05-BDBE-19BEB135420D}" type="datetimeFigureOut">
               <a:rPr lang="en-US" smtClean="0"/>
-              <a:t>2/2/2026</a:t>
+              <a:t>4/10/2026</a:t>
             </a:fld>
             <a:endParaRPr lang="en-US"/>
           </a:p>
@@ -2219,6 +2795,100 @@
               <a:t>‹#›</a:t>
             </a:fld>
             <a:endParaRPr lang="en-US"/>
+          </a:p>
+        </p:txBody>
+      </p:sp>
+      <p:sp>
+        <p:nvSpPr>
+          <p:cNvPr id="6" name="Rectangle 5">
+            <a:extLst>
+              <a:ext uri="{FF2B5EF4-FFF2-40B4-BE49-F238E27FC236}">
+                <a16:creationId xmlns:a16="http://schemas.microsoft.com/office/drawing/2014/main" id="{F2B24AF0-1003-FBF1-4BAC-72C69EDE3BF7}"/>
+              </a:ext>
+            </a:extLst>
+          </p:cNvPr>
+          <p:cNvSpPr/>
+          <p:nvPr userDrawn="1"/>
+        </p:nvSpPr>
+        <p:spPr>
+          <a:xfrm>
+            <a:off x="0" y="6516777"/>
+            <a:ext cx="12192000" cy="341223"/>
+          </a:xfrm>
+          <a:prstGeom prst="rect">
+            <a:avLst/>
+          </a:prstGeom>
+          <a:solidFill>
+            <a:srgbClr val="DDD7C0">
+              <a:alpha val="50000"/>
+            </a:srgbClr>
+          </a:solidFill>
+          <a:ln>
+            <a:noFill/>
+          </a:ln>
+        </p:spPr>
+        <p:style>
+          <a:lnRef idx="2">
+            <a:schemeClr val="accent1">
+              <a:shade val="15000"/>
+            </a:schemeClr>
+          </a:lnRef>
+          <a:fillRef idx="1">
+            <a:schemeClr val="accent1"/>
+          </a:fillRef>
+          <a:effectRef idx="0">
+            <a:schemeClr val="accent1"/>
+          </a:effectRef>
+          <a:fontRef idx="minor">
+            <a:schemeClr val="lt1"/>
+          </a:fontRef>
+        </p:style>
+        <p:txBody>
+          <a:bodyPr rtlCol="0" anchor="ctr"/>
+          <a:lstStyle/>
+          <a:p>
+            <a:pPr algn="ctr"/>
+            <a:endParaRPr lang="en-US"/>
+          </a:p>
+        </p:txBody>
+      </p:sp>
+      <p:sp>
+        <p:nvSpPr>
+          <p:cNvPr id="7" name="TextBox 6">
+            <a:extLst>
+              <a:ext uri="{FF2B5EF4-FFF2-40B4-BE49-F238E27FC236}">
+                <a16:creationId xmlns:a16="http://schemas.microsoft.com/office/drawing/2014/main" id="{92D32194-D1D2-0AD9-4BDE-8AC9915A0E7B}"/>
+              </a:ext>
+            </a:extLst>
+          </p:cNvPr>
+          <p:cNvSpPr txBox="1"/>
+          <p:nvPr userDrawn="1"/>
+        </p:nvSpPr>
+        <p:spPr>
+          <a:xfrm>
+            <a:off x="8782333" y="6555331"/>
+            <a:ext cx="3251211" cy="307777"/>
+          </a:xfrm>
+          <a:prstGeom prst="rect">
+            <a:avLst/>
+          </a:prstGeom>
+          <a:noFill/>
+        </p:spPr>
+        <p:txBody>
+          <a:bodyPr wrap="none" rtlCol="0">
+            <a:spAutoFit/>
+          </a:bodyPr>
+          <a:lstStyle/>
+          <a:p>
+            <a:r>
+              <a:rPr lang="en-US" sz="1400" b="1" dirty="0">
+                <a:solidFill>
+                  <a:srgbClr val="665649"/>
+                </a:solidFill>
+                <a:latin typeface="Lufga" panose="00000500000000000000" pitchFamily="50" charset="0"/>
+              </a:rPr>
+              <a:t>#AgentCon | @GlobalAICommunity</a:t>
+            </a:r>
           </a:p>
         </p:txBody>
       </p:sp>
@@ -2275,7 +2945,7 @@
           <a:p>
             <a:fld id="{0E070270-E84E-4A05-BDBE-19BEB135420D}" type="datetimeFigureOut">
               <a:rPr lang="en-US" smtClean="0"/>
-              <a:t>2/2/2026</a:t>
+              <a:t>4/10/2026</a:t>
             </a:fld>
             <a:endParaRPr lang="en-US"/>
           </a:p>
@@ -2586,7 +3256,7 @@
           <a:p>
             <a:fld id="{0E070270-E84E-4A05-BDBE-19BEB135420D}" type="datetimeFigureOut">
               <a:rPr lang="en-US" smtClean="0"/>
-              <a:t>2/2/2026</a:t>
+              <a:t>4/10/2026</a:t>
             </a:fld>
             <a:endParaRPr lang="en-US"/>
           </a:p>
@@ -2643,6 +3313,100 @@
               <a:t>‹#›</a:t>
             </a:fld>
             <a:endParaRPr lang="en-US"/>
+          </a:p>
+        </p:txBody>
+      </p:sp>
+      <p:sp>
+        <p:nvSpPr>
+          <p:cNvPr id="8" name="Rectangle 7">
+            <a:extLst>
+              <a:ext uri="{FF2B5EF4-FFF2-40B4-BE49-F238E27FC236}">
+                <a16:creationId xmlns:a16="http://schemas.microsoft.com/office/drawing/2014/main" id="{D41BBFDA-E455-035E-CF34-558F979C54C9}"/>
+              </a:ext>
+            </a:extLst>
+          </p:cNvPr>
+          <p:cNvSpPr/>
+          <p:nvPr userDrawn="1"/>
+        </p:nvSpPr>
+        <p:spPr>
+          <a:xfrm>
+            <a:off x="0" y="6516777"/>
+            <a:ext cx="12192000" cy="341223"/>
+          </a:xfrm>
+          <a:prstGeom prst="rect">
+            <a:avLst/>
+          </a:prstGeom>
+          <a:solidFill>
+            <a:srgbClr val="DDD7C0">
+              <a:alpha val="50000"/>
+            </a:srgbClr>
+          </a:solidFill>
+          <a:ln>
+            <a:noFill/>
+          </a:ln>
+        </p:spPr>
+        <p:style>
+          <a:lnRef idx="2">
+            <a:schemeClr val="accent1">
+              <a:shade val="15000"/>
+            </a:schemeClr>
+          </a:lnRef>
+          <a:fillRef idx="1">
+            <a:schemeClr val="accent1"/>
+          </a:fillRef>
+          <a:effectRef idx="0">
+            <a:schemeClr val="accent1"/>
+          </a:effectRef>
+          <a:fontRef idx="minor">
+            <a:schemeClr val="lt1"/>
+          </a:fontRef>
+        </p:style>
+        <p:txBody>
+          <a:bodyPr rtlCol="0" anchor="ctr"/>
+          <a:lstStyle/>
+          <a:p>
+            <a:pPr algn="ctr"/>
+            <a:endParaRPr lang="en-US"/>
+          </a:p>
+        </p:txBody>
+      </p:sp>
+      <p:sp>
+        <p:nvSpPr>
+          <p:cNvPr id="9" name="TextBox 8">
+            <a:extLst>
+              <a:ext uri="{FF2B5EF4-FFF2-40B4-BE49-F238E27FC236}">
+                <a16:creationId xmlns:a16="http://schemas.microsoft.com/office/drawing/2014/main" id="{1BD6F701-5E32-8CE8-4B18-BC1D01EF8622}"/>
+              </a:ext>
+            </a:extLst>
+          </p:cNvPr>
+          <p:cNvSpPr txBox="1"/>
+          <p:nvPr userDrawn="1"/>
+        </p:nvSpPr>
+        <p:spPr>
+          <a:xfrm>
+            <a:off x="8782333" y="6555331"/>
+            <a:ext cx="3251211" cy="307777"/>
+          </a:xfrm>
+          <a:prstGeom prst="rect">
+            <a:avLst/>
+          </a:prstGeom>
+          <a:noFill/>
+        </p:spPr>
+        <p:txBody>
+          <a:bodyPr wrap="none" rtlCol="0">
+            <a:spAutoFit/>
+          </a:bodyPr>
+          <a:lstStyle/>
+          <a:p>
+            <a:r>
+              <a:rPr lang="en-US" sz="1400" b="1" dirty="0">
+                <a:solidFill>
+                  <a:srgbClr val="665649"/>
+                </a:solidFill>
+                <a:latin typeface="Lufga" panose="00000500000000000000" pitchFamily="50" charset="0"/>
+              </a:rPr>
+              <a:t>#AgentCon | @GlobalAICommunity</a:t>
+            </a:r>
           </a:p>
         </p:txBody>
       </p:sp>
@@ -2874,7 +3638,7 @@
           <a:p>
             <a:fld id="{0E070270-E84E-4A05-BDBE-19BEB135420D}" type="datetimeFigureOut">
               <a:rPr lang="en-US" smtClean="0"/>
-              <a:t>2/2/2026</a:t>
+              <a:t>4/10/2026</a:t>
             </a:fld>
             <a:endParaRPr lang="en-US"/>
           </a:p>
@@ -2931,6 +3695,100 @@
               <a:t>‹#›</a:t>
             </a:fld>
             <a:endParaRPr lang="en-US"/>
+          </a:p>
+        </p:txBody>
+      </p:sp>
+      <p:sp>
+        <p:nvSpPr>
+          <p:cNvPr id="8" name="Rectangle 7">
+            <a:extLst>
+              <a:ext uri="{FF2B5EF4-FFF2-40B4-BE49-F238E27FC236}">
+                <a16:creationId xmlns:a16="http://schemas.microsoft.com/office/drawing/2014/main" id="{F73D969B-DE54-11C0-1DF1-5CA7EEB63F66}"/>
+              </a:ext>
+            </a:extLst>
+          </p:cNvPr>
+          <p:cNvSpPr/>
+          <p:nvPr userDrawn="1"/>
+        </p:nvSpPr>
+        <p:spPr>
+          <a:xfrm>
+            <a:off x="0" y="6516777"/>
+            <a:ext cx="12192000" cy="341223"/>
+          </a:xfrm>
+          <a:prstGeom prst="rect">
+            <a:avLst/>
+          </a:prstGeom>
+          <a:solidFill>
+            <a:srgbClr val="DDD7C0">
+              <a:alpha val="50000"/>
+            </a:srgbClr>
+          </a:solidFill>
+          <a:ln>
+            <a:noFill/>
+          </a:ln>
+        </p:spPr>
+        <p:style>
+          <a:lnRef idx="2">
+            <a:schemeClr val="accent1">
+              <a:shade val="15000"/>
+            </a:schemeClr>
+          </a:lnRef>
+          <a:fillRef idx="1">
+            <a:schemeClr val="accent1"/>
+          </a:fillRef>
+          <a:effectRef idx="0">
+            <a:schemeClr val="accent1"/>
+          </a:effectRef>
+          <a:fontRef idx="minor">
+            <a:schemeClr val="lt1"/>
+          </a:fontRef>
+        </p:style>
+        <p:txBody>
+          <a:bodyPr rtlCol="0" anchor="ctr"/>
+          <a:lstStyle/>
+          <a:p>
+            <a:pPr algn="ctr"/>
+            <a:endParaRPr lang="en-US"/>
+          </a:p>
+        </p:txBody>
+      </p:sp>
+      <p:sp>
+        <p:nvSpPr>
+          <p:cNvPr id="9" name="TextBox 8">
+            <a:extLst>
+              <a:ext uri="{FF2B5EF4-FFF2-40B4-BE49-F238E27FC236}">
+                <a16:creationId xmlns:a16="http://schemas.microsoft.com/office/drawing/2014/main" id="{F7144305-758C-24CA-515B-B32AA5793B1A}"/>
+              </a:ext>
+            </a:extLst>
+          </p:cNvPr>
+          <p:cNvSpPr txBox="1"/>
+          <p:nvPr userDrawn="1"/>
+        </p:nvSpPr>
+        <p:spPr>
+          <a:xfrm>
+            <a:off x="8782333" y="6555331"/>
+            <a:ext cx="3251211" cy="307777"/>
+          </a:xfrm>
+          <a:prstGeom prst="rect">
+            <a:avLst/>
+          </a:prstGeom>
+          <a:noFill/>
+        </p:spPr>
+        <p:txBody>
+          <a:bodyPr wrap="none" rtlCol="0">
+            <a:spAutoFit/>
+          </a:bodyPr>
+          <a:lstStyle/>
+          <a:p>
+            <a:r>
+              <a:rPr lang="en-US" sz="1400" b="1" dirty="0">
+                <a:solidFill>
+                  <a:srgbClr val="665649"/>
+                </a:solidFill>
+                <a:latin typeface="Lufga" panose="00000500000000000000" pitchFamily="50" charset="0"/>
+              </a:rPr>
+              <a:t>#AgentCon | @GlobalAICommunity</a:t>
+            </a:r>
           </a:p>
         </p:txBody>
       </p:sp>
@@ -3151,7 +4009,7 @@
           <a:p>
             <a:fld id="{0E070270-E84E-4A05-BDBE-19BEB135420D}" type="datetimeFigureOut">
               <a:rPr lang="en-US" smtClean="0"/>
-              <a:t>2/2/2026</a:t>
+              <a:t>4/10/2026</a:t>
             </a:fld>
             <a:endParaRPr lang="en-US"/>
           </a:p>
@@ -3582,7 +4440,7 @@
         </p:nvSpPr>
         <p:spPr>
           <a:xfrm>
-            <a:off x="0" y="6125498"/>
+            <a:off x="0" y="6273226"/>
             <a:ext cx="12192000" cy="584774"/>
           </a:xfrm>
           <a:prstGeom prst="rect">
@@ -3762,7 +4620,7 @@
         </p:blipFill>
         <p:spPr>
           <a:xfrm>
-            <a:off x="6753783" y="6270242"/>
+            <a:off x="8166046" y="6401887"/>
             <a:ext cx="1246837" cy="360904"/>
           </a:xfrm>
           <a:prstGeom prst="rect">
@@ -3799,7 +4657,7 @@
         </p:blipFill>
         <p:spPr bwMode="auto">
           <a:xfrm>
-            <a:off x="4256248" y="6285319"/>
+            <a:off x="5321561" y="6399619"/>
             <a:ext cx="1548878" cy="330750"/>
           </a:xfrm>
           <a:prstGeom prst="rect">
@@ -3831,8 +4689,8 @@
         </p:nvSpPr>
         <p:spPr>
           <a:xfrm>
-            <a:off x="4813300" y="5438499"/>
-            <a:ext cx="2882900" cy="530501"/>
+            <a:off x="4478337" y="5438499"/>
+            <a:ext cx="3235325" cy="530501"/>
           </a:xfrm>
           <a:prstGeom prst="roundRect">
             <a:avLst/>
@@ -3883,8 +4741,8 @@
         </p:nvSpPr>
         <p:spPr>
           <a:xfrm>
-            <a:off x="4869630" y="5517422"/>
-            <a:ext cx="2697257" cy="369332"/>
+            <a:off x="4570795" y="5509382"/>
+            <a:ext cx="3050408" cy="369332"/>
           </a:xfrm>
           <a:prstGeom prst="rect">
             <a:avLst/>
@@ -3926,7 +4784,7 @@
                 <a:effectLst/>
                 <a:latin typeface="Lufga" panose="00000500000000000000" pitchFamily="50" charset="0"/>
               </a:rPr>
-              <a:t>oslo</a:t>
+              <a:t>hong-kong</a:t>
             </a:r>
             <a:endParaRPr lang="en-US" dirty="0">
               <a:solidFill>
@@ -3939,10 +4797,10 @@
       </p:sp>
       <p:pic>
         <p:nvPicPr>
-          <p:cNvPr id="2" name="Picture 2" descr="AgentCon Oslo">
-            <a:extLst>
-              <a:ext uri="{FF2B5EF4-FFF2-40B4-BE49-F238E27FC236}">
-                <a16:creationId xmlns:a16="http://schemas.microsoft.com/office/drawing/2014/main" id="{8F952BF0-15F7-F5A6-5541-15CB45C9DA0F}"/>
+          <p:cNvPr id="1026" name="Picture 2" descr="HKIIT">
+            <a:extLst>
+              <a:ext uri="{FF2B5EF4-FFF2-40B4-BE49-F238E27FC236}">
+                <a16:creationId xmlns:a16="http://schemas.microsoft.com/office/drawing/2014/main" id="{4865FD84-9D29-5AC6-59D6-CE80D2DDEA3B}"/>
               </a:ext>
             </a:extLst>
           </p:cNvPr>
@@ -3966,8 +4824,149 @@
         </p:blipFill>
         <p:spPr bwMode="auto">
           <a:xfrm>
-            <a:off x="3419790" y="600965"/>
-            <a:ext cx="5352420" cy="3463780"/>
+            <a:off x="310449" y="6273226"/>
+            <a:ext cx="1754325" cy="584775"/>
+          </a:xfrm>
+          <a:prstGeom prst="rect">
+            <a:avLst/>
+          </a:prstGeom>
+          <a:noFill/>
+          <a:extLst>
+            <a:ext uri="{909E8E84-426E-40DD-AFC4-6F175D3DCCD1}">
+              <a14:hiddenFill xmlns:a14="http://schemas.microsoft.com/office/drawing/2010/main">
+                <a:solidFill>
+                  <a:srgbClr val="FFFFFF"/>
+                </a:solidFill>
+              </a14:hiddenFill>
+            </a:ext>
+          </a:extLst>
+        </p:spPr>
+      </p:pic>
+      <p:pic>
+        <p:nvPicPr>
+          <p:cNvPr id="1028" name="Picture 4" descr="AvePoint">
+            <a:extLst>
+              <a:ext uri="{FF2B5EF4-FFF2-40B4-BE49-F238E27FC236}">
+                <a16:creationId xmlns:a16="http://schemas.microsoft.com/office/drawing/2014/main" id="{A94E983C-36A2-987C-F342-C842FF6C98E4}"/>
+              </a:ext>
+            </a:extLst>
+          </p:cNvPr>
+          <p:cNvPicPr>
+            <a:picLocks noChangeAspect="1" noChangeArrowheads="1"/>
+          </p:cNvPicPr>
+          <p:nvPr/>
+        </p:nvPicPr>
+        <p:blipFill>
+          <a:blip r:embed="rId5">
+            <a:extLst>
+              <a:ext uri="{28A0092B-C50C-407E-A947-70E740481C1C}">
+                <a14:useLocalDpi xmlns:a14="http://schemas.microsoft.com/office/drawing/2010/main" val="0"/>
+              </a:ext>
+            </a:extLst>
+          </a:blip>
+          <a:srcRect/>
+          <a:stretch>
+            <a:fillRect/>
+          </a:stretch>
+        </p:blipFill>
+        <p:spPr bwMode="auto">
+          <a:xfrm>
+            <a:off x="2660693" y="6337450"/>
+            <a:ext cx="1365261" cy="455087"/>
+          </a:xfrm>
+          <a:prstGeom prst="rect">
+            <a:avLst/>
+          </a:prstGeom>
+          <a:noFill/>
+          <a:extLst>
+            <a:ext uri="{909E8E84-426E-40DD-AFC4-6F175D3DCCD1}">
+              <a14:hiddenFill xmlns:a14="http://schemas.microsoft.com/office/drawing/2010/main">
+                <a:solidFill>
+                  <a:srgbClr val="FFFFFF"/>
+                </a:solidFill>
+              </a14:hiddenFill>
+            </a:ext>
+          </a:extLst>
+        </p:spPr>
+      </p:pic>
+      <p:pic>
+        <p:nvPicPr>
+          <p:cNvPr id="1032" name="Picture 8" descr="MaivenPoint">
+            <a:extLst>
+              <a:ext uri="{FF2B5EF4-FFF2-40B4-BE49-F238E27FC236}">
+                <a16:creationId xmlns:a16="http://schemas.microsoft.com/office/drawing/2014/main" id="{7D6AD44E-2AFE-63BD-94E3-C845F38C605D}"/>
+              </a:ext>
+            </a:extLst>
+          </p:cNvPr>
+          <p:cNvPicPr>
+            <a:picLocks noChangeAspect="1" noChangeArrowheads="1"/>
+          </p:cNvPicPr>
+          <p:nvPr/>
+        </p:nvPicPr>
+        <p:blipFill>
+          <a:blip r:embed="rId6">
+            <a:extLst>
+              <a:ext uri="{28A0092B-C50C-407E-A947-70E740481C1C}">
+                <a14:useLocalDpi xmlns:a14="http://schemas.microsoft.com/office/drawing/2010/main" val="0"/>
+              </a:ext>
+            </a:extLst>
+          </a:blip>
+          <a:srcRect/>
+          <a:stretch>
+            <a:fillRect/>
+          </a:stretch>
+        </p:blipFill>
+        <p:spPr bwMode="auto">
+          <a:xfrm>
+            <a:off x="10246740" y="6273225"/>
+            <a:ext cx="1634811" cy="544937"/>
+          </a:xfrm>
+          <a:prstGeom prst="rect">
+            <a:avLst/>
+          </a:prstGeom>
+          <a:noFill/>
+          <a:extLst>
+            <a:ext uri="{909E8E84-426E-40DD-AFC4-6F175D3DCCD1}">
+              <a14:hiddenFill xmlns:a14="http://schemas.microsoft.com/office/drawing/2010/main">
+                <a:solidFill>
+                  <a:srgbClr val="FFFFFF"/>
+                </a:solidFill>
+              </a14:hiddenFill>
+            </a:ext>
+          </a:extLst>
+        </p:spPr>
+      </p:pic>
+      <p:pic>
+        <p:nvPicPr>
+          <p:cNvPr id="3" name="Picture 10" descr="AgentCon - Hong Kong">
+            <a:extLst>
+              <a:ext uri="{FF2B5EF4-FFF2-40B4-BE49-F238E27FC236}">
+                <a16:creationId xmlns:a16="http://schemas.microsoft.com/office/drawing/2014/main" id="{D1F2703B-3BEB-2E48-B19E-426170E16ADE}"/>
+              </a:ext>
+            </a:extLst>
+          </p:cNvPr>
+          <p:cNvPicPr>
+            <a:picLocks noChangeAspect="1" noChangeArrowheads="1"/>
+          </p:cNvPicPr>
+          <p:nvPr/>
+        </p:nvPicPr>
+        <p:blipFill>
+          <a:blip r:embed="rId7">
+            <a:extLst>
+              <a:ext uri="{28A0092B-C50C-407E-A947-70E740481C1C}">
+                <a14:useLocalDpi xmlns:a14="http://schemas.microsoft.com/office/drawing/2010/main" val="0"/>
+              </a:ext>
+            </a:extLst>
+          </a:blip>
+          <a:srcRect/>
+          <a:stretch>
+            <a:fillRect/>
+          </a:stretch>
+        </p:blipFill>
+        <p:spPr bwMode="auto">
+          <a:xfrm>
+            <a:off x="3216633" y="333690"/>
+            <a:ext cx="5758734" cy="3702043"/>
           </a:xfrm>
           <a:prstGeom prst="rect">
             <a:avLst/>
@@ -3994,6 +4993,18 @@
   <p:clrMapOvr>
     <a:masterClrMapping/>
   </p:clrMapOvr>
+  <mc:AlternateContent xmlns:mc="http://schemas.openxmlformats.org/markup-compatibility/2006">
+    <mc:Choice xmlns:p14="http://schemas.microsoft.com/office/powerpoint/2010/main" Requires="p14">
+      <p:transition spd="med" p14:dur="700">
+        <p:fade/>
+      </p:transition>
+    </mc:Choice>
+    <mc:Fallback>
+      <p:transition spd="med">
+        <p:fade/>
+      </p:transition>
+    </mc:Fallback>
+  </mc:AlternateContent>
 </p:sld>
 </file>
 
@@ -4016,6 +5027,70 @@
       </p:grpSpPr>
       <p:sp>
         <p:nvSpPr>
+          <p:cNvPr id="55" name="Rectangle 54">
+            <a:extLst>
+              <a:ext uri="{FF2B5EF4-FFF2-40B4-BE49-F238E27FC236}">
+                <a16:creationId xmlns:a16="http://schemas.microsoft.com/office/drawing/2014/main" id="{BD108B67-F22A-6165-F22D-2D400DB19FF9}"/>
+              </a:ext>
+            </a:extLst>
+          </p:cNvPr>
+          <p:cNvSpPr/>
+          <p:nvPr/>
+        </p:nvSpPr>
+        <p:spPr>
+          <a:xfrm>
+            <a:off x="0" y="-232229"/>
+            <a:ext cx="12192000" cy="7090230"/>
+          </a:xfrm>
+          <a:prstGeom prst="rect">
+            <a:avLst/>
+          </a:prstGeom>
+          <a:gradFill flip="none" rotWithShape="1">
+            <a:gsLst>
+              <a:gs pos="0">
+                <a:schemeClr val="bg1"/>
+              </a:gs>
+              <a:gs pos="84000">
+                <a:srgbClr val="DDD7C0">
+                  <a:alpha val="37000"/>
+                  <a:lumMod val="82000"/>
+                </a:srgbClr>
+              </a:gs>
+            </a:gsLst>
+            <a:lin ang="5400000" scaled="1"/>
+            <a:tileRect/>
+          </a:gradFill>
+          <a:ln>
+            <a:noFill/>
+          </a:ln>
+        </p:spPr>
+        <p:style>
+          <a:lnRef idx="2">
+            <a:schemeClr val="accent1">
+              <a:shade val="15000"/>
+            </a:schemeClr>
+          </a:lnRef>
+          <a:fillRef idx="1">
+            <a:schemeClr val="accent1"/>
+          </a:fillRef>
+          <a:effectRef idx="0">
+            <a:schemeClr val="accent1"/>
+          </a:effectRef>
+          <a:fontRef idx="minor">
+            <a:schemeClr val="lt1"/>
+          </a:fontRef>
+        </p:style>
+        <p:txBody>
+          <a:bodyPr rtlCol="0" anchor="ctr"/>
+          <a:lstStyle/>
+          <a:p>
+            <a:pPr algn="ctr"/>
+            <a:endParaRPr lang="en-US" dirty="0"/>
+          </a:p>
+        </p:txBody>
+      </p:sp>
+      <p:sp>
+        <p:nvSpPr>
           <p:cNvPr id="2" name="Title 1">
             <a:extLst>
               <a:ext uri="{FF2B5EF4-FFF2-40B4-BE49-F238E27FC236}">
@@ -4027,10 +5102,15 @@
             <a:spLocks noGrp="1"/>
           </p:cNvSpPr>
           <p:nvPr>
-            <p:ph type="title"/>
+            <p:ph type="title" idx="4294967295"/>
           </p:nvPr>
         </p:nvSpPr>
-        <p:spPr/>
+        <p:spPr>
+          <a:xfrm>
+            <a:off x="838200" y="365125"/>
+            <a:ext cx="10515600" cy="1325563"/>
+          </a:xfrm>
+        </p:spPr>
         <p:txBody>
           <a:bodyPr/>
           <a:lstStyle/>
@@ -4056,8 +5136,8 @@
         </p:nvGrpSpPr>
         <p:grpSpPr>
           <a:xfrm>
-            <a:off x="1633385" y="2766217"/>
-            <a:ext cx="3673173" cy="1325563"/>
+            <a:off x="658393" y="1998273"/>
+            <a:ext cx="1865096" cy="673070"/>
             <a:chOff x="1790702" y="3072372"/>
             <a:chExt cx="3673173" cy="1325563"/>
           </a:xfrm>
@@ -4157,7 +5237,7 @@
             <a:lstStyle/>
             <a:p>
               <a:pPr algn="ctr"/>
-              <a:endParaRPr lang="en-US"/>
+              <a:endParaRPr lang="en-US" dirty="0"/>
             </a:p>
           </p:txBody>
         </p:sp>
@@ -4176,8 +5256,8 @@
         </p:nvGrpSpPr>
         <p:grpSpPr>
           <a:xfrm>
-            <a:off x="6885442" y="2766218"/>
-            <a:ext cx="3673173" cy="1325563"/>
+            <a:off x="2898644" y="1994950"/>
+            <a:ext cx="1865096" cy="710006"/>
             <a:chOff x="6728126" y="4081199"/>
             <a:chExt cx="3673173" cy="1325563"/>
           </a:xfrm>
@@ -4210,8 +5290,8 @@
           </p:blipFill>
           <p:spPr>
             <a:xfrm>
-              <a:off x="7295588" y="4473573"/>
-              <a:ext cx="2482650" cy="718617"/>
+              <a:off x="7295587" y="4410430"/>
+              <a:ext cx="2700793" cy="781760"/>
             </a:xfrm>
             <a:prstGeom prst="rect">
               <a:avLst/>
@@ -4271,6 +5351,1107 @@
           </p:txBody>
         </p:sp>
       </p:grpSp>
+      <p:grpSp>
+        <p:nvGrpSpPr>
+          <p:cNvPr id="26" name="Group 25">
+            <a:extLst>
+              <a:ext uri="{FF2B5EF4-FFF2-40B4-BE49-F238E27FC236}">
+                <a16:creationId xmlns:a16="http://schemas.microsoft.com/office/drawing/2014/main" id="{B8B756AD-89DB-43EB-CF1E-1E3037D9E978}"/>
+              </a:ext>
+            </a:extLst>
+          </p:cNvPr>
+          <p:cNvGrpSpPr/>
+          <p:nvPr/>
+        </p:nvGrpSpPr>
+        <p:grpSpPr>
+          <a:xfrm>
+            <a:off x="5138895" y="1994950"/>
+            <a:ext cx="1865096" cy="710006"/>
+            <a:chOff x="6314277" y="1832972"/>
+            <a:chExt cx="2170347" cy="826209"/>
+          </a:xfrm>
+        </p:grpSpPr>
+        <p:sp>
+          <p:nvSpPr>
+            <p:cNvPr id="12" name="Rectangle: Rounded Corners 11">
+              <a:extLst>
+                <a:ext uri="{FF2B5EF4-FFF2-40B4-BE49-F238E27FC236}">
+                  <a16:creationId xmlns:a16="http://schemas.microsoft.com/office/drawing/2014/main" id="{3F3EB7EF-842B-23F6-E2D3-DB87039EC49D}"/>
+                </a:ext>
+              </a:extLst>
+            </p:cNvPr>
+            <p:cNvSpPr/>
+            <p:nvPr/>
+          </p:nvSpPr>
+          <p:spPr>
+            <a:xfrm>
+              <a:off x="6314277" y="1832972"/>
+              <a:ext cx="2170347" cy="826209"/>
+            </a:xfrm>
+            <a:prstGeom prst="roundRect">
+              <a:avLst/>
+            </a:prstGeom>
+            <a:noFill/>
+            <a:ln w="38100">
+              <a:solidFill>
+                <a:srgbClr val="DDD7C0"/>
+              </a:solidFill>
+            </a:ln>
+          </p:spPr>
+          <p:style>
+            <a:lnRef idx="2">
+              <a:schemeClr val="accent1">
+                <a:shade val="15000"/>
+              </a:schemeClr>
+            </a:lnRef>
+            <a:fillRef idx="1">
+              <a:schemeClr val="accent1"/>
+            </a:fillRef>
+            <a:effectRef idx="0">
+              <a:schemeClr val="accent1"/>
+            </a:effectRef>
+            <a:fontRef idx="minor">
+              <a:schemeClr val="lt1"/>
+            </a:fontRef>
+          </p:style>
+          <p:txBody>
+            <a:bodyPr rtlCol="0" anchor="ctr"/>
+            <a:lstStyle/>
+            <a:p>
+              <a:pPr algn="ctr"/>
+              <a:endParaRPr lang="en-US"/>
+            </a:p>
+          </p:txBody>
+        </p:sp>
+        <p:pic>
+          <p:nvPicPr>
+            <p:cNvPr id="17" name="Picture 2" descr="HKIIT">
+              <a:extLst>
+                <a:ext uri="{FF2B5EF4-FFF2-40B4-BE49-F238E27FC236}">
+                  <a16:creationId xmlns:a16="http://schemas.microsoft.com/office/drawing/2014/main" id="{F0234D16-1399-4F63-6EE9-49389BABF818}"/>
+                </a:ext>
+              </a:extLst>
+            </p:cNvPr>
+            <p:cNvPicPr>
+              <a:picLocks noChangeAspect="1" noChangeArrowheads="1"/>
+            </p:cNvPicPr>
+            <p:nvPr/>
+          </p:nvPicPr>
+          <p:blipFill rotWithShape="1">
+            <a:blip r:embed="rId4">
+              <a:extLst>
+                <a:ext uri="{28A0092B-C50C-407E-A947-70E740481C1C}">
+                  <a14:useLocalDpi xmlns:a14="http://schemas.microsoft.com/office/drawing/2010/main" val="0"/>
+                </a:ext>
+              </a:extLst>
+            </a:blip>
+            <a:srcRect l="23329" t="14807" r="26658" b="13608"/>
+            <a:stretch>
+              <a:fillRect/>
+            </a:stretch>
+          </p:blipFill>
+          <p:spPr bwMode="auto">
+            <a:xfrm>
+              <a:off x="6629399" y="1928812"/>
+              <a:ext cx="1352551" cy="645319"/>
+            </a:xfrm>
+            <a:prstGeom prst="rect">
+              <a:avLst/>
+            </a:prstGeom>
+            <a:noFill/>
+            <a:extLst>
+              <a:ext uri="{909E8E84-426E-40DD-AFC4-6F175D3DCCD1}">
+                <a14:hiddenFill xmlns:a14="http://schemas.microsoft.com/office/drawing/2010/main">
+                  <a:solidFill>
+                    <a:srgbClr val="FFFFFF"/>
+                  </a:solidFill>
+                </a14:hiddenFill>
+              </a:ext>
+            </a:extLst>
+          </p:spPr>
+        </p:pic>
+      </p:grpSp>
+      <p:grpSp>
+        <p:nvGrpSpPr>
+          <p:cNvPr id="19" name="Group 18">
+            <a:extLst>
+              <a:ext uri="{FF2B5EF4-FFF2-40B4-BE49-F238E27FC236}">
+                <a16:creationId xmlns:a16="http://schemas.microsoft.com/office/drawing/2014/main" id="{5D1FEA24-2A15-658B-3871-44DD9FEF527A}"/>
+              </a:ext>
+            </a:extLst>
+          </p:cNvPr>
+          <p:cNvGrpSpPr/>
+          <p:nvPr/>
+        </p:nvGrpSpPr>
+        <p:grpSpPr>
+          <a:xfrm>
+            <a:off x="7379145" y="1994950"/>
+            <a:ext cx="1865096" cy="710006"/>
+            <a:chOff x="8921178" y="1832972"/>
+            <a:chExt cx="2170347" cy="826209"/>
+          </a:xfrm>
+        </p:grpSpPr>
+        <p:sp>
+          <p:nvSpPr>
+            <p:cNvPr id="15" name="Rectangle: Rounded Corners 14">
+              <a:extLst>
+                <a:ext uri="{FF2B5EF4-FFF2-40B4-BE49-F238E27FC236}">
+                  <a16:creationId xmlns:a16="http://schemas.microsoft.com/office/drawing/2014/main" id="{62A25000-21A0-E31E-267B-13A327A6EBD6}"/>
+                </a:ext>
+              </a:extLst>
+            </p:cNvPr>
+            <p:cNvSpPr/>
+            <p:nvPr/>
+          </p:nvSpPr>
+          <p:spPr>
+            <a:xfrm>
+              <a:off x="8921178" y="1832972"/>
+              <a:ext cx="2170347" cy="826209"/>
+            </a:xfrm>
+            <a:prstGeom prst="roundRect">
+              <a:avLst/>
+            </a:prstGeom>
+            <a:noFill/>
+            <a:ln w="38100">
+              <a:solidFill>
+                <a:srgbClr val="DDD7C0"/>
+              </a:solidFill>
+            </a:ln>
+          </p:spPr>
+          <p:style>
+            <a:lnRef idx="2">
+              <a:schemeClr val="accent1">
+                <a:shade val="15000"/>
+              </a:schemeClr>
+            </a:lnRef>
+            <a:fillRef idx="1">
+              <a:schemeClr val="accent1"/>
+            </a:fillRef>
+            <a:effectRef idx="0">
+              <a:schemeClr val="accent1"/>
+            </a:effectRef>
+            <a:fontRef idx="minor">
+              <a:schemeClr val="lt1"/>
+            </a:fontRef>
+          </p:style>
+          <p:txBody>
+            <a:bodyPr rtlCol="0" anchor="ctr"/>
+            <a:lstStyle/>
+            <a:p>
+              <a:pPr algn="ctr"/>
+              <a:endParaRPr lang="en-US"/>
+            </a:p>
+          </p:txBody>
+        </p:sp>
+        <p:pic>
+          <p:nvPicPr>
+            <p:cNvPr id="18" name="Picture 4" descr="AvePoint">
+              <a:extLst>
+                <a:ext uri="{FF2B5EF4-FFF2-40B4-BE49-F238E27FC236}">
+                  <a16:creationId xmlns:a16="http://schemas.microsoft.com/office/drawing/2014/main" id="{097AD5CD-5197-3294-09B6-7E626EACE4AB}"/>
+                </a:ext>
+              </a:extLst>
+            </p:cNvPr>
+            <p:cNvPicPr>
+              <a:picLocks noChangeAspect="1" noChangeArrowheads="1"/>
+            </p:cNvPicPr>
+            <p:nvPr/>
+          </p:nvPicPr>
+          <p:blipFill>
+            <a:blip r:embed="rId5">
+              <a:extLst>
+                <a:ext uri="{28A0092B-C50C-407E-A947-70E740481C1C}">
+                  <a14:useLocalDpi xmlns:a14="http://schemas.microsoft.com/office/drawing/2010/main" val="0"/>
+                </a:ext>
+              </a:extLst>
+            </a:blip>
+            <a:srcRect/>
+            <a:stretch>
+              <a:fillRect/>
+            </a:stretch>
+          </p:blipFill>
+          <p:spPr bwMode="auto">
+            <a:xfrm>
+              <a:off x="8943010" y="1887990"/>
+              <a:ext cx="2148515" cy="716172"/>
+            </a:xfrm>
+            <a:prstGeom prst="rect">
+              <a:avLst/>
+            </a:prstGeom>
+            <a:noFill/>
+            <a:extLst>
+              <a:ext uri="{909E8E84-426E-40DD-AFC4-6F175D3DCCD1}">
+                <a14:hiddenFill xmlns:a14="http://schemas.microsoft.com/office/drawing/2010/main">
+                  <a:solidFill>
+                    <a:srgbClr val="FFFFFF"/>
+                  </a:solidFill>
+                </a14:hiddenFill>
+              </a:ext>
+            </a:extLst>
+          </p:spPr>
+        </p:pic>
+      </p:grpSp>
+      <p:grpSp>
+        <p:nvGrpSpPr>
+          <p:cNvPr id="24" name="Group 23">
+            <a:extLst>
+              <a:ext uri="{FF2B5EF4-FFF2-40B4-BE49-F238E27FC236}">
+                <a16:creationId xmlns:a16="http://schemas.microsoft.com/office/drawing/2014/main" id="{DBB8DEE7-4F24-737C-7A3B-F0B66B772951}"/>
+              </a:ext>
+            </a:extLst>
+          </p:cNvPr>
+          <p:cNvGrpSpPr/>
+          <p:nvPr/>
+        </p:nvGrpSpPr>
+        <p:grpSpPr>
+          <a:xfrm>
+            <a:off x="9620090" y="1979805"/>
+            <a:ext cx="1913518" cy="710006"/>
+            <a:chOff x="2957494" y="3155411"/>
+            <a:chExt cx="2226693" cy="826209"/>
+          </a:xfrm>
+        </p:grpSpPr>
+        <p:sp>
+          <p:nvSpPr>
+            <p:cNvPr id="21" name="Rectangle: Rounded Corners 20">
+              <a:extLst>
+                <a:ext uri="{FF2B5EF4-FFF2-40B4-BE49-F238E27FC236}">
+                  <a16:creationId xmlns:a16="http://schemas.microsoft.com/office/drawing/2014/main" id="{DE01D5EE-62A6-09DC-8917-E7E791D5BC6E}"/>
+                </a:ext>
+              </a:extLst>
+            </p:cNvPr>
+            <p:cNvSpPr/>
+            <p:nvPr/>
+          </p:nvSpPr>
+          <p:spPr>
+            <a:xfrm>
+              <a:off x="2957494" y="3155411"/>
+              <a:ext cx="2170347" cy="826209"/>
+            </a:xfrm>
+            <a:prstGeom prst="roundRect">
+              <a:avLst/>
+            </a:prstGeom>
+            <a:noFill/>
+            <a:ln w="38100">
+              <a:solidFill>
+                <a:srgbClr val="DDD7C0"/>
+              </a:solidFill>
+            </a:ln>
+          </p:spPr>
+          <p:style>
+            <a:lnRef idx="2">
+              <a:schemeClr val="accent1">
+                <a:shade val="15000"/>
+              </a:schemeClr>
+            </a:lnRef>
+            <a:fillRef idx="1">
+              <a:schemeClr val="accent1"/>
+            </a:fillRef>
+            <a:effectRef idx="0">
+              <a:schemeClr val="accent1"/>
+            </a:effectRef>
+            <a:fontRef idx="minor">
+              <a:schemeClr val="lt1"/>
+            </a:fontRef>
+          </p:style>
+          <p:txBody>
+            <a:bodyPr rtlCol="0" anchor="ctr"/>
+            <a:lstStyle/>
+            <a:p>
+              <a:pPr algn="ctr"/>
+              <a:endParaRPr lang="en-US"/>
+            </a:p>
+          </p:txBody>
+        </p:sp>
+        <p:pic>
+          <p:nvPicPr>
+            <p:cNvPr id="23" name="Picture 8" descr="MaivenPoint">
+              <a:extLst>
+                <a:ext uri="{FF2B5EF4-FFF2-40B4-BE49-F238E27FC236}">
+                  <a16:creationId xmlns:a16="http://schemas.microsoft.com/office/drawing/2014/main" id="{B7AFD78C-F2D0-11AC-D91F-CDCA221D8912}"/>
+                </a:ext>
+              </a:extLst>
+            </p:cNvPr>
+            <p:cNvPicPr>
+              <a:picLocks noChangeAspect="1" noChangeArrowheads="1"/>
+            </p:cNvPicPr>
+            <p:nvPr/>
+          </p:nvPicPr>
+          <p:blipFill>
+            <a:blip r:embed="rId6">
+              <a:extLst>
+                <a:ext uri="{28A0092B-C50C-407E-A947-70E740481C1C}">
+                  <a14:useLocalDpi xmlns:a14="http://schemas.microsoft.com/office/drawing/2010/main" val="0"/>
+                </a:ext>
+              </a:extLst>
+            </a:blip>
+            <a:srcRect/>
+            <a:stretch>
+              <a:fillRect/>
+            </a:stretch>
+          </p:blipFill>
+          <p:spPr bwMode="auto">
+            <a:xfrm>
+              <a:off x="2957494" y="3194525"/>
+              <a:ext cx="2226693" cy="742231"/>
+            </a:xfrm>
+            <a:prstGeom prst="rect">
+              <a:avLst/>
+            </a:prstGeom>
+            <a:noFill/>
+            <a:extLst>
+              <a:ext uri="{909E8E84-426E-40DD-AFC4-6F175D3DCCD1}">
+                <a14:hiddenFill xmlns:a14="http://schemas.microsoft.com/office/drawing/2010/main">
+                  <a:solidFill>
+                    <a:srgbClr val="FFFFFF"/>
+                  </a:solidFill>
+                </a14:hiddenFill>
+              </a:ext>
+            </a:extLst>
+          </p:spPr>
+        </p:pic>
+      </p:grpSp>
+      <p:sp>
+        <p:nvSpPr>
+          <p:cNvPr id="30" name="Rectangle: Rounded Corners 29">
+            <a:extLst>
+              <a:ext uri="{FF2B5EF4-FFF2-40B4-BE49-F238E27FC236}">
+                <a16:creationId xmlns:a16="http://schemas.microsoft.com/office/drawing/2014/main" id="{74B0B1B4-98A7-8114-23D2-CF90A8444EB5}"/>
+              </a:ext>
+            </a:extLst>
+          </p:cNvPr>
+          <p:cNvSpPr/>
+          <p:nvPr/>
+        </p:nvSpPr>
+        <p:spPr>
+          <a:xfrm>
+            <a:off x="1903361" y="3256922"/>
+            <a:ext cx="1464679" cy="534655"/>
+          </a:xfrm>
+          <a:prstGeom prst="roundRect">
+            <a:avLst/>
+          </a:prstGeom>
+          <a:noFill/>
+          <a:ln w="28575">
+            <a:solidFill>
+              <a:srgbClr val="DDD7C0"/>
+            </a:solidFill>
+          </a:ln>
+        </p:spPr>
+        <p:style>
+          <a:lnRef idx="2">
+            <a:schemeClr val="accent1">
+              <a:shade val="15000"/>
+            </a:schemeClr>
+          </a:lnRef>
+          <a:fillRef idx="1">
+            <a:schemeClr val="accent1"/>
+          </a:fillRef>
+          <a:effectRef idx="0">
+            <a:schemeClr val="accent1"/>
+          </a:effectRef>
+          <a:fontRef idx="minor">
+            <a:schemeClr val="lt1"/>
+          </a:fontRef>
+        </p:style>
+        <p:txBody>
+          <a:bodyPr rtlCol="0" anchor="ctr"/>
+          <a:lstStyle/>
+          <a:p>
+            <a:pPr algn="ctr"/>
+            <a:endParaRPr lang="en-US"/>
+          </a:p>
+        </p:txBody>
+      </p:sp>
+      <p:pic>
+        <p:nvPicPr>
+          <p:cNvPr id="2052" name="Picture 4" descr="Singapore Global Network Logo">
+            <a:extLst>
+              <a:ext uri="{FF2B5EF4-FFF2-40B4-BE49-F238E27FC236}">
+                <a16:creationId xmlns:a16="http://schemas.microsoft.com/office/drawing/2014/main" id="{26205BC3-1421-3290-81AB-A6BA68456F9A}"/>
+              </a:ext>
+            </a:extLst>
+          </p:cNvPr>
+          <p:cNvPicPr>
+            <a:picLocks noChangeAspect="1" noChangeArrowheads="1"/>
+          </p:cNvPicPr>
+          <p:nvPr/>
+        </p:nvPicPr>
+        <p:blipFill>
+          <a:blip r:embed="rId7">
+            <a:extLst>
+              <a:ext uri="{28A0092B-C50C-407E-A947-70E740481C1C}">
+                <a14:useLocalDpi xmlns:a14="http://schemas.microsoft.com/office/drawing/2010/main" val="0"/>
+              </a:ext>
+            </a:extLst>
+          </a:blip>
+          <a:srcRect/>
+          <a:stretch>
+            <a:fillRect/>
+          </a:stretch>
+        </p:blipFill>
+        <p:spPr bwMode="auto">
+          <a:xfrm>
+            <a:off x="2390581" y="3313075"/>
+            <a:ext cx="608699" cy="415944"/>
+          </a:xfrm>
+          <a:prstGeom prst="rect">
+            <a:avLst/>
+          </a:prstGeom>
+          <a:noFill/>
+          <a:extLst>
+            <a:ext uri="{909E8E84-426E-40DD-AFC4-6F175D3DCCD1}">
+              <a14:hiddenFill xmlns:a14="http://schemas.microsoft.com/office/drawing/2010/main">
+                <a:solidFill>
+                  <a:srgbClr val="FFFFFF"/>
+                </a:solidFill>
+              </a14:hiddenFill>
+            </a:ext>
+          </a:extLst>
+        </p:spPr>
+      </p:pic>
+      <p:sp>
+        <p:nvSpPr>
+          <p:cNvPr id="32" name="Rectangle: Rounded Corners 31">
+            <a:extLst>
+              <a:ext uri="{FF2B5EF4-FFF2-40B4-BE49-F238E27FC236}">
+                <a16:creationId xmlns:a16="http://schemas.microsoft.com/office/drawing/2014/main" id="{EAB39B48-AECB-9382-A6CF-6216A4BCC89A}"/>
+              </a:ext>
+            </a:extLst>
+          </p:cNvPr>
+          <p:cNvSpPr/>
+          <p:nvPr/>
+        </p:nvSpPr>
+        <p:spPr>
+          <a:xfrm>
+            <a:off x="4249994" y="3256922"/>
+            <a:ext cx="1464679" cy="534655"/>
+          </a:xfrm>
+          <a:prstGeom prst="roundRect">
+            <a:avLst/>
+          </a:prstGeom>
+          <a:noFill/>
+          <a:ln w="28575">
+            <a:solidFill>
+              <a:srgbClr val="DDD7C0"/>
+            </a:solidFill>
+          </a:ln>
+        </p:spPr>
+        <p:style>
+          <a:lnRef idx="2">
+            <a:schemeClr val="accent1">
+              <a:shade val="15000"/>
+            </a:schemeClr>
+          </a:lnRef>
+          <a:fillRef idx="1">
+            <a:schemeClr val="accent1"/>
+          </a:fillRef>
+          <a:effectRef idx="0">
+            <a:schemeClr val="accent1"/>
+          </a:effectRef>
+          <a:fontRef idx="minor">
+            <a:schemeClr val="lt1"/>
+          </a:fontRef>
+        </p:style>
+        <p:txBody>
+          <a:bodyPr rtlCol="0" anchor="ctr"/>
+          <a:lstStyle/>
+          <a:p>
+            <a:pPr algn="ctr"/>
+            <a:endParaRPr lang="en-US"/>
+          </a:p>
+        </p:txBody>
+      </p:sp>
+      <p:sp>
+        <p:nvSpPr>
+          <p:cNvPr id="33" name="Rectangle: Rounded Corners 32">
+            <a:extLst>
+              <a:ext uri="{FF2B5EF4-FFF2-40B4-BE49-F238E27FC236}">
+                <a16:creationId xmlns:a16="http://schemas.microsoft.com/office/drawing/2014/main" id="{DE2A5BC4-6487-B602-F44A-63A5BDA9DFF9}"/>
+              </a:ext>
+            </a:extLst>
+          </p:cNvPr>
+          <p:cNvSpPr/>
+          <p:nvPr/>
+        </p:nvSpPr>
+        <p:spPr>
+          <a:xfrm>
+            <a:off x="6596627" y="3256921"/>
+            <a:ext cx="1464679" cy="534655"/>
+          </a:xfrm>
+          <a:prstGeom prst="roundRect">
+            <a:avLst/>
+          </a:prstGeom>
+          <a:noFill/>
+          <a:ln w="28575">
+            <a:solidFill>
+              <a:srgbClr val="DDD7C0"/>
+            </a:solidFill>
+          </a:ln>
+        </p:spPr>
+        <p:style>
+          <a:lnRef idx="2">
+            <a:schemeClr val="accent1">
+              <a:shade val="15000"/>
+            </a:schemeClr>
+          </a:lnRef>
+          <a:fillRef idx="1">
+            <a:schemeClr val="accent1"/>
+          </a:fillRef>
+          <a:effectRef idx="0">
+            <a:schemeClr val="accent1"/>
+          </a:effectRef>
+          <a:fontRef idx="minor">
+            <a:schemeClr val="lt1"/>
+          </a:fontRef>
+        </p:style>
+        <p:txBody>
+          <a:bodyPr rtlCol="0" anchor="ctr"/>
+          <a:lstStyle/>
+          <a:p>
+            <a:pPr algn="ctr"/>
+            <a:endParaRPr lang="en-US"/>
+          </a:p>
+        </p:txBody>
+      </p:sp>
+      <p:sp>
+        <p:nvSpPr>
+          <p:cNvPr id="34" name="Rectangle: Rounded Corners 33">
+            <a:extLst>
+              <a:ext uri="{FF2B5EF4-FFF2-40B4-BE49-F238E27FC236}">
+                <a16:creationId xmlns:a16="http://schemas.microsoft.com/office/drawing/2014/main" id="{AF4C186F-0507-BA01-5FB2-548B083BBEB6}"/>
+              </a:ext>
+            </a:extLst>
+          </p:cNvPr>
+          <p:cNvSpPr/>
+          <p:nvPr/>
+        </p:nvSpPr>
+        <p:spPr>
+          <a:xfrm>
+            <a:off x="8943260" y="3256920"/>
+            <a:ext cx="1464679" cy="534655"/>
+          </a:xfrm>
+          <a:prstGeom prst="roundRect">
+            <a:avLst/>
+          </a:prstGeom>
+          <a:noFill/>
+          <a:ln w="28575">
+            <a:solidFill>
+              <a:srgbClr val="DDD7C0"/>
+            </a:solidFill>
+          </a:ln>
+        </p:spPr>
+        <p:style>
+          <a:lnRef idx="2">
+            <a:schemeClr val="accent1">
+              <a:shade val="15000"/>
+            </a:schemeClr>
+          </a:lnRef>
+          <a:fillRef idx="1">
+            <a:schemeClr val="accent1"/>
+          </a:fillRef>
+          <a:effectRef idx="0">
+            <a:schemeClr val="accent1"/>
+          </a:effectRef>
+          <a:fontRef idx="minor">
+            <a:schemeClr val="lt1"/>
+          </a:fontRef>
+        </p:style>
+        <p:txBody>
+          <a:bodyPr rtlCol="0" anchor="ctr"/>
+          <a:lstStyle/>
+          <a:p>
+            <a:pPr algn="ctr"/>
+            <a:endParaRPr lang="en-US"/>
+          </a:p>
+        </p:txBody>
+      </p:sp>
+      <p:pic>
+        <p:nvPicPr>
+          <p:cNvPr id="2054" name="Picture 6" descr="Hong Kong Azure User Group">
+            <a:extLst>
+              <a:ext uri="{FF2B5EF4-FFF2-40B4-BE49-F238E27FC236}">
+                <a16:creationId xmlns:a16="http://schemas.microsoft.com/office/drawing/2014/main" id="{D11EBD0A-DF5C-67C8-A9B2-AE25A2DE46A8}"/>
+              </a:ext>
+            </a:extLst>
+          </p:cNvPr>
+          <p:cNvPicPr>
+            <a:picLocks noChangeAspect="1" noChangeArrowheads="1"/>
+          </p:cNvPicPr>
+          <p:nvPr/>
+        </p:nvPicPr>
+        <p:blipFill rotWithShape="1">
+          <a:blip r:embed="rId8">
+            <a:extLst>
+              <a:ext uri="{BEBA8EAE-BF5A-486C-A8C5-ECC9F3942E4B}">
+                <a14:imgProps xmlns:a14="http://schemas.microsoft.com/office/drawing/2010/main">
+                  <a14:imgLayer r:embed="rId9">
+                    <a14:imgEffect>
+                      <a14:backgroundRemoval t="10000" b="90000" l="10000" r="90000"/>
+                    </a14:imgEffect>
+                  </a14:imgLayer>
+                </a14:imgProps>
+              </a:ext>
+              <a:ext uri="{28A0092B-C50C-407E-A947-70E740481C1C}">
+                <a14:useLocalDpi xmlns:a14="http://schemas.microsoft.com/office/drawing/2010/main" val="0"/>
+              </a:ext>
+            </a:extLst>
+          </a:blip>
+          <a:srcRect l="29052" r="30352" b="14823"/>
+          <a:stretch>
+            <a:fillRect/>
+          </a:stretch>
+        </p:blipFill>
+        <p:spPr bwMode="auto">
+          <a:xfrm>
+            <a:off x="4651458" y="3272002"/>
+            <a:ext cx="704767" cy="492905"/>
+          </a:xfrm>
+          <a:prstGeom prst="rect">
+            <a:avLst/>
+          </a:prstGeom>
+          <a:noFill/>
+          <a:extLst>
+            <a:ext uri="{909E8E84-426E-40DD-AFC4-6F175D3DCCD1}">
+              <a14:hiddenFill xmlns:a14="http://schemas.microsoft.com/office/drawing/2010/main">
+                <a:solidFill>
+                  <a:srgbClr val="FFFFFF"/>
+                </a:solidFill>
+              </a14:hiddenFill>
+            </a:ext>
+          </a:extLst>
+        </p:spPr>
+      </p:pic>
+      <p:pic>
+        <p:nvPicPr>
+          <p:cNvPr id="2056" name="Picture 8" descr="AWS Hong Kong User Group">
+            <a:extLst>
+              <a:ext uri="{FF2B5EF4-FFF2-40B4-BE49-F238E27FC236}">
+                <a16:creationId xmlns:a16="http://schemas.microsoft.com/office/drawing/2014/main" id="{5C212294-1E22-0BA9-E3BA-5C5531AF8751}"/>
+              </a:ext>
+            </a:extLst>
+          </p:cNvPr>
+          <p:cNvPicPr>
+            <a:picLocks noChangeAspect="1" noChangeArrowheads="1"/>
+          </p:cNvPicPr>
+          <p:nvPr/>
+        </p:nvPicPr>
+        <p:blipFill>
+          <a:blip r:embed="rId10">
+            <a:extLst>
+              <a:ext uri="{28A0092B-C50C-407E-A947-70E740481C1C}">
+                <a14:useLocalDpi xmlns:a14="http://schemas.microsoft.com/office/drawing/2010/main" val="0"/>
+              </a:ext>
+            </a:extLst>
+          </a:blip>
+          <a:srcRect/>
+          <a:stretch>
+            <a:fillRect/>
+          </a:stretch>
+        </p:blipFill>
+        <p:spPr bwMode="auto">
+          <a:xfrm>
+            <a:off x="6717995" y="3324779"/>
+            <a:ext cx="1162050" cy="387350"/>
+          </a:xfrm>
+          <a:prstGeom prst="rect">
+            <a:avLst/>
+          </a:prstGeom>
+          <a:noFill/>
+          <a:extLst>
+            <a:ext uri="{909E8E84-426E-40DD-AFC4-6F175D3DCCD1}">
+              <a14:hiddenFill xmlns:a14="http://schemas.microsoft.com/office/drawing/2010/main">
+                <a:solidFill>
+                  <a:srgbClr val="FFFFFF"/>
+                </a:solidFill>
+              </a14:hiddenFill>
+            </a:ext>
+          </a:extLst>
+        </p:spPr>
+      </p:pic>
+      <p:pic>
+        <p:nvPicPr>
+          <p:cNvPr id="2058" name="Picture 10" descr="AWS AI User Group">
+            <a:extLst>
+              <a:ext uri="{FF2B5EF4-FFF2-40B4-BE49-F238E27FC236}">
+                <a16:creationId xmlns:a16="http://schemas.microsoft.com/office/drawing/2014/main" id="{BA42C538-036F-A490-FBB7-1284DC908D5F}"/>
+              </a:ext>
+            </a:extLst>
+          </p:cNvPr>
+          <p:cNvPicPr>
+            <a:picLocks noChangeAspect="1" noChangeArrowheads="1"/>
+          </p:cNvPicPr>
+          <p:nvPr/>
+        </p:nvPicPr>
+        <p:blipFill>
+          <a:blip r:embed="rId11">
+            <a:extLst>
+              <a:ext uri="{BEBA8EAE-BF5A-486C-A8C5-ECC9F3942E4B}">
+                <a14:imgProps xmlns:a14="http://schemas.microsoft.com/office/drawing/2010/main">
+                  <a14:imgLayer r:embed="rId12">
+                    <a14:imgEffect>
+                      <a14:backgroundRemoval t="10000" b="90000" l="10000" r="90000"/>
+                    </a14:imgEffect>
+                  </a14:imgLayer>
+                </a14:imgProps>
+              </a:ext>
+              <a:ext uri="{28A0092B-C50C-407E-A947-70E740481C1C}">
+                <a14:useLocalDpi xmlns:a14="http://schemas.microsoft.com/office/drawing/2010/main" val="0"/>
+              </a:ext>
+            </a:extLst>
+          </a:blip>
+          <a:srcRect/>
+          <a:stretch>
+            <a:fillRect/>
+          </a:stretch>
+        </p:blipFill>
+        <p:spPr bwMode="auto">
+          <a:xfrm>
+            <a:off x="8943260" y="3285684"/>
+            <a:ext cx="1464680" cy="488227"/>
+          </a:xfrm>
+          <a:prstGeom prst="rect">
+            <a:avLst/>
+          </a:prstGeom>
+          <a:noFill/>
+          <a:extLst>
+            <a:ext uri="{909E8E84-426E-40DD-AFC4-6F175D3DCCD1}">
+              <a14:hiddenFill xmlns:a14="http://schemas.microsoft.com/office/drawing/2010/main">
+                <a:solidFill>
+                  <a:srgbClr val="FFFFFF"/>
+                </a:solidFill>
+              </a14:hiddenFill>
+            </a:ext>
+          </a:extLst>
+        </p:spPr>
+      </p:pic>
+      <p:grpSp>
+        <p:nvGrpSpPr>
+          <p:cNvPr id="47" name="Group 46">
+            <a:extLst>
+              <a:ext uri="{FF2B5EF4-FFF2-40B4-BE49-F238E27FC236}">
+                <a16:creationId xmlns:a16="http://schemas.microsoft.com/office/drawing/2014/main" id="{18F89D21-C32E-E284-44D4-7B6F743D63A7}"/>
+              </a:ext>
+            </a:extLst>
+          </p:cNvPr>
+          <p:cNvGrpSpPr/>
+          <p:nvPr/>
+        </p:nvGrpSpPr>
+        <p:grpSpPr>
+          <a:xfrm>
+            <a:off x="3186779" y="4343540"/>
+            <a:ext cx="1464679" cy="534655"/>
+            <a:chOff x="3186779" y="4179083"/>
+            <a:chExt cx="1464679" cy="534655"/>
+          </a:xfrm>
+        </p:grpSpPr>
+        <p:sp>
+          <p:nvSpPr>
+            <p:cNvPr id="35" name="Rectangle: Rounded Corners 34">
+              <a:extLst>
+                <a:ext uri="{FF2B5EF4-FFF2-40B4-BE49-F238E27FC236}">
+                  <a16:creationId xmlns:a16="http://schemas.microsoft.com/office/drawing/2014/main" id="{3C6BEE88-4761-CCCB-9371-28154F9B5EA2}"/>
+                </a:ext>
+              </a:extLst>
+            </p:cNvPr>
+            <p:cNvSpPr/>
+            <p:nvPr/>
+          </p:nvSpPr>
+          <p:spPr>
+            <a:xfrm>
+              <a:off x="3186779" y="4179083"/>
+              <a:ext cx="1464679" cy="534655"/>
+            </a:xfrm>
+            <a:prstGeom prst="roundRect">
+              <a:avLst/>
+            </a:prstGeom>
+            <a:noFill/>
+            <a:ln w="28575">
+              <a:solidFill>
+                <a:srgbClr val="DDD7C0"/>
+              </a:solidFill>
+            </a:ln>
+          </p:spPr>
+          <p:style>
+            <a:lnRef idx="2">
+              <a:schemeClr val="accent1">
+                <a:shade val="15000"/>
+              </a:schemeClr>
+            </a:lnRef>
+            <a:fillRef idx="1">
+              <a:schemeClr val="accent1"/>
+            </a:fillRef>
+            <a:effectRef idx="0">
+              <a:schemeClr val="accent1"/>
+            </a:effectRef>
+            <a:fontRef idx="minor">
+              <a:schemeClr val="lt1"/>
+            </a:fontRef>
+          </p:style>
+          <p:txBody>
+            <a:bodyPr rtlCol="0" anchor="ctr"/>
+            <a:lstStyle/>
+            <a:p>
+              <a:pPr algn="ctr"/>
+              <a:endParaRPr lang="en-US"/>
+            </a:p>
+          </p:txBody>
+        </p:sp>
+        <p:pic>
+          <p:nvPicPr>
+            <p:cNvPr id="40" name="Picture 39">
+              <a:extLst>
+                <a:ext uri="{FF2B5EF4-FFF2-40B4-BE49-F238E27FC236}">
+                  <a16:creationId xmlns:a16="http://schemas.microsoft.com/office/drawing/2014/main" id="{F998CE5B-DDE0-35F0-0BD8-671753C583E8}"/>
+                </a:ext>
+              </a:extLst>
+            </p:cNvPr>
+            <p:cNvPicPr>
+              <a:picLocks noChangeAspect="1"/>
+            </p:cNvPicPr>
+            <p:nvPr/>
+          </p:nvPicPr>
+          <p:blipFill>
+            <a:blip r:embed="rId13">
+              <a:extLst>
+                <a:ext uri="{28A0092B-C50C-407E-A947-70E740481C1C}">
+                  <a14:useLocalDpi xmlns:a14="http://schemas.microsoft.com/office/drawing/2010/main" val="0"/>
+                </a:ext>
+              </a:extLst>
+            </a:blip>
+            <a:stretch>
+              <a:fillRect/>
+            </a:stretch>
+          </p:blipFill>
+          <p:spPr>
+            <a:xfrm>
+              <a:off x="3261309" y="4227139"/>
+              <a:ext cx="1315617" cy="438539"/>
+            </a:xfrm>
+            <a:prstGeom prst="rect">
+              <a:avLst/>
+            </a:prstGeom>
+          </p:spPr>
+        </p:pic>
+      </p:grpSp>
+      <p:grpSp>
+        <p:nvGrpSpPr>
+          <p:cNvPr id="46" name="Group 45">
+            <a:extLst>
+              <a:ext uri="{FF2B5EF4-FFF2-40B4-BE49-F238E27FC236}">
+                <a16:creationId xmlns:a16="http://schemas.microsoft.com/office/drawing/2014/main" id="{5408DAEE-4565-AC76-5967-ADF99A4132BA}"/>
+              </a:ext>
+            </a:extLst>
+          </p:cNvPr>
+          <p:cNvGrpSpPr/>
+          <p:nvPr/>
+        </p:nvGrpSpPr>
+        <p:grpSpPr>
+          <a:xfrm>
+            <a:off x="5533412" y="4343540"/>
+            <a:ext cx="1464679" cy="534655"/>
+            <a:chOff x="5533412" y="4179083"/>
+            <a:chExt cx="1464679" cy="534655"/>
+          </a:xfrm>
+        </p:grpSpPr>
+        <p:sp>
+          <p:nvSpPr>
+            <p:cNvPr id="36" name="Rectangle: Rounded Corners 35">
+              <a:extLst>
+                <a:ext uri="{FF2B5EF4-FFF2-40B4-BE49-F238E27FC236}">
+                  <a16:creationId xmlns:a16="http://schemas.microsoft.com/office/drawing/2014/main" id="{78192C9F-C880-4A43-0F2A-8A9843FE991D}"/>
+                </a:ext>
+              </a:extLst>
+            </p:cNvPr>
+            <p:cNvSpPr/>
+            <p:nvPr/>
+          </p:nvSpPr>
+          <p:spPr>
+            <a:xfrm>
+              <a:off x="5533412" y="4179083"/>
+              <a:ext cx="1464679" cy="534655"/>
+            </a:xfrm>
+            <a:prstGeom prst="roundRect">
+              <a:avLst/>
+            </a:prstGeom>
+            <a:noFill/>
+            <a:ln w="28575">
+              <a:solidFill>
+                <a:srgbClr val="DDD7C0"/>
+              </a:solidFill>
+            </a:ln>
+          </p:spPr>
+          <p:style>
+            <a:lnRef idx="2">
+              <a:schemeClr val="accent1">
+                <a:shade val="15000"/>
+              </a:schemeClr>
+            </a:lnRef>
+            <a:fillRef idx="1">
+              <a:schemeClr val="accent1"/>
+            </a:fillRef>
+            <a:effectRef idx="0">
+              <a:schemeClr val="accent1"/>
+            </a:effectRef>
+            <a:fontRef idx="minor">
+              <a:schemeClr val="lt1"/>
+            </a:fontRef>
+          </p:style>
+          <p:txBody>
+            <a:bodyPr rtlCol="0" anchor="ctr"/>
+            <a:lstStyle/>
+            <a:p>
+              <a:pPr algn="ctr"/>
+              <a:endParaRPr lang="en-US"/>
+            </a:p>
+          </p:txBody>
+        </p:sp>
+        <p:pic>
+          <p:nvPicPr>
+            <p:cNvPr id="42" name="Picture 41">
+              <a:extLst>
+                <a:ext uri="{FF2B5EF4-FFF2-40B4-BE49-F238E27FC236}">
+                  <a16:creationId xmlns:a16="http://schemas.microsoft.com/office/drawing/2014/main" id="{5A1C4DAF-F103-7FD3-6FCA-D51DEAA28B8D}"/>
+                </a:ext>
+              </a:extLst>
+            </p:cNvPr>
+            <p:cNvPicPr>
+              <a:picLocks noChangeAspect="1"/>
+            </p:cNvPicPr>
+            <p:nvPr/>
+          </p:nvPicPr>
+          <p:blipFill>
+            <a:blip r:embed="rId14">
+              <a:extLst>
+                <a:ext uri="{28A0092B-C50C-407E-A947-70E740481C1C}">
+                  <a14:useLocalDpi xmlns:a14="http://schemas.microsoft.com/office/drawing/2010/main" val="0"/>
+                </a:ext>
+              </a:extLst>
+            </a:blip>
+            <a:stretch>
+              <a:fillRect/>
+            </a:stretch>
+          </p:blipFill>
+          <p:spPr>
+            <a:xfrm>
+              <a:off x="5630300" y="4236867"/>
+              <a:ext cx="1242940" cy="414313"/>
+            </a:xfrm>
+            <a:prstGeom prst="rect">
+              <a:avLst/>
+            </a:prstGeom>
+          </p:spPr>
+        </p:pic>
+      </p:grpSp>
+      <p:grpSp>
+        <p:nvGrpSpPr>
+          <p:cNvPr id="45" name="Group 44">
+            <a:extLst>
+              <a:ext uri="{FF2B5EF4-FFF2-40B4-BE49-F238E27FC236}">
+                <a16:creationId xmlns:a16="http://schemas.microsoft.com/office/drawing/2014/main" id="{2532406E-C345-0D26-27B5-AC73D74B2AB2}"/>
+              </a:ext>
+            </a:extLst>
+          </p:cNvPr>
+          <p:cNvGrpSpPr/>
+          <p:nvPr/>
+        </p:nvGrpSpPr>
+        <p:grpSpPr>
+          <a:xfrm>
+            <a:off x="7880045" y="4343539"/>
+            <a:ext cx="1464679" cy="534655"/>
+            <a:chOff x="7880045" y="4179082"/>
+            <a:chExt cx="1464679" cy="534655"/>
+          </a:xfrm>
+        </p:grpSpPr>
+        <p:sp>
+          <p:nvSpPr>
+            <p:cNvPr id="37" name="Rectangle: Rounded Corners 36">
+              <a:extLst>
+                <a:ext uri="{FF2B5EF4-FFF2-40B4-BE49-F238E27FC236}">
+                  <a16:creationId xmlns:a16="http://schemas.microsoft.com/office/drawing/2014/main" id="{63EC90C6-92EF-904D-942F-C0CB73EF9ED2}"/>
+                </a:ext>
+              </a:extLst>
+            </p:cNvPr>
+            <p:cNvSpPr/>
+            <p:nvPr/>
+          </p:nvSpPr>
+          <p:spPr>
+            <a:xfrm>
+              <a:off x="7880045" y="4179082"/>
+              <a:ext cx="1464679" cy="534655"/>
+            </a:xfrm>
+            <a:prstGeom prst="roundRect">
+              <a:avLst/>
+            </a:prstGeom>
+            <a:noFill/>
+            <a:ln w="28575">
+              <a:solidFill>
+                <a:srgbClr val="DDD7C0"/>
+              </a:solidFill>
+            </a:ln>
+          </p:spPr>
+          <p:style>
+            <a:lnRef idx="2">
+              <a:schemeClr val="accent1">
+                <a:shade val="15000"/>
+              </a:schemeClr>
+            </a:lnRef>
+            <a:fillRef idx="1">
+              <a:schemeClr val="accent1"/>
+            </a:fillRef>
+            <a:effectRef idx="0">
+              <a:schemeClr val="accent1"/>
+            </a:effectRef>
+            <a:fontRef idx="minor">
+              <a:schemeClr val="lt1"/>
+            </a:fontRef>
+          </p:style>
+          <p:txBody>
+            <a:bodyPr rtlCol="0" anchor="ctr"/>
+            <a:lstStyle/>
+            <a:p>
+              <a:pPr algn="ctr"/>
+              <a:endParaRPr lang="en-US"/>
+            </a:p>
+          </p:txBody>
+        </p:sp>
+        <p:pic>
+          <p:nvPicPr>
+            <p:cNvPr id="44" name="Picture 43">
+              <a:extLst>
+                <a:ext uri="{FF2B5EF4-FFF2-40B4-BE49-F238E27FC236}">
+                  <a16:creationId xmlns:a16="http://schemas.microsoft.com/office/drawing/2014/main" id="{2D31897A-13B8-96FE-3793-2C43E35C8D04}"/>
+                </a:ext>
+              </a:extLst>
+            </p:cNvPr>
+            <p:cNvPicPr>
+              <a:picLocks noChangeAspect="1"/>
+            </p:cNvPicPr>
+            <p:nvPr/>
+          </p:nvPicPr>
+          <p:blipFill>
+            <a:blip r:embed="rId15">
+              <a:extLst>
+                <a:ext uri="{28A0092B-C50C-407E-A947-70E740481C1C}">
+                  <a14:useLocalDpi xmlns:a14="http://schemas.microsoft.com/office/drawing/2010/main" val="0"/>
+                </a:ext>
+              </a:extLst>
+            </a:blip>
+            <a:stretch>
+              <a:fillRect/>
+            </a:stretch>
+          </p:blipFill>
+          <p:spPr>
+            <a:xfrm>
+              <a:off x="7880045" y="4203034"/>
+              <a:ext cx="1445935" cy="481978"/>
+            </a:xfrm>
+            <a:prstGeom prst="rect">
+              <a:avLst/>
+            </a:prstGeom>
+          </p:spPr>
+        </p:pic>
+      </p:grpSp>
     </p:spTree>
     <p:extLst>
       <p:ext uri="{BB962C8B-B14F-4D97-AF65-F5344CB8AC3E}">
@@ -4281,6 +6462,18 @@
   <p:clrMapOvr>
     <a:masterClrMapping/>
   </p:clrMapOvr>
+  <mc:AlternateContent xmlns:mc="http://schemas.openxmlformats.org/markup-compatibility/2006">
+    <mc:Choice xmlns:p14="http://schemas.microsoft.com/office/powerpoint/2010/main" Requires="p14">
+      <p:transition spd="med" p14:dur="700">
+        <p:fade/>
+      </p:transition>
+    </mc:Choice>
+    <mc:Fallback>
+      <p:transition spd="med">
+        <p:fade/>
+      </p:transition>
+    </mc:Fallback>
+  </mc:AlternateContent>
 </p:sld>
 </file>
 
@@ -4301,47 +6494,818 @@
           <a:chExt cx="0" cy="0"/>
         </a:xfrm>
       </p:grpSpPr>
-      <p:sp>
-        <p:nvSpPr>
-          <p:cNvPr id="2" name="Title 1">
-            <a:extLst>
-              <a:ext uri="{FF2B5EF4-FFF2-40B4-BE49-F238E27FC236}">
-                <a16:creationId xmlns:a16="http://schemas.microsoft.com/office/drawing/2014/main" id="{557A9CCF-9090-91FE-650B-10AF4A8378E3}"/>
-              </a:ext>
-            </a:extLst>
-          </p:cNvPr>
-          <p:cNvSpPr>
-            <a:spLocks noGrp="1"/>
-          </p:cNvSpPr>
-          <p:nvPr>
-            <p:ph type="title"/>
-          </p:nvPr>
-        </p:nvSpPr>
-        <p:spPr/>
-        <p:txBody>
-          <a:bodyPr/>
-          <a:lstStyle/>
-          <a:p>
-            <a:r>
-              <a:rPr lang="en-US" dirty="0"/>
-              <a:t>Join the AI Conversation </a:t>
-            </a:r>
-            <a:br>
-              <a:rPr lang="en-US" dirty="0"/>
-            </a:br>
-            <a:r>
-              <a:rPr lang="en-US" dirty="0"/>
-              <a:t>on Discord</a:t>
-            </a:r>
-          </a:p>
-        </p:txBody>
-      </p:sp>
       <p:pic>
         <p:nvPicPr>
-          <p:cNvPr id="4" name="Picture 3" descr="A qr code with circles and circles&#10;&#10;AI-generated content may be incorrect.">
-            <a:extLst>
-              <a:ext uri="{FF2B5EF4-FFF2-40B4-BE49-F238E27FC236}">
-                <a16:creationId xmlns:a16="http://schemas.microsoft.com/office/drawing/2014/main" id="{A960E958-EF62-2B2D-D095-EE57766258AA}"/>
+          <p:cNvPr id="3" name="Picture 2">
+            <a:extLst>
+              <a:ext uri="{FF2B5EF4-FFF2-40B4-BE49-F238E27FC236}">
+                <a16:creationId xmlns:a16="http://schemas.microsoft.com/office/drawing/2014/main" id="{78791778-9303-0D99-C6B3-64A223D14528}"/>
+              </a:ext>
+            </a:extLst>
+          </p:cNvPr>
+          <p:cNvPicPr>
+            <a:picLocks noChangeAspect="1"/>
+          </p:cNvPicPr>
+          <p:nvPr/>
+        </p:nvPicPr>
+        <p:blipFill>
+          <a:blip r:embed="rId2"/>
+          <a:stretch>
+            <a:fillRect/>
+          </a:stretch>
+        </p:blipFill>
+        <p:spPr>
+          <a:xfrm>
+            <a:off x="-2971394" y="-243114"/>
+            <a:ext cx="18482010" cy="8269514"/>
+          </a:xfrm>
+          <a:prstGeom prst="rect">
+            <a:avLst/>
+          </a:prstGeom>
+        </p:spPr>
+      </p:pic>
+      <p:sp>
+        <p:nvSpPr>
+          <p:cNvPr id="4" name="Rectangle 3">
+            <a:extLst>
+              <a:ext uri="{FF2B5EF4-FFF2-40B4-BE49-F238E27FC236}">
+                <a16:creationId xmlns:a16="http://schemas.microsoft.com/office/drawing/2014/main" id="{2889107C-2E67-7C0C-B1E5-FB158AD29918}"/>
+              </a:ext>
+            </a:extLst>
+          </p:cNvPr>
+          <p:cNvSpPr/>
+          <p:nvPr/>
+        </p:nvSpPr>
+        <p:spPr>
+          <a:xfrm>
+            <a:off x="-1059543" y="-232230"/>
+            <a:ext cx="14311086" cy="7344229"/>
+          </a:xfrm>
+          <a:prstGeom prst="rect">
+            <a:avLst/>
+          </a:prstGeom>
+          <a:gradFill flip="none" rotWithShape="1">
+            <a:gsLst>
+              <a:gs pos="0">
+                <a:schemeClr val="bg1"/>
+              </a:gs>
+              <a:gs pos="84000">
+                <a:srgbClr val="DDD7C0">
+                  <a:alpha val="37000"/>
+                  <a:lumMod val="82000"/>
+                </a:srgbClr>
+              </a:gs>
+            </a:gsLst>
+            <a:lin ang="5400000" scaled="1"/>
+            <a:tileRect/>
+          </a:gradFill>
+          <a:ln>
+            <a:noFill/>
+          </a:ln>
+        </p:spPr>
+        <p:style>
+          <a:lnRef idx="2">
+            <a:schemeClr val="accent1">
+              <a:shade val="15000"/>
+            </a:schemeClr>
+          </a:lnRef>
+          <a:fillRef idx="1">
+            <a:schemeClr val="accent1"/>
+          </a:fillRef>
+          <a:effectRef idx="0">
+            <a:schemeClr val="accent1"/>
+          </a:effectRef>
+          <a:fontRef idx="minor">
+            <a:schemeClr val="lt1"/>
+          </a:fontRef>
+        </p:style>
+        <p:txBody>
+          <a:bodyPr rtlCol="0" anchor="ctr"/>
+          <a:lstStyle/>
+          <a:p>
+            <a:pPr algn="ctr"/>
+            <a:endParaRPr lang="en-US"/>
+          </a:p>
+        </p:txBody>
+      </p:sp>
+      <p:sp>
+        <p:nvSpPr>
+          <p:cNvPr id="6" name="TextBox 5">
+            <a:extLst>
+              <a:ext uri="{FF2B5EF4-FFF2-40B4-BE49-F238E27FC236}">
+                <a16:creationId xmlns:a16="http://schemas.microsoft.com/office/drawing/2014/main" id="{EE0CE66A-4A83-1D3F-663C-AA9008A97BF1}"/>
+              </a:ext>
+            </a:extLst>
+          </p:cNvPr>
+          <p:cNvSpPr txBox="1"/>
+          <p:nvPr/>
+        </p:nvSpPr>
+        <p:spPr>
+          <a:xfrm>
+            <a:off x="5103153" y="2613392"/>
+            <a:ext cx="1985694" cy="1631216"/>
+          </a:xfrm>
+          <a:prstGeom prst="rect">
+            <a:avLst/>
+          </a:prstGeom>
+          <a:noFill/>
+        </p:spPr>
+        <p:txBody>
+          <a:bodyPr wrap="square">
+            <a:spAutoFit/>
+          </a:bodyPr>
+          <a:lstStyle/>
+          <a:p>
+            <a:pPr algn="ctr"/>
+            <a:r>
+              <a:rPr lang="en-US" sz="10000" b="1" i="0" dirty="0">
+                <a:solidFill>
+                  <a:srgbClr val="665649"/>
+                </a:solidFill>
+                <a:effectLst/>
+                <a:latin typeface="Montserrat" panose="00000500000000000000" pitchFamily="50" charset="0"/>
+              </a:rPr>
+              <a:t>36</a:t>
+            </a:r>
+            <a:endParaRPr lang="en-US" sz="10000" dirty="0">
+              <a:solidFill>
+                <a:srgbClr val="665649"/>
+              </a:solidFill>
+            </a:endParaRPr>
+          </a:p>
+        </p:txBody>
+      </p:sp>
+      <p:sp>
+        <p:nvSpPr>
+          <p:cNvPr id="9" name="TextBox 8">
+            <a:extLst>
+              <a:ext uri="{FF2B5EF4-FFF2-40B4-BE49-F238E27FC236}">
+                <a16:creationId xmlns:a16="http://schemas.microsoft.com/office/drawing/2014/main" id="{80D414F5-03CA-8677-89B7-3EBA778462DA}"/>
+              </a:ext>
+            </a:extLst>
+          </p:cNvPr>
+          <p:cNvSpPr txBox="1"/>
+          <p:nvPr/>
+        </p:nvSpPr>
+        <p:spPr>
+          <a:xfrm>
+            <a:off x="4597273" y="4049253"/>
+            <a:ext cx="3069056" cy="784830"/>
+          </a:xfrm>
+          <a:prstGeom prst="rect">
+            <a:avLst/>
+          </a:prstGeom>
+          <a:noFill/>
+        </p:spPr>
+        <p:txBody>
+          <a:bodyPr wrap="square">
+            <a:spAutoFit/>
+          </a:bodyPr>
+          <a:lstStyle/>
+          <a:p>
+            <a:pPr algn="ctr">
+              <a:buNone/>
+            </a:pPr>
+            <a:r>
+              <a:rPr lang="en-US" sz="4500" b="1" i="0" dirty="0">
+                <a:solidFill>
+                  <a:srgbClr val="665649"/>
+                </a:solidFill>
+                <a:effectLst/>
+                <a:latin typeface="Lufga" panose="00000500000000000000" pitchFamily="50" charset="0"/>
+              </a:rPr>
+              <a:t>Countries</a:t>
+            </a:r>
+            <a:endParaRPr lang="en-US" sz="4500" b="1" dirty="0">
+              <a:solidFill>
+                <a:srgbClr val="665649"/>
+              </a:solidFill>
+              <a:latin typeface="Lufga" panose="00000500000000000000" pitchFamily="50" charset="0"/>
+            </a:endParaRPr>
+          </a:p>
+        </p:txBody>
+      </p:sp>
+      <p:grpSp>
+        <p:nvGrpSpPr>
+          <p:cNvPr id="17" name="Group 16">
+            <a:extLst>
+              <a:ext uri="{FF2B5EF4-FFF2-40B4-BE49-F238E27FC236}">
+                <a16:creationId xmlns:a16="http://schemas.microsoft.com/office/drawing/2014/main" id="{D4E9AFD0-5D70-1386-6765-48169F88715A}"/>
+              </a:ext>
+            </a:extLst>
+          </p:cNvPr>
+          <p:cNvGrpSpPr/>
+          <p:nvPr/>
+        </p:nvGrpSpPr>
+        <p:grpSpPr>
+          <a:xfrm>
+            <a:off x="8769380" y="2807545"/>
+            <a:ext cx="2466757" cy="1437063"/>
+            <a:chOff x="7490043" y="2827634"/>
+            <a:chExt cx="2466757" cy="1437063"/>
+          </a:xfrm>
+        </p:grpSpPr>
+        <p:sp>
+          <p:nvSpPr>
+            <p:cNvPr id="11" name="TextBox 10">
+              <a:extLst>
+                <a:ext uri="{FF2B5EF4-FFF2-40B4-BE49-F238E27FC236}">
+                  <a16:creationId xmlns:a16="http://schemas.microsoft.com/office/drawing/2014/main" id="{B45684D1-29C7-5A8B-8B8D-E43A65BF4482}"/>
+                </a:ext>
+              </a:extLst>
+            </p:cNvPr>
+            <p:cNvSpPr txBox="1"/>
+            <p:nvPr/>
+          </p:nvSpPr>
+          <p:spPr>
+            <a:xfrm>
+              <a:off x="7709200" y="2827634"/>
+              <a:ext cx="1942800" cy="1169551"/>
+            </a:xfrm>
+            <a:prstGeom prst="rect">
+              <a:avLst/>
+            </a:prstGeom>
+            <a:noFill/>
+          </p:spPr>
+          <p:txBody>
+            <a:bodyPr wrap="square">
+              <a:spAutoFit/>
+            </a:bodyPr>
+            <a:lstStyle/>
+            <a:p>
+              <a:pPr algn="ctr"/>
+              <a:r>
+                <a:rPr lang="en-US" sz="7000" b="1" i="0" dirty="0">
+                  <a:solidFill>
+                    <a:srgbClr val="665649"/>
+                  </a:solidFill>
+                  <a:effectLst/>
+                  <a:latin typeface="Montserrat" panose="00000500000000000000" pitchFamily="50" charset="0"/>
+                </a:rPr>
+                <a:t>437</a:t>
+              </a:r>
+              <a:endParaRPr lang="en-US" sz="7000" dirty="0">
+                <a:solidFill>
+                  <a:srgbClr val="665649"/>
+                </a:solidFill>
+              </a:endParaRPr>
+            </a:p>
+          </p:txBody>
+        </p:sp>
+        <p:sp>
+          <p:nvSpPr>
+            <p:cNvPr id="12" name="TextBox 11">
+              <a:extLst>
+                <a:ext uri="{FF2B5EF4-FFF2-40B4-BE49-F238E27FC236}">
+                  <a16:creationId xmlns:a16="http://schemas.microsoft.com/office/drawing/2014/main" id="{966A9572-0488-1DA5-1365-DD80D4905516}"/>
+                </a:ext>
+              </a:extLst>
+            </p:cNvPr>
+            <p:cNvSpPr txBox="1"/>
+            <p:nvPr/>
+          </p:nvSpPr>
+          <p:spPr>
+            <a:xfrm>
+              <a:off x="7490043" y="3833810"/>
+              <a:ext cx="2466757" cy="430887"/>
+            </a:xfrm>
+            <a:prstGeom prst="rect">
+              <a:avLst/>
+            </a:prstGeom>
+            <a:noFill/>
+          </p:spPr>
+          <p:txBody>
+            <a:bodyPr wrap="square">
+              <a:spAutoFit/>
+            </a:bodyPr>
+            <a:lstStyle/>
+            <a:p>
+              <a:pPr algn="ctr">
+                <a:buNone/>
+              </a:pPr>
+              <a:r>
+                <a:rPr lang="en-US" sz="2200" b="1" dirty="0">
+                  <a:solidFill>
+                    <a:srgbClr val="665649"/>
+                  </a:solidFill>
+                  <a:latin typeface="Lufga" panose="00000500000000000000" pitchFamily="50" charset="0"/>
+                </a:rPr>
+                <a:t>Hours of content</a:t>
+              </a:r>
+            </a:p>
+          </p:txBody>
+        </p:sp>
+      </p:grpSp>
+      <p:grpSp>
+        <p:nvGrpSpPr>
+          <p:cNvPr id="18" name="Group 17">
+            <a:extLst>
+              <a:ext uri="{FF2B5EF4-FFF2-40B4-BE49-F238E27FC236}">
+                <a16:creationId xmlns:a16="http://schemas.microsoft.com/office/drawing/2014/main" id="{15854878-FC47-6040-4F71-A341484F0724}"/>
+              </a:ext>
+            </a:extLst>
+          </p:cNvPr>
+          <p:cNvGrpSpPr/>
+          <p:nvPr/>
+        </p:nvGrpSpPr>
+        <p:grpSpPr>
+          <a:xfrm>
+            <a:off x="1216911" y="2807545"/>
+            <a:ext cx="2277311" cy="1437063"/>
+            <a:chOff x="2716263" y="2792156"/>
+            <a:chExt cx="2277311" cy="1437063"/>
+          </a:xfrm>
+        </p:grpSpPr>
+        <p:sp>
+          <p:nvSpPr>
+            <p:cNvPr id="13" name="TextBox 12">
+              <a:extLst>
+                <a:ext uri="{FF2B5EF4-FFF2-40B4-BE49-F238E27FC236}">
+                  <a16:creationId xmlns:a16="http://schemas.microsoft.com/office/drawing/2014/main" id="{05BCF9F5-3078-0F06-4BF2-26022C823083}"/>
+                </a:ext>
+              </a:extLst>
+            </p:cNvPr>
+            <p:cNvSpPr txBox="1"/>
+            <p:nvPr/>
+          </p:nvSpPr>
+          <p:spPr>
+            <a:xfrm>
+              <a:off x="2935420" y="2792156"/>
+              <a:ext cx="1766537" cy="1169551"/>
+            </a:xfrm>
+            <a:prstGeom prst="rect">
+              <a:avLst/>
+            </a:prstGeom>
+            <a:noFill/>
+          </p:spPr>
+          <p:txBody>
+            <a:bodyPr wrap="square">
+              <a:spAutoFit/>
+            </a:bodyPr>
+            <a:lstStyle/>
+            <a:p>
+              <a:pPr algn="ctr"/>
+              <a:r>
+                <a:rPr lang="en-US" sz="7000" b="1" i="0" dirty="0">
+                  <a:solidFill>
+                    <a:srgbClr val="665649"/>
+                  </a:solidFill>
+                  <a:effectLst/>
+                  <a:latin typeface="Montserrat" panose="00000500000000000000" pitchFamily="50" charset="0"/>
+                </a:rPr>
+                <a:t>62</a:t>
+              </a:r>
+              <a:endParaRPr lang="en-US" sz="7000" dirty="0">
+                <a:solidFill>
+                  <a:srgbClr val="665649"/>
+                </a:solidFill>
+              </a:endParaRPr>
+            </a:p>
+          </p:txBody>
+        </p:sp>
+        <p:sp>
+          <p:nvSpPr>
+            <p:cNvPr id="14" name="TextBox 13">
+              <a:extLst>
+                <a:ext uri="{FF2B5EF4-FFF2-40B4-BE49-F238E27FC236}">
+                  <a16:creationId xmlns:a16="http://schemas.microsoft.com/office/drawing/2014/main" id="{AEEE805E-4578-2091-AB05-6A23197DFCA0}"/>
+                </a:ext>
+              </a:extLst>
+            </p:cNvPr>
+            <p:cNvSpPr txBox="1"/>
+            <p:nvPr/>
+          </p:nvSpPr>
+          <p:spPr>
+            <a:xfrm>
+              <a:off x="2716263" y="3798332"/>
+              <a:ext cx="2277311" cy="430887"/>
+            </a:xfrm>
+            <a:prstGeom prst="rect">
+              <a:avLst/>
+            </a:prstGeom>
+            <a:noFill/>
+          </p:spPr>
+          <p:txBody>
+            <a:bodyPr wrap="square">
+              <a:spAutoFit/>
+            </a:bodyPr>
+            <a:lstStyle/>
+            <a:p>
+              <a:pPr algn="ctr">
+                <a:buNone/>
+              </a:pPr>
+              <a:r>
+                <a:rPr lang="en-US" sz="2200" b="1" i="0" dirty="0">
+                  <a:solidFill>
+                    <a:srgbClr val="665649"/>
+                  </a:solidFill>
+                  <a:effectLst/>
+                  <a:latin typeface="Lufga" panose="00000500000000000000" pitchFamily="50" charset="0"/>
+                </a:rPr>
+                <a:t>Locations</a:t>
+              </a:r>
+              <a:endParaRPr lang="en-US" sz="2200" b="1" dirty="0">
+                <a:solidFill>
+                  <a:srgbClr val="665649"/>
+                </a:solidFill>
+                <a:latin typeface="Lufga" panose="00000500000000000000" pitchFamily="50" charset="0"/>
+              </a:endParaRPr>
+            </a:p>
+          </p:txBody>
+        </p:sp>
+      </p:grpSp>
+    </p:spTree>
+    <p:extLst>
+      <p:ext uri="{BB962C8B-B14F-4D97-AF65-F5344CB8AC3E}">
+        <p14:creationId xmlns:p14="http://schemas.microsoft.com/office/powerpoint/2010/main" val="4232347355"/>
+      </p:ext>
+    </p:extLst>
+  </p:cSld>
+  <p:clrMapOvr>
+    <a:masterClrMapping/>
+  </p:clrMapOvr>
+  <mc:AlternateContent xmlns:mc="http://schemas.openxmlformats.org/markup-compatibility/2006">
+    <mc:Choice xmlns:p14="http://schemas.microsoft.com/office/powerpoint/2010/main" Requires="p14">
+      <p:transition spd="med" p14:dur="700">
+        <p:fade/>
+      </p:transition>
+    </mc:Choice>
+    <mc:Fallback>
+      <p:transition spd="med">
+        <p:fade/>
+      </p:transition>
+    </mc:Fallback>
+  </mc:AlternateContent>
+</p:sld>
+</file>
+
+<file path=ppt/slides/slide4.xml><?xml version="1.0" encoding="utf-8"?>
+<p:sld xmlns:a="http://schemas.openxmlformats.org/drawingml/2006/main" xmlns:r="http://schemas.openxmlformats.org/officeDocument/2006/relationships" xmlns:p="http://schemas.openxmlformats.org/presentationml/2006/main">
+  <p:cSld>
+    <p:spTree>
+      <p:nvGrpSpPr>
+        <p:cNvPr id="1" name=""/>
+        <p:cNvGrpSpPr/>
+        <p:nvPr/>
+      </p:nvGrpSpPr>
+      <p:grpSpPr>
+        <a:xfrm>
+          <a:off x="0" y="0"/>
+          <a:ext cx="0" cy="0"/>
+          <a:chOff x="0" y="0"/>
+          <a:chExt cx="0" cy="0"/>
+        </a:xfrm>
+      </p:grpSpPr>
+      <p:sp>
+        <p:nvSpPr>
+          <p:cNvPr id="14" name="Rectangle 13">
+            <a:extLst>
+              <a:ext uri="{FF2B5EF4-FFF2-40B4-BE49-F238E27FC236}">
+                <a16:creationId xmlns:a16="http://schemas.microsoft.com/office/drawing/2014/main" id="{3C2887DB-9292-65C3-4636-4C87E67D2B89}"/>
+              </a:ext>
+            </a:extLst>
+          </p:cNvPr>
+          <p:cNvSpPr/>
+          <p:nvPr/>
+        </p:nvSpPr>
+        <p:spPr>
+          <a:xfrm>
+            <a:off x="0" y="-232229"/>
+            <a:ext cx="12192000" cy="7090230"/>
+          </a:xfrm>
+          <a:prstGeom prst="rect">
+            <a:avLst/>
+          </a:prstGeom>
+          <a:gradFill flip="none" rotWithShape="1">
+            <a:gsLst>
+              <a:gs pos="0">
+                <a:schemeClr val="bg1"/>
+              </a:gs>
+              <a:gs pos="84000">
+                <a:srgbClr val="DDD7C0">
+                  <a:alpha val="37000"/>
+                  <a:lumMod val="82000"/>
+                </a:srgbClr>
+              </a:gs>
+            </a:gsLst>
+            <a:lin ang="5400000" scaled="1"/>
+            <a:tileRect/>
+          </a:gradFill>
+          <a:ln>
+            <a:noFill/>
+          </a:ln>
+        </p:spPr>
+        <p:style>
+          <a:lnRef idx="2">
+            <a:schemeClr val="accent1">
+              <a:shade val="15000"/>
+            </a:schemeClr>
+          </a:lnRef>
+          <a:fillRef idx="1">
+            <a:schemeClr val="accent1"/>
+          </a:fillRef>
+          <a:effectRef idx="0">
+            <a:schemeClr val="accent1"/>
+          </a:effectRef>
+          <a:fontRef idx="minor">
+            <a:schemeClr val="lt1"/>
+          </a:fontRef>
+        </p:style>
+        <p:txBody>
+          <a:bodyPr rtlCol="0" anchor="ctr"/>
+          <a:lstStyle/>
+          <a:p>
+            <a:pPr algn="ctr"/>
+            <a:endParaRPr lang="en-US"/>
+          </a:p>
+        </p:txBody>
+      </p:sp>
+      <p:sp>
+        <p:nvSpPr>
+          <p:cNvPr id="3" name="Title 1">
+            <a:extLst>
+              <a:ext uri="{FF2B5EF4-FFF2-40B4-BE49-F238E27FC236}">
+                <a16:creationId xmlns:a16="http://schemas.microsoft.com/office/drawing/2014/main" id="{5E5F4CAC-231A-92F8-40E8-800A91B7DD3E}"/>
+              </a:ext>
+            </a:extLst>
+          </p:cNvPr>
+          <p:cNvSpPr txBox="1">
+            <a:spLocks/>
+          </p:cNvSpPr>
+          <p:nvPr/>
+        </p:nvSpPr>
+        <p:spPr>
+          <a:xfrm>
+            <a:off x="838200" y="365125"/>
+            <a:ext cx="10515600" cy="1325563"/>
+          </a:xfrm>
+          <a:prstGeom prst="rect">
+            <a:avLst/>
+          </a:prstGeom>
+        </p:spPr>
+        <p:txBody>
+          <a:bodyPr vert="horz" lIns="91440" tIns="45720" rIns="91440" bIns="45720" rtlCol="0" anchor="ctr">
+            <a:normAutofit/>
+          </a:bodyPr>
+          <a:lstStyle>
+            <a:lvl1pPr algn="ctr" defTabSz="914400" rtl="0" eaLnBrk="1" latinLnBrk="0" hangingPunct="1">
+              <a:lnSpc>
+                <a:spcPct val="90000"/>
+              </a:lnSpc>
+              <a:spcBef>
+                <a:spcPct val="0"/>
+              </a:spcBef>
+              <a:buNone/>
+              <a:defRPr sz="4400" kern="1200">
+                <a:solidFill>
+                  <a:srgbClr val="665649"/>
+                </a:solidFill>
+                <a:latin typeface="Lufga" panose="00000500000000000000" pitchFamily="50" charset="0"/>
+                <a:ea typeface="+mj-ea"/>
+                <a:cs typeface="+mj-cs"/>
+              </a:defRPr>
+            </a:lvl1pPr>
+          </a:lstStyle>
+          <a:p>
+            <a:r>
+              <a:rPr lang="en-US" dirty="0"/>
+              <a:t>Code of Conduct</a:t>
+            </a:r>
+          </a:p>
+        </p:txBody>
+      </p:sp>
+      <p:sp>
+        <p:nvSpPr>
+          <p:cNvPr id="8" name="TextBox 7">
+            <a:extLst>
+              <a:ext uri="{FF2B5EF4-FFF2-40B4-BE49-F238E27FC236}">
+                <a16:creationId xmlns:a16="http://schemas.microsoft.com/office/drawing/2014/main" id="{A0A9A91F-394A-CBB0-5F4D-27CBD3DD33E4}"/>
+              </a:ext>
+            </a:extLst>
+          </p:cNvPr>
+          <p:cNvSpPr txBox="1"/>
+          <p:nvPr/>
+        </p:nvSpPr>
+        <p:spPr>
+          <a:xfrm>
+            <a:off x="975363" y="3906157"/>
+            <a:ext cx="2292614" cy="769441"/>
+          </a:xfrm>
+          <a:prstGeom prst="rect">
+            <a:avLst/>
+          </a:prstGeom>
+          <a:noFill/>
+        </p:spPr>
+        <p:txBody>
+          <a:bodyPr wrap="none" rtlCol="0">
+            <a:spAutoFit/>
+          </a:bodyPr>
+          <a:lstStyle/>
+          <a:p>
+            <a:pPr algn="ctr"/>
+            <a:r>
+              <a:rPr lang="en-US" sz="2200" b="1" dirty="0">
+                <a:solidFill>
+                  <a:srgbClr val="665649"/>
+                </a:solidFill>
+                <a:latin typeface="Lufga" panose="00000500000000000000" pitchFamily="50" charset="0"/>
+              </a:rPr>
+              <a:t>Be Respectful &amp;</a:t>
+            </a:r>
+          </a:p>
+          <a:p>
+            <a:pPr algn="ctr"/>
+            <a:r>
+              <a:rPr lang="en-US" sz="2200" b="1" dirty="0">
+                <a:solidFill>
+                  <a:srgbClr val="665649"/>
+                </a:solidFill>
+                <a:latin typeface="Lufga" panose="00000500000000000000" pitchFamily="50" charset="0"/>
+              </a:rPr>
+              <a:t> Considerate</a:t>
+            </a:r>
+            <a:endParaRPr lang="en-US" sz="2200" dirty="0">
+              <a:solidFill>
+                <a:srgbClr val="665649"/>
+              </a:solidFill>
+              <a:latin typeface="Lufga" panose="00000500000000000000" pitchFamily="50" charset="0"/>
+            </a:endParaRPr>
+          </a:p>
+        </p:txBody>
+      </p:sp>
+      <p:sp>
+        <p:nvSpPr>
+          <p:cNvPr id="9" name="TextBox 8">
+            <a:extLst>
+              <a:ext uri="{FF2B5EF4-FFF2-40B4-BE49-F238E27FC236}">
+                <a16:creationId xmlns:a16="http://schemas.microsoft.com/office/drawing/2014/main" id="{23547F39-71FE-EDB4-9954-5366AAFC31F1}"/>
+              </a:ext>
+            </a:extLst>
+          </p:cNvPr>
+          <p:cNvSpPr txBox="1"/>
+          <p:nvPr/>
+        </p:nvSpPr>
+        <p:spPr>
+          <a:xfrm>
+            <a:off x="4871945" y="3906157"/>
+            <a:ext cx="2475358" cy="769441"/>
+          </a:xfrm>
+          <a:prstGeom prst="rect">
+            <a:avLst/>
+          </a:prstGeom>
+          <a:noFill/>
+        </p:spPr>
+        <p:txBody>
+          <a:bodyPr wrap="none" rtlCol="0">
+            <a:spAutoFit/>
+          </a:bodyPr>
+          <a:lstStyle/>
+          <a:p>
+            <a:pPr algn="ctr"/>
+            <a:r>
+              <a:rPr lang="en-US" sz="2200" b="1" dirty="0">
+                <a:solidFill>
+                  <a:srgbClr val="665649"/>
+                </a:solidFill>
+                <a:latin typeface="Lufga" panose="00000500000000000000" pitchFamily="50" charset="0"/>
+              </a:rPr>
+              <a:t>Show Empathy &amp;</a:t>
+            </a:r>
+          </a:p>
+          <a:p>
+            <a:pPr algn="ctr"/>
+            <a:r>
+              <a:rPr lang="en-US" sz="2200" b="1" dirty="0">
+                <a:solidFill>
+                  <a:srgbClr val="665649"/>
+                </a:solidFill>
+                <a:latin typeface="Lufga" panose="00000500000000000000" pitchFamily="50" charset="0"/>
+              </a:rPr>
+              <a:t> Kindness</a:t>
+            </a:r>
+            <a:endParaRPr lang="en-US" sz="2200" dirty="0">
+              <a:solidFill>
+                <a:srgbClr val="665649"/>
+              </a:solidFill>
+              <a:latin typeface="Lufga" panose="00000500000000000000" pitchFamily="50" charset="0"/>
+            </a:endParaRPr>
+          </a:p>
+        </p:txBody>
+      </p:sp>
+      <p:sp>
+        <p:nvSpPr>
+          <p:cNvPr id="10" name="TextBox 9">
+            <a:extLst>
+              <a:ext uri="{FF2B5EF4-FFF2-40B4-BE49-F238E27FC236}">
+                <a16:creationId xmlns:a16="http://schemas.microsoft.com/office/drawing/2014/main" id="{AD51817E-20AD-ECCF-E2AF-294B58B79C71}"/>
+              </a:ext>
+            </a:extLst>
+          </p:cNvPr>
+          <p:cNvSpPr txBox="1"/>
+          <p:nvPr/>
+        </p:nvSpPr>
+        <p:spPr>
+          <a:xfrm>
+            <a:off x="8951272" y="3906157"/>
+            <a:ext cx="2055371" cy="769441"/>
+          </a:xfrm>
+          <a:prstGeom prst="rect">
+            <a:avLst/>
+          </a:prstGeom>
+          <a:noFill/>
+        </p:spPr>
+        <p:txBody>
+          <a:bodyPr wrap="none" rtlCol="0">
+            <a:spAutoFit/>
+          </a:bodyPr>
+          <a:lstStyle/>
+          <a:p>
+            <a:pPr algn="ctr"/>
+            <a:r>
+              <a:rPr lang="en-US" sz="2200" b="1" dirty="0">
+                <a:solidFill>
+                  <a:srgbClr val="665649"/>
+                </a:solidFill>
+                <a:latin typeface="Lufga" panose="00000500000000000000" pitchFamily="50" charset="0"/>
+              </a:rPr>
+              <a:t>Foster </a:t>
+            </a:r>
+          </a:p>
+          <a:p>
+            <a:pPr algn="ctr"/>
+            <a:r>
+              <a:rPr lang="en-US" sz="2200" b="1" dirty="0">
+                <a:solidFill>
+                  <a:srgbClr val="665649"/>
+                </a:solidFill>
+                <a:latin typeface="Lufga" panose="00000500000000000000" pitchFamily="50" charset="0"/>
+              </a:rPr>
+              <a:t>Collaboration</a:t>
+            </a:r>
+            <a:endParaRPr lang="en-US" sz="2200" dirty="0">
+              <a:solidFill>
+                <a:srgbClr val="665649"/>
+              </a:solidFill>
+              <a:latin typeface="Lufga" panose="00000500000000000000" pitchFamily="50" charset="0"/>
+            </a:endParaRPr>
+          </a:p>
+        </p:txBody>
+      </p:sp>
+      <p:sp>
+        <p:nvSpPr>
+          <p:cNvPr id="11" name="TextBox 10">
+            <a:extLst>
+              <a:ext uri="{FF2B5EF4-FFF2-40B4-BE49-F238E27FC236}">
+                <a16:creationId xmlns:a16="http://schemas.microsoft.com/office/drawing/2014/main" id="{4DF51F08-0487-A53F-580C-4537BCC685F7}"/>
+              </a:ext>
+            </a:extLst>
+          </p:cNvPr>
+          <p:cNvSpPr txBox="1"/>
+          <p:nvPr/>
+        </p:nvSpPr>
+        <p:spPr>
+          <a:xfrm>
+            <a:off x="7899989" y="6354375"/>
+            <a:ext cx="3626314" cy="276999"/>
+          </a:xfrm>
+          <a:prstGeom prst="rect">
+            <a:avLst/>
+          </a:prstGeom>
+          <a:noFill/>
+        </p:spPr>
+        <p:txBody>
+          <a:bodyPr wrap="none" rtlCol="0">
+            <a:spAutoFit/>
+          </a:bodyPr>
+          <a:lstStyle/>
+          <a:p>
+            <a:r>
+              <a:rPr lang="en-US" sz="1200" i="1" dirty="0" err="1">
+                <a:solidFill>
+                  <a:srgbClr val="665649"/>
+                </a:solidFill>
+                <a:latin typeface="Lufga" panose="00000500000000000000" pitchFamily="50" charset="0"/>
+              </a:rPr>
+              <a:t>globalai.community</a:t>
+            </a:r>
+            <a:r>
+              <a:rPr lang="en-US" sz="1200" i="1" dirty="0">
+                <a:solidFill>
+                  <a:srgbClr val="665649"/>
+                </a:solidFill>
+                <a:latin typeface="Lufga" panose="00000500000000000000" pitchFamily="50" charset="0"/>
+              </a:rPr>
+              <a:t>/about/code-of-conduct/</a:t>
+            </a:r>
+          </a:p>
+        </p:txBody>
+      </p:sp>
+      <p:pic>
+        <p:nvPicPr>
+          <p:cNvPr id="13" name="Picture 12">
+            <a:extLst>
+              <a:ext uri="{FF2B5EF4-FFF2-40B4-BE49-F238E27FC236}">
+                <a16:creationId xmlns:a16="http://schemas.microsoft.com/office/drawing/2014/main" id="{B6E13004-FF0B-CC4E-8B77-65C0FC336FFA}"/>
               </a:ext>
             </a:extLst>
           </p:cNvPr>
@@ -4353,6 +7317,270 @@
         <p:blipFill>
           <a:blip r:embed="rId2">
             <a:extLst>
+              <a:ext uri="{BEBA8EAE-BF5A-486C-A8C5-ECC9F3942E4B}">
+                <a14:imgProps xmlns:a14="http://schemas.microsoft.com/office/drawing/2010/main">
+                  <a14:imgLayer r:embed="rId3">
+                    <a14:imgEffect>
+                      <a14:brightnessContrast bright="-40000" contrast="20000"/>
+                    </a14:imgEffect>
+                  </a14:imgLayer>
+                </a14:imgProps>
+              </a:ext>
+              <a:ext uri="{28A0092B-C50C-407E-A947-70E740481C1C}">
+                <a14:useLocalDpi xmlns:a14="http://schemas.microsoft.com/office/drawing/2010/main" val="0"/>
+              </a:ext>
+            </a:extLst>
+          </a:blip>
+          <a:stretch>
+            <a:fillRect/>
+          </a:stretch>
+        </p:blipFill>
+        <p:spPr>
+          <a:xfrm>
+            <a:off x="1673050" y="2474543"/>
+            <a:ext cx="1325563" cy="1325563"/>
+          </a:xfrm>
+          <a:prstGeom prst="rect">
+            <a:avLst/>
+          </a:prstGeom>
+        </p:spPr>
+      </p:pic>
+      <p:pic>
+        <p:nvPicPr>
+          <p:cNvPr id="16" name="Picture 15">
+            <a:extLst>
+              <a:ext uri="{FF2B5EF4-FFF2-40B4-BE49-F238E27FC236}">
+                <a16:creationId xmlns:a16="http://schemas.microsoft.com/office/drawing/2014/main" id="{A13DE4D8-A187-103E-63FB-74F0C9975AB7}"/>
+              </a:ext>
+            </a:extLst>
+          </p:cNvPr>
+          <p:cNvPicPr>
+            <a:picLocks noChangeAspect="1"/>
+          </p:cNvPicPr>
+          <p:nvPr/>
+        </p:nvPicPr>
+        <p:blipFill>
+          <a:blip r:embed="rId4">
+            <a:extLst>
+              <a:ext uri="{BEBA8EAE-BF5A-486C-A8C5-ECC9F3942E4B}">
+                <a14:imgProps xmlns:a14="http://schemas.microsoft.com/office/drawing/2010/main">
+                  <a14:imgLayer r:embed="rId5">
+                    <a14:imgEffect>
+                      <a14:brightnessContrast bright="-40000" contrast="20000"/>
+                    </a14:imgEffect>
+                  </a14:imgLayer>
+                </a14:imgProps>
+              </a:ext>
+              <a:ext uri="{28A0092B-C50C-407E-A947-70E740481C1C}">
+                <a14:useLocalDpi xmlns:a14="http://schemas.microsoft.com/office/drawing/2010/main" val="0"/>
+              </a:ext>
+            </a:extLst>
+          </a:blip>
+          <a:stretch>
+            <a:fillRect/>
+          </a:stretch>
+        </p:blipFill>
+        <p:spPr>
+          <a:xfrm>
+            <a:off x="5671625" y="2527639"/>
+            <a:ext cx="1219370" cy="1219370"/>
+          </a:xfrm>
+          <a:prstGeom prst="rect">
+            <a:avLst/>
+          </a:prstGeom>
+        </p:spPr>
+      </p:pic>
+      <p:pic>
+        <p:nvPicPr>
+          <p:cNvPr id="18" name="Picture 17">
+            <a:extLst>
+              <a:ext uri="{FF2B5EF4-FFF2-40B4-BE49-F238E27FC236}">
+                <a16:creationId xmlns:a16="http://schemas.microsoft.com/office/drawing/2014/main" id="{545972EE-B6A7-3F03-0582-923D82607177}"/>
+              </a:ext>
+            </a:extLst>
+          </p:cNvPr>
+          <p:cNvPicPr>
+            <a:picLocks noChangeAspect="1"/>
+          </p:cNvPicPr>
+          <p:nvPr/>
+        </p:nvPicPr>
+        <p:blipFill>
+          <a:blip r:embed="rId6">
+            <a:extLst>
+              <a:ext uri="{BEBA8EAE-BF5A-486C-A8C5-ECC9F3942E4B}">
+                <a14:imgProps xmlns:a14="http://schemas.microsoft.com/office/drawing/2010/main">
+                  <a14:imgLayer r:embed="rId7">
+                    <a14:imgEffect>
+                      <a14:brightnessContrast bright="-40000" contrast="20000"/>
+                    </a14:imgEffect>
+                  </a14:imgLayer>
+                </a14:imgProps>
+              </a:ext>
+              <a:ext uri="{28A0092B-C50C-407E-A947-70E740481C1C}">
+                <a14:useLocalDpi xmlns:a14="http://schemas.microsoft.com/office/drawing/2010/main" val="0"/>
+              </a:ext>
+            </a:extLst>
+          </a:blip>
+          <a:stretch>
+            <a:fillRect/>
+          </a:stretch>
+        </p:blipFill>
+        <p:spPr>
+          <a:xfrm>
+            <a:off x="9369272" y="2527639"/>
+            <a:ext cx="1219370" cy="1219370"/>
+          </a:xfrm>
+          <a:prstGeom prst="rect">
+            <a:avLst/>
+          </a:prstGeom>
+        </p:spPr>
+      </p:pic>
+    </p:spTree>
+    <p:extLst>
+      <p:ext uri="{BB962C8B-B14F-4D97-AF65-F5344CB8AC3E}">
+        <p14:creationId xmlns:p14="http://schemas.microsoft.com/office/powerpoint/2010/main" val="2711503613"/>
+      </p:ext>
+    </p:extLst>
+  </p:cSld>
+  <p:clrMapOvr>
+    <a:masterClrMapping/>
+  </p:clrMapOvr>
+</p:sld>
+</file>
+
+<file path=ppt/slides/slide5.xml><?xml version="1.0" encoding="utf-8"?>
+<p:sld xmlns:a="http://schemas.openxmlformats.org/drawingml/2006/main" xmlns:r="http://schemas.openxmlformats.org/officeDocument/2006/relationships" xmlns:p="http://schemas.openxmlformats.org/presentationml/2006/main">
+  <p:cSld>
+    <p:spTree>
+      <p:nvGrpSpPr>
+        <p:cNvPr id="1" name=""/>
+        <p:cNvGrpSpPr/>
+        <p:nvPr/>
+      </p:nvGrpSpPr>
+      <p:grpSpPr>
+        <a:xfrm>
+          <a:off x="0" y="0"/>
+          <a:ext cx="0" cy="0"/>
+          <a:chOff x="0" y="0"/>
+          <a:chExt cx="0" cy="0"/>
+        </a:xfrm>
+      </p:grpSpPr>
+      <p:sp>
+        <p:nvSpPr>
+          <p:cNvPr id="3" name="Rectangle 2">
+            <a:extLst>
+              <a:ext uri="{FF2B5EF4-FFF2-40B4-BE49-F238E27FC236}">
+                <a16:creationId xmlns:a16="http://schemas.microsoft.com/office/drawing/2014/main" id="{4949A5BC-7A3D-A9A2-F879-44D0551AD690}"/>
+              </a:ext>
+            </a:extLst>
+          </p:cNvPr>
+          <p:cNvSpPr/>
+          <p:nvPr/>
+        </p:nvSpPr>
+        <p:spPr>
+          <a:xfrm>
+            <a:off x="0" y="-232229"/>
+            <a:ext cx="12192000" cy="7090230"/>
+          </a:xfrm>
+          <a:prstGeom prst="rect">
+            <a:avLst/>
+          </a:prstGeom>
+          <a:gradFill flip="none" rotWithShape="1">
+            <a:gsLst>
+              <a:gs pos="0">
+                <a:schemeClr val="bg1"/>
+              </a:gs>
+              <a:gs pos="84000">
+                <a:srgbClr val="DDD7C0">
+                  <a:alpha val="37000"/>
+                  <a:lumMod val="82000"/>
+                </a:srgbClr>
+              </a:gs>
+            </a:gsLst>
+            <a:lin ang="5400000" scaled="1"/>
+            <a:tileRect/>
+          </a:gradFill>
+          <a:ln>
+            <a:noFill/>
+          </a:ln>
+        </p:spPr>
+        <p:style>
+          <a:lnRef idx="2">
+            <a:schemeClr val="accent1">
+              <a:shade val="15000"/>
+            </a:schemeClr>
+          </a:lnRef>
+          <a:fillRef idx="1">
+            <a:schemeClr val="accent1"/>
+          </a:fillRef>
+          <a:effectRef idx="0">
+            <a:schemeClr val="accent1"/>
+          </a:effectRef>
+          <a:fontRef idx="minor">
+            <a:schemeClr val="lt1"/>
+          </a:fontRef>
+        </p:style>
+        <p:txBody>
+          <a:bodyPr rtlCol="0" anchor="ctr"/>
+          <a:lstStyle/>
+          <a:p>
+            <a:pPr algn="ctr"/>
+            <a:endParaRPr lang="en-US"/>
+          </a:p>
+        </p:txBody>
+      </p:sp>
+      <p:sp>
+        <p:nvSpPr>
+          <p:cNvPr id="2" name="Title 1">
+            <a:extLst>
+              <a:ext uri="{FF2B5EF4-FFF2-40B4-BE49-F238E27FC236}">
+                <a16:creationId xmlns:a16="http://schemas.microsoft.com/office/drawing/2014/main" id="{557A9CCF-9090-91FE-650B-10AF4A8378E3}"/>
+              </a:ext>
+            </a:extLst>
+          </p:cNvPr>
+          <p:cNvSpPr>
+            <a:spLocks noGrp="1"/>
+          </p:cNvSpPr>
+          <p:nvPr>
+            <p:ph type="title"/>
+          </p:nvPr>
+        </p:nvSpPr>
+        <p:spPr/>
+        <p:txBody>
+          <a:bodyPr/>
+          <a:lstStyle/>
+          <a:p>
+            <a:r>
+              <a:rPr lang="en-US" dirty="0"/>
+              <a:t>Join the AI Conversation </a:t>
+            </a:r>
+            <a:br>
+              <a:rPr lang="en-US" dirty="0"/>
+            </a:br>
+            <a:r>
+              <a:rPr lang="en-US" dirty="0"/>
+              <a:t>on Discord</a:t>
+            </a:r>
+          </a:p>
+        </p:txBody>
+      </p:sp>
+      <p:pic>
+        <p:nvPicPr>
+          <p:cNvPr id="4" name="Picture 3" descr="A qr code with circles and circles&#10;&#10;AI-generated content may be incorrect.">
+            <a:extLst>
+              <a:ext uri="{FF2B5EF4-FFF2-40B4-BE49-F238E27FC236}">
+                <a16:creationId xmlns:a16="http://schemas.microsoft.com/office/drawing/2014/main" id="{A960E958-EF62-2B2D-D095-EE57766258AA}"/>
+              </a:ext>
+            </a:extLst>
+          </p:cNvPr>
+          <p:cNvPicPr>
+            <a:picLocks noChangeAspect="1"/>
+          </p:cNvPicPr>
+          <p:nvPr/>
+        </p:nvPicPr>
+        <p:blipFill>
+          <a:blip r:embed="rId2">
+            <a:extLst>
               <a:ext uri="{28A0092B-C50C-407E-A947-70E740481C1C}">
                 <a14:useLocalDpi xmlns:a14="http://schemas.microsoft.com/office/drawing/2010/main" val="0"/>
               </a:ext>
@@ -4418,6 +7646,2030 @@
     <p:extLst>
       <p:ext uri="{BB962C8B-B14F-4D97-AF65-F5344CB8AC3E}">
         <p14:creationId xmlns:p14="http://schemas.microsoft.com/office/powerpoint/2010/main" val="3062574203"/>
+      </p:ext>
+    </p:extLst>
+  </p:cSld>
+  <p:clrMapOvr>
+    <a:masterClrMapping/>
+  </p:clrMapOvr>
+</p:sld>
+</file>
+
+<file path=ppt/slides/slide6.xml><?xml version="1.0" encoding="utf-8"?>
+<p:sld xmlns:a="http://schemas.openxmlformats.org/drawingml/2006/main" xmlns:r="http://schemas.openxmlformats.org/officeDocument/2006/relationships" xmlns:p="http://schemas.openxmlformats.org/presentationml/2006/main">
+  <p:cSld>
+    <p:spTree>
+      <p:nvGrpSpPr>
+        <p:cNvPr id="1" name=""/>
+        <p:cNvGrpSpPr/>
+        <p:nvPr/>
+      </p:nvGrpSpPr>
+      <p:grpSpPr>
+        <a:xfrm>
+          <a:off x="0" y="0"/>
+          <a:ext cx="0" cy="0"/>
+          <a:chOff x="0" y="0"/>
+          <a:chExt cx="0" cy="0"/>
+        </a:xfrm>
+      </p:grpSpPr>
+      <p:sp>
+        <p:nvSpPr>
+          <p:cNvPr id="4" name="Rectangle: Rounded Corners 3">
+            <a:extLst>
+              <a:ext uri="{FF2B5EF4-FFF2-40B4-BE49-F238E27FC236}">
+                <a16:creationId xmlns:a16="http://schemas.microsoft.com/office/drawing/2014/main" id="{F3C58B17-D5C6-6279-6D2F-12B9FF77A8CA}"/>
+              </a:ext>
+            </a:extLst>
+          </p:cNvPr>
+          <p:cNvSpPr/>
+          <p:nvPr/>
+        </p:nvSpPr>
+        <p:spPr>
+          <a:xfrm>
+            <a:off x="4404851" y="277746"/>
+            <a:ext cx="3382298" cy="921789"/>
+          </a:xfrm>
+          <a:prstGeom prst="roundRect">
+            <a:avLst/>
+          </a:prstGeom>
+          <a:noFill/>
+          <a:ln w="28575">
+            <a:solidFill>
+              <a:srgbClr val="DDD7C0"/>
+            </a:solidFill>
+          </a:ln>
+        </p:spPr>
+        <p:style>
+          <a:lnRef idx="2">
+            <a:schemeClr val="accent1">
+              <a:shade val="15000"/>
+            </a:schemeClr>
+          </a:lnRef>
+          <a:fillRef idx="1">
+            <a:schemeClr val="accent1"/>
+          </a:fillRef>
+          <a:effectRef idx="0">
+            <a:schemeClr val="accent1"/>
+          </a:effectRef>
+          <a:fontRef idx="minor">
+            <a:schemeClr val="lt1"/>
+          </a:fontRef>
+        </p:style>
+        <p:txBody>
+          <a:bodyPr rtlCol="0" anchor="ctr"/>
+          <a:lstStyle/>
+          <a:p>
+            <a:pPr algn="ctr"/>
+            <a:endParaRPr lang="en-US"/>
+          </a:p>
+        </p:txBody>
+      </p:sp>
+      <p:sp>
+        <p:nvSpPr>
+          <p:cNvPr id="7" name="TextBox 6">
+            <a:extLst>
+              <a:ext uri="{FF2B5EF4-FFF2-40B4-BE49-F238E27FC236}">
+                <a16:creationId xmlns:a16="http://schemas.microsoft.com/office/drawing/2014/main" id="{E1D84015-4ACC-A791-2264-0955650027B1}"/>
+              </a:ext>
+            </a:extLst>
+          </p:cNvPr>
+          <p:cNvSpPr txBox="1"/>
+          <p:nvPr/>
+        </p:nvSpPr>
+        <p:spPr>
+          <a:xfrm>
+            <a:off x="5830530" y="415474"/>
+            <a:ext cx="1838631" cy="646331"/>
+          </a:xfrm>
+          <a:prstGeom prst="rect">
+            <a:avLst/>
+          </a:prstGeom>
+          <a:noFill/>
+        </p:spPr>
+        <p:txBody>
+          <a:bodyPr wrap="square">
+            <a:spAutoFit/>
+          </a:bodyPr>
+          <a:lstStyle/>
+          <a:p>
+            <a:pPr algn="ctr"/>
+            <a:r>
+              <a:rPr lang="en-US" b="1" dirty="0">
+                <a:solidFill>
+                  <a:srgbClr val="665649"/>
+                </a:solidFill>
+              </a:rPr>
+              <a:t>Welcome Note </a:t>
+            </a:r>
+          </a:p>
+          <a:p>
+            <a:pPr algn="ctr"/>
+            <a:r>
+              <a:rPr lang="en-US" dirty="0">
+                <a:solidFill>
+                  <a:srgbClr val="665649"/>
+                </a:solidFill>
+              </a:rPr>
+              <a:t>Dux and Dr. Eric</a:t>
+            </a:r>
+          </a:p>
+        </p:txBody>
+      </p:sp>
+      <p:sp>
+        <p:nvSpPr>
+          <p:cNvPr id="8" name="TextBox 7">
+            <a:extLst>
+              <a:ext uri="{FF2B5EF4-FFF2-40B4-BE49-F238E27FC236}">
+                <a16:creationId xmlns:a16="http://schemas.microsoft.com/office/drawing/2014/main" id="{0A998A68-6F0A-F096-0858-1AB58A30DF25}"/>
+              </a:ext>
+            </a:extLst>
+          </p:cNvPr>
+          <p:cNvSpPr txBox="1"/>
+          <p:nvPr/>
+        </p:nvSpPr>
+        <p:spPr>
+          <a:xfrm>
+            <a:off x="4559315" y="415474"/>
+            <a:ext cx="1156086" cy="646331"/>
+          </a:xfrm>
+          <a:prstGeom prst="rect">
+            <a:avLst/>
+          </a:prstGeom>
+          <a:noFill/>
+        </p:spPr>
+        <p:txBody>
+          <a:bodyPr wrap="none" rtlCol="0">
+            <a:spAutoFit/>
+          </a:bodyPr>
+          <a:lstStyle/>
+          <a:p>
+            <a:r>
+              <a:rPr lang="en-US" dirty="0">
+                <a:solidFill>
+                  <a:srgbClr val="665649"/>
+                </a:solidFill>
+              </a:rPr>
+              <a:t>10:00 AM </a:t>
+            </a:r>
+          </a:p>
+          <a:p>
+            <a:r>
+              <a:rPr lang="en-US" dirty="0">
+                <a:solidFill>
+                  <a:srgbClr val="665649"/>
+                </a:solidFill>
+              </a:rPr>
+              <a:t>10:30 AM</a:t>
+            </a:r>
+          </a:p>
+        </p:txBody>
+      </p:sp>
+      <p:cxnSp>
+        <p:nvCxnSpPr>
+          <p:cNvPr id="10" name="Straight Connector 9">
+            <a:extLst>
+              <a:ext uri="{FF2B5EF4-FFF2-40B4-BE49-F238E27FC236}">
+                <a16:creationId xmlns:a16="http://schemas.microsoft.com/office/drawing/2014/main" id="{9E1A2DD6-F858-1CBC-BDA3-8BDD59B5D089}"/>
+              </a:ext>
+            </a:extLst>
+          </p:cNvPr>
+          <p:cNvCxnSpPr>
+            <a:cxnSpLocks/>
+          </p:cNvCxnSpPr>
+          <p:nvPr/>
+        </p:nvCxnSpPr>
+        <p:spPr>
+          <a:xfrm>
+            <a:off x="5715401" y="415474"/>
+            <a:ext cx="0" cy="609600"/>
+          </a:xfrm>
+          <a:prstGeom prst="line">
+            <a:avLst/>
+          </a:prstGeom>
+          <a:ln w="28575">
+            <a:solidFill>
+              <a:srgbClr val="DDD7C0"/>
+            </a:solidFill>
+          </a:ln>
+        </p:spPr>
+        <p:style>
+          <a:lnRef idx="2">
+            <a:schemeClr val="accent1"/>
+          </a:lnRef>
+          <a:fillRef idx="0">
+            <a:schemeClr val="accent1"/>
+          </a:fillRef>
+          <a:effectRef idx="1">
+            <a:schemeClr val="accent1"/>
+          </a:effectRef>
+          <a:fontRef idx="minor">
+            <a:schemeClr val="tx1"/>
+          </a:fontRef>
+        </p:style>
+      </p:cxnSp>
+      <p:grpSp>
+        <p:nvGrpSpPr>
+          <p:cNvPr id="24" name="Group 23">
+            <a:extLst>
+              <a:ext uri="{FF2B5EF4-FFF2-40B4-BE49-F238E27FC236}">
+                <a16:creationId xmlns:a16="http://schemas.microsoft.com/office/drawing/2014/main" id="{5E84B7DD-DC72-9737-590D-6B0623EBAC33}"/>
+              </a:ext>
+            </a:extLst>
+          </p:cNvPr>
+          <p:cNvGrpSpPr/>
+          <p:nvPr/>
+        </p:nvGrpSpPr>
+        <p:grpSpPr>
+          <a:xfrm>
+            <a:off x="3397045" y="1619079"/>
+            <a:ext cx="5754961" cy="923330"/>
+            <a:chOff x="3397045" y="2130356"/>
+            <a:chExt cx="5754961" cy="923330"/>
+          </a:xfrm>
+        </p:grpSpPr>
+        <p:sp>
+          <p:nvSpPr>
+            <p:cNvPr id="14" name="Rectangle: Rounded Corners 13">
+              <a:extLst>
+                <a:ext uri="{FF2B5EF4-FFF2-40B4-BE49-F238E27FC236}">
+                  <a16:creationId xmlns:a16="http://schemas.microsoft.com/office/drawing/2014/main" id="{6E7A347F-7288-EAD7-7534-D4C6D5096DF5}"/>
+                </a:ext>
+              </a:extLst>
+            </p:cNvPr>
+            <p:cNvSpPr/>
+            <p:nvPr/>
+          </p:nvSpPr>
+          <p:spPr>
+            <a:xfrm>
+              <a:off x="3397045" y="2131126"/>
+              <a:ext cx="5397910" cy="921789"/>
+            </a:xfrm>
+            <a:prstGeom prst="roundRect">
+              <a:avLst/>
+            </a:prstGeom>
+            <a:noFill/>
+            <a:ln w="28575">
+              <a:solidFill>
+                <a:srgbClr val="DDD7C0"/>
+              </a:solidFill>
+            </a:ln>
+          </p:spPr>
+          <p:style>
+            <a:lnRef idx="2">
+              <a:schemeClr val="accent1">
+                <a:shade val="15000"/>
+              </a:schemeClr>
+            </a:lnRef>
+            <a:fillRef idx="1">
+              <a:schemeClr val="accent1"/>
+            </a:fillRef>
+            <a:effectRef idx="0">
+              <a:schemeClr val="accent1"/>
+            </a:effectRef>
+            <a:fontRef idx="minor">
+              <a:schemeClr val="lt1"/>
+            </a:fontRef>
+          </p:style>
+          <p:txBody>
+            <a:bodyPr rtlCol="0" anchor="ctr"/>
+            <a:lstStyle/>
+            <a:p>
+              <a:pPr algn="ctr"/>
+              <a:endParaRPr lang="en-US"/>
+            </a:p>
+          </p:txBody>
+        </p:sp>
+        <p:sp>
+          <p:nvSpPr>
+            <p:cNvPr id="15" name="TextBox 14">
+              <a:extLst>
+                <a:ext uri="{FF2B5EF4-FFF2-40B4-BE49-F238E27FC236}">
+                  <a16:creationId xmlns:a16="http://schemas.microsoft.com/office/drawing/2014/main" id="{CB879268-8979-B197-130B-71594E0ACA00}"/>
+                </a:ext>
+              </a:extLst>
+            </p:cNvPr>
+            <p:cNvSpPr txBox="1"/>
+            <p:nvPr/>
+          </p:nvSpPr>
+          <p:spPr>
+            <a:xfrm>
+              <a:off x="4963465" y="2130356"/>
+              <a:ext cx="4188541" cy="923330"/>
+            </a:xfrm>
+            <a:prstGeom prst="rect">
+              <a:avLst/>
+            </a:prstGeom>
+            <a:noFill/>
+          </p:spPr>
+          <p:txBody>
+            <a:bodyPr wrap="square">
+              <a:spAutoFit/>
+            </a:bodyPr>
+            <a:lstStyle/>
+            <a:p>
+              <a:pPr algn="ctr"/>
+              <a:r>
+                <a:rPr lang="en-US" b="1" dirty="0">
+                  <a:solidFill>
+                    <a:srgbClr val="665649"/>
+                  </a:solidFill>
+                </a:rPr>
+                <a:t>Keynote</a:t>
+              </a:r>
+            </a:p>
+            <a:p>
+              <a:pPr algn="ctr"/>
+              <a:r>
+                <a:rPr lang="en-US" dirty="0">
+                  <a:solidFill>
+                    <a:srgbClr val="665649"/>
+                  </a:solidFill>
+                </a:rPr>
+                <a:t>Henk Boelman, Dona Sarkar, Dux Raymond Sy, Ankur Sharma</a:t>
+              </a:r>
+            </a:p>
+          </p:txBody>
+        </p:sp>
+        <p:sp>
+          <p:nvSpPr>
+            <p:cNvPr id="16" name="TextBox 15">
+              <a:extLst>
+                <a:ext uri="{FF2B5EF4-FFF2-40B4-BE49-F238E27FC236}">
+                  <a16:creationId xmlns:a16="http://schemas.microsoft.com/office/drawing/2014/main" id="{D43DDDE0-0455-84DC-4AAA-45174821D148}"/>
+                </a:ext>
+              </a:extLst>
+            </p:cNvPr>
+            <p:cNvSpPr txBox="1"/>
+            <p:nvPr/>
+          </p:nvSpPr>
+          <p:spPr>
+            <a:xfrm>
+              <a:off x="3978180" y="2268854"/>
+              <a:ext cx="1156086" cy="646331"/>
+            </a:xfrm>
+            <a:prstGeom prst="rect">
+              <a:avLst/>
+            </a:prstGeom>
+            <a:noFill/>
+          </p:spPr>
+          <p:txBody>
+            <a:bodyPr wrap="none" rtlCol="0">
+              <a:spAutoFit/>
+            </a:bodyPr>
+            <a:lstStyle/>
+            <a:p>
+              <a:r>
+                <a:rPr lang="en-US" dirty="0">
+                  <a:solidFill>
+                    <a:srgbClr val="665649"/>
+                  </a:solidFill>
+                </a:rPr>
+                <a:t>10:30 AM </a:t>
+              </a:r>
+            </a:p>
+            <a:p>
+              <a:r>
+                <a:rPr lang="en-US" dirty="0">
+                  <a:solidFill>
+                    <a:srgbClr val="665649"/>
+                  </a:solidFill>
+                </a:rPr>
+                <a:t>11:30 AM</a:t>
+              </a:r>
+            </a:p>
+          </p:txBody>
+        </p:sp>
+        <p:cxnSp>
+          <p:nvCxnSpPr>
+            <p:cNvPr id="17" name="Straight Connector 16">
+              <a:extLst>
+                <a:ext uri="{FF2B5EF4-FFF2-40B4-BE49-F238E27FC236}">
+                  <a16:creationId xmlns:a16="http://schemas.microsoft.com/office/drawing/2014/main" id="{C0165EDC-BB3F-C597-85E8-A999F8342766}"/>
+                </a:ext>
+              </a:extLst>
+            </p:cNvPr>
+            <p:cNvCxnSpPr>
+              <a:cxnSpLocks/>
+            </p:cNvCxnSpPr>
+            <p:nvPr/>
+          </p:nvCxnSpPr>
+          <p:spPr>
+            <a:xfrm>
+              <a:off x="5233621" y="2268854"/>
+              <a:ext cx="0" cy="609600"/>
+            </a:xfrm>
+            <a:prstGeom prst="line">
+              <a:avLst/>
+            </a:prstGeom>
+            <a:ln w="28575">
+              <a:solidFill>
+                <a:srgbClr val="DDD7C0"/>
+              </a:solidFill>
+            </a:ln>
+          </p:spPr>
+          <p:style>
+            <a:lnRef idx="2">
+              <a:schemeClr val="accent1"/>
+            </a:lnRef>
+            <a:fillRef idx="0">
+              <a:schemeClr val="accent1"/>
+            </a:fillRef>
+            <a:effectRef idx="1">
+              <a:schemeClr val="accent1"/>
+            </a:effectRef>
+            <a:fontRef idx="minor">
+              <a:schemeClr val="tx1"/>
+            </a:fontRef>
+          </p:style>
+        </p:cxnSp>
+      </p:grpSp>
+      <p:cxnSp>
+        <p:nvCxnSpPr>
+          <p:cNvPr id="21" name="Straight Arrow Connector 20">
+            <a:extLst>
+              <a:ext uri="{FF2B5EF4-FFF2-40B4-BE49-F238E27FC236}">
+                <a16:creationId xmlns:a16="http://schemas.microsoft.com/office/drawing/2014/main" id="{CEB55084-4C5A-D59E-E934-119341D37491}"/>
+              </a:ext>
+            </a:extLst>
+          </p:cNvPr>
+          <p:cNvCxnSpPr>
+            <a:cxnSpLocks/>
+            <a:stCxn id="4" idx="2"/>
+            <a:endCxn id="14" idx="0"/>
+          </p:cNvCxnSpPr>
+          <p:nvPr/>
+        </p:nvCxnSpPr>
+        <p:spPr>
+          <a:xfrm>
+            <a:off x="6096000" y="1199535"/>
+            <a:ext cx="0" cy="420314"/>
+          </a:xfrm>
+          <a:prstGeom prst="straightConnector1">
+            <a:avLst/>
+          </a:prstGeom>
+          <a:ln w="28575">
+            <a:solidFill>
+              <a:srgbClr val="665649"/>
+            </a:solidFill>
+            <a:tailEnd type="triangle"/>
+          </a:ln>
+        </p:spPr>
+        <p:style>
+          <a:lnRef idx="2">
+            <a:schemeClr val="accent1"/>
+          </a:lnRef>
+          <a:fillRef idx="0">
+            <a:schemeClr val="accent1"/>
+          </a:fillRef>
+          <a:effectRef idx="1">
+            <a:schemeClr val="accent1"/>
+          </a:effectRef>
+          <a:fontRef idx="minor">
+            <a:schemeClr val="tx1"/>
+          </a:fontRef>
+        </p:style>
+      </p:cxnSp>
+      <p:sp>
+        <p:nvSpPr>
+          <p:cNvPr id="23" name="Rectangle: Rounded Corners 22">
+            <a:extLst>
+              <a:ext uri="{FF2B5EF4-FFF2-40B4-BE49-F238E27FC236}">
+                <a16:creationId xmlns:a16="http://schemas.microsoft.com/office/drawing/2014/main" id="{4DAC2D87-E6FC-3367-E6CE-7D11CFBF964F}"/>
+              </a:ext>
+            </a:extLst>
+          </p:cNvPr>
+          <p:cNvSpPr/>
+          <p:nvPr/>
+        </p:nvSpPr>
+        <p:spPr>
+          <a:xfrm>
+            <a:off x="1510482" y="2961952"/>
+            <a:ext cx="2084439" cy="656319"/>
+          </a:xfrm>
+          <a:prstGeom prst="roundRect">
+            <a:avLst/>
+          </a:prstGeom>
+          <a:noFill/>
+          <a:ln w="28575">
+            <a:solidFill>
+              <a:srgbClr val="DDD7C0"/>
+            </a:solidFill>
+          </a:ln>
+        </p:spPr>
+        <p:style>
+          <a:lnRef idx="2">
+            <a:schemeClr val="accent1">
+              <a:shade val="15000"/>
+            </a:schemeClr>
+          </a:lnRef>
+          <a:fillRef idx="1">
+            <a:schemeClr val="accent1"/>
+          </a:fillRef>
+          <a:effectRef idx="0">
+            <a:schemeClr val="accent1"/>
+          </a:effectRef>
+          <a:fontRef idx="minor">
+            <a:schemeClr val="lt1"/>
+          </a:fontRef>
+        </p:style>
+        <p:txBody>
+          <a:bodyPr rtlCol="0" anchor="ctr"/>
+          <a:lstStyle/>
+          <a:p>
+            <a:pPr algn="ctr"/>
+            <a:endParaRPr lang="en-US"/>
+          </a:p>
+        </p:txBody>
+      </p:sp>
+      <p:sp>
+        <p:nvSpPr>
+          <p:cNvPr id="25" name="TextBox 24">
+            <a:extLst>
+              <a:ext uri="{FF2B5EF4-FFF2-40B4-BE49-F238E27FC236}">
+                <a16:creationId xmlns:a16="http://schemas.microsoft.com/office/drawing/2014/main" id="{CFA0D13E-3272-39E0-870B-D6FD8A9C9F44}"/>
+              </a:ext>
+            </a:extLst>
+          </p:cNvPr>
+          <p:cNvSpPr txBox="1"/>
+          <p:nvPr/>
+        </p:nvSpPr>
+        <p:spPr>
+          <a:xfrm>
+            <a:off x="1453946" y="2997723"/>
+            <a:ext cx="2197509" cy="584775"/>
+          </a:xfrm>
+          <a:prstGeom prst="rect">
+            <a:avLst/>
+          </a:prstGeom>
+          <a:noFill/>
+        </p:spPr>
+        <p:txBody>
+          <a:bodyPr wrap="square">
+            <a:spAutoFit/>
+          </a:bodyPr>
+          <a:lstStyle/>
+          <a:p>
+            <a:pPr algn="ctr"/>
+            <a:r>
+              <a:rPr lang="en-US" sz="1600" b="1" dirty="0">
+                <a:solidFill>
+                  <a:srgbClr val="665649"/>
+                </a:solidFill>
+              </a:rPr>
+              <a:t>Lecture Theatre 5</a:t>
+            </a:r>
+          </a:p>
+          <a:p>
+            <a:pPr algn="ctr"/>
+            <a:r>
+              <a:rPr lang="en-US" sz="1600" dirty="0">
+                <a:solidFill>
+                  <a:srgbClr val="665649"/>
+                </a:solidFill>
+              </a:rPr>
+              <a:t>English</a:t>
+            </a:r>
+          </a:p>
+        </p:txBody>
+      </p:sp>
+      <p:sp>
+        <p:nvSpPr>
+          <p:cNvPr id="32" name="Rectangle: Rounded Corners 31">
+            <a:extLst>
+              <a:ext uri="{FF2B5EF4-FFF2-40B4-BE49-F238E27FC236}">
+                <a16:creationId xmlns:a16="http://schemas.microsoft.com/office/drawing/2014/main" id="{7F7FA77A-D9D5-5087-0F87-F4580620B94F}"/>
+              </a:ext>
+            </a:extLst>
+          </p:cNvPr>
+          <p:cNvSpPr/>
+          <p:nvPr/>
+        </p:nvSpPr>
+        <p:spPr>
+          <a:xfrm>
+            <a:off x="3872682" y="2961952"/>
+            <a:ext cx="2084439" cy="656319"/>
+          </a:xfrm>
+          <a:prstGeom prst="roundRect">
+            <a:avLst/>
+          </a:prstGeom>
+          <a:noFill/>
+          <a:ln w="28575">
+            <a:solidFill>
+              <a:srgbClr val="DDD7C0"/>
+            </a:solidFill>
+          </a:ln>
+        </p:spPr>
+        <p:style>
+          <a:lnRef idx="2">
+            <a:schemeClr val="accent1">
+              <a:shade val="15000"/>
+            </a:schemeClr>
+          </a:lnRef>
+          <a:fillRef idx="1">
+            <a:schemeClr val="accent1"/>
+          </a:fillRef>
+          <a:effectRef idx="0">
+            <a:schemeClr val="accent1"/>
+          </a:effectRef>
+          <a:fontRef idx="minor">
+            <a:schemeClr val="lt1"/>
+          </a:fontRef>
+        </p:style>
+        <p:txBody>
+          <a:bodyPr rtlCol="0" anchor="ctr"/>
+          <a:lstStyle/>
+          <a:p>
+            <a:pPr algn="ctr"/>
+            <a:endParaRPr lang="en-US"/>
+          </a:p>
+        </p:txBody>
+      </p:sp>
+      <p:sp>
+        <p:nvSpPr>
+          <p:cNvPr id="33" name="TextBox 32">
+            <a:extLst>
+              <a:ext uri="{FF2B5EF4-FFF2-40B4-BE49-F238E27FC236}">
+                <a16:creationId xmlns:a16="http://schemas.microsoft.com/office/drawing/2014/main" id="{3E1C95BF-E4BA-7538-EA44-A34492493ED7}"/>
+              </a:ext>
+            </a:extLst>
+          </p:cNvPr>
+          <p:cNvSpPr txBox="1"/>
+          <p:nvPr/>
+        </p:nvSpPr>
+        <p:spPr>
+          <a:xfrm>
+            <a:off x="3816146" y="2997723"/>
+            <a:ext cx="2197509" cy="584775"/>
+          </a:xfrm>
+          <a:prstGeom prst="rect">
+            <a:avLst/>
+          </a:prstGeom>
+          <a:noFill/>
+        </p:spPr>
+        <p:txBody>
+          <a:bodyPr wrap="square">
+            <a:spAutoFit/>
+          </a:bodyPr>
+          <a:lstStyle/>
+          <a:p>
+            <a:pPr algn="ctr"/>
+            <a:r>
+              <a:rPr lang="en-US" sz="1600" b="1" dirty="0">
+                <a:solidFill>
+                  <a:srgbClr val="665649"/>
+                </a:solidFill>
+              </a:rPr>
+              <a:t>Lecture Theatre 2</a:t>
+            </a:r>
+          </a:p>
+          <a:p>
+            <a:pPr algn="ctr"/>
+            <a:r>
+              <a:rPr lang="en-US" sz="1600" dirty="0">
+                <a:solidFill>
+                  <a:srgbClr val="665649"/>
+                </a:solidFill>
+              </a:rPr>
+              <a:t>Cantonese</a:t>
+            </a:r>
+          </a:p>
+        </p:txBody>
+      </p:sp>
+      <p:sp>
+        <p:nvSpPr>
+          <p:cNvPr id="35" name="Rectangle: Rounded Corners 34">
+            <a:extLst>
+              <a:ext uri="{FF2B5EF4-FFF2-40B4-BE49-F238E27FC236}">
+                <a16:creationId xmlns:a16="http://schemas.microsoft.com/office/drawing/2014/main" id="{7F03068C-99F1-6D3F-0397-88B1A95B66CD}"/>
+              </a:ext>
+            </a:extLst>
+          </p:cNvPr>
+          <p:cNvSpPr/>
+          <p:nvPr/>
+        </p:nvSpPr>
+        <p:spPr>
+          <a:xfrm>
+            <a:off x="6234882" y="2961952"/>
+            <a:ext cx="2084439" cy="656319"/>
+          </a:xfrm>
+          <a:prstGeom prst="roundRect">
+            <a:avLst/>
+          </a:prstGeom>
+          <a:noFill/>
+          <a:ln w="28575">
+            <a:solidFill>
+              <a:srgbClr val="DDD7C0"/>
+            </a:solidFill>
+          </a:ln>
+        </p:spPr>
+        <p:style>
+          <a:lnRef idx="2">
+            <a:schemeClr val="accent1">
+              <a:shade val="15000"/>
+            </a:schemeClr>
+          </a:lnRef>
+          <a:fillRef idx="1">
+            <a:schemeClr val="accent1"/>
+          </a:fillRef>
+          <a:effectRef idx="0">
+            <a:schemeClr val="accent1"/>
+          </a:effectRef>
+          <a:fontRef idx="minor">
+            <a:schemeClr val="lt1"/>
+          </a:fontRef>
+        </p:style>
+        <p:txBody>
+          <a:bodyPr rtlCol="0" anchor="ctr"/>
+          <a:lstStyle/>
+          <a:p>
+            <a:pPr algn="ctr"/>
+            <a:endParaRPr lang="en-US"/>
+          </a:p>
+        </p:txBody>
+      </p:sp>
+      <p:sp>
+        <p:nvSpPr>
+          <p:cNvPr id="36" name="TextBox 35">
+            <a:extLst>
+              <a:ext uri="{FF2B5EF4-FFF2-40B4-BE49-F238E27FC236}">
+                <a16:creationId xmlns:a16="http://schemas.microsoft.com/office/drawing/2014/main" id="{43343EFC-86A5-3B9E-F70C-A31D2C533ADD}"/>
+              </a:ext>
+            </a:extLst>
+          </p:cNvPr>
+          <p:cNvSpPr txBox="1"/>
+          <p:nvPr/>
+        </p:nvSpPr>
+        <p:spPr>
+          <a:xfrm>
+            <a:off x="6178346" y="2997723"/>
+            <a:ext cx="2197509" cy="584775"/>
+          </a:xfrm>
+          <a:prstGeom prst="rect">
+            <a:avLst/>
+          </a:prstGeom>
+          <a:noFill/>
+        </p:spPr>
+        <p:txBody>
+          <a:bodyPr wrap="square">
+            <a:spAutoFit/>
+          </a:bodyPr>
+          <a:lstStyle/>
+          <a:p>
+            <a:pPr algn="ctr"/>
+            <a:r>
+              <a:rPr lang="en-US" sz="1600" b="1" dirty="0">
+                <a:solidFill>
+                  <a:srgbClr val="665649"/>
+                </a:solidFill>
+              </a:rPr>
+              <a:t>Cybersecurity </a:t>
+            </a:r>
+          </a:p>
+          <a:p>
+            <a:pPr algn="ctr"/>
+            <a:r>
+              <a:rPr lang="en-US" sz="1600" dirty="0">
+                <a:solidFill>
+                  <a:srgbClr val="665649"/>
+                </a:solidFill>
+              </a:rPr>
+              <a:t>Ctr 412, 413</a:t>
+            </a:r>
+          </a:p>
+        </p:txBody>
+      </p:sp>
+      <p:sp>
+        <p:nvSpPr>
+          <p:cNvPr id="38" name="Rectangle: Rounded Corners 37">
+            <a:extLst>
+              <a:ext uri="{FF2B5EF4-FFF2-40B4-BE49-F238E27FC236}">
+                <a16:creationId xmlns:a16="http://schemas.microsoft.com/office/drawing/2014/main" id="{7E53AC7B-2C22-BA2F-77A9-7AE194AF404A}"/>
+              </a:ext>
+            </a:extLst>
+          </p:cNvPr>
+          <p:cNvSpPr/>
+          <p:nvPr/>
+        </p:nvSpPr>
+        <p:spPr>
+          <a:xfrm>
+            <a:off x="8597082" y="2961952"/>
+            <a:ext cx="2084439" cy="656319"/>
+          </a:xfrm>
+          <a:prstGeom prst="roundRect">
+            <a:avLst/>
+          </a:prstGeom>
+          <a:noFill/>
+          <a:ln w="28575">
+            <a:solidFill>
+              <a:srgbClr val="DDD7C0"/>
+            </a:solidFill>
+          </a:ln>
+        </p:spPr>
+        <p:style>
+          <a:lnRef idx="2">
+            <a:schemeClr val="accent1">
+              <a:shade val="15000"/>
+            </a:schemeClr>
+          </a:lnRef>
+          <a:fillRef idx="1">
+            <a:schemeClr val="accent1"/>
+          </a:fillRef>
+          <a:effectRef idx="0">
+            <a:schemeClr val="accent1"/>
+          </a:effectRef>
+          <a:fontRef idx="minor">
+            <a:schemeClr val="lt1"/>
+          </a:fontRef>
+        </p:style>
+        <p:txBody>
+          <a:bodyPr rtlCol="0" anchor="ctr"/>
+          <a:lstStyle/>
+          <a:p>
+            <a:pPr algn="ctr"/>
+            <a:endParaRPr lang="en-US"/>
+          </a:p>
+        </p:txBody>
+      </p:sp>
+      <p:sp>
+        <p:nvSpPr>
+          <p:cNvPr id="39" name="TextBox 38">
+            <a:extLst>
+              <a:ext uri="{FF2B5EF4-FFF2-40B4-BE49-F238E27FC236}">
+                <a16:creationId xmlns:a16="http://schemas.microsoft.com/office/drawing/2014/main" id="{F7672470-14D8-B4E2-457F-5DAB9EFC6284}"/>
+              </a:ext>
+            </a:extLst>
+          </p:cNvPr>
+          <p:cNvSpPr txBox="1"/>
+          <p:nvPr/>
+        </p:nvSpPr>
+        <p:spPr>
+          <a:xfrm>
+            <a:off x="8540546" y="2997723"/>
+            <a:ext cx="2197509" cy="584775"/>
+          </a:xfrm>
+          <a:prstGeom prst="rect">
+            <a:avLst/>
+          </a:prstGeom>
+          <a:noFill/>
+        </p:spPr>
+        <p:txBody>
+          <a:bodyPr wrap="square">
+            <a:spAutoFit/>
+          </a:bodyPr>
+          <a:lstStyle/>
+          <a:p>
+            <a:pPr algn="ctr"/>
+            <a:r>
+              <a:rPr lang="en-US" sz="1600" b="1" dirty="0">
+                <a:solidFill>
+                  <a:srgbClr val="665649"/>
+                </a:solidFill>
+              </a:rPr>
+              <a:t>Computer Room</a:t>
+            </a:r>
+          </a:p>
+          <a:p>
+            <a:pPr algn="ctr"/>
+            <a:r>
+              <a:rPr lang="en-US" sz="1600" dirty="0">
+                <a:solidFill>
+                  <a:srgbClr val="665649"/>
+                </a:solidFill>
+              </a:rPr>
+              <a:t>511</a:t>
+            </a:r>
+          </a:p>
+        </p:txBody>
+      </p:sp>
+      <p:cxnSp>
+        <p:nvCxnSpPr>
+          <p:cNvPr id="44" name="Connector: Curved 43">
+            <a:extLst>
+              <a:ext uri="{FF2B5EF4-FFF2-40B4-BE49-F238E27FC236}">
+                <a16:creationId xmlns:a16="http://schemas.microsoft.com/office/drawing/2014/main" id="{65A31507-CD2B-9F5E-0651-F8B3CC6E0A69}"/>
+              </a:ext>
+            </a:extLst>
+          </p:cNvPr>
+          <p:cNvCxnSpPr>
+            <a:endCxn id="23" idx="0"/>
+          </p:cNvCxnSpPr>
+          <p:nvPr/>
+        </p:nvCxnSpPr>
+        <p:spPr>
+          <a:xfrm rot="10800000" flipV="1">
+            <a:off x="2552702" y="2541638"/>
+            <a:ext cx="3543298" cy="420314"/>
+          </a:xfrm>
+          <a:prstGeom prst="curvedConnector2">
+            <a:avLst/>
+          </a:prstGeom>
+          <a:ln>
+            <a:solidFill>
+              <a:srgbClr val="665649"/>
+            </a:solidFill>
+            <a:headEnd type="none"/>
+            <a:tailEnd type="triangle"/>
+          </a:ln>
+        </p:spPr>
+        <p:style>
+          <a:lnRef idx="2">
+            <a:schemeClr val="accent1"/>
+          </a:lnRef>
+          <a:fillRef idx="0">
+            <a:schemeClr val="accent1"/>
+          </a:fillRef>
+          <a:effectRef idx="1">
+            <a:schemeClr val="accent1"/>
+          </a:effectRef>
+          <a:fontRef idx="minor">
+            <a:schemeClr val="tx1"/>
+          </a:fontRef>
+        </p:style>
+      </p:cxnSp>
+      <p:cxnSp>
+        <p:nvCxnSpPr>
+          <p:cNvPr id="46" name="Connector: Curved 45">
+            <a:extLst>
+              <a:ext uri="{FF2B5EF4-FFF2-40B4-BE49-F238E27FC236}">
+                <a16:creationId xmlns:a16="http://schemas.microsoft.com/office/drawing/2014/main" id="{EB7DC325-A70A-D120-DB0F-B81EEF0A5AC0}"/>
+              </a:ext>
+            </a:extLst>
+          </p:cNvPr>
+          <p:cNvCxnSpPr>
+            <a:stCxn id="14" idx="2"/>
+            <a:endCxn id="33" idx="0"/>
+          </p:cNvCxnSpPr>
+          <p:nvPr/>
+        </p:nvCxnSpPr>
+        <p:spPr>
+          <a:xfrm rot="5400000">
+            <a:off x="5277409" y="2179131"/>
+            <a:ext cx="456085" cy="1181099"/>
+          </a:xfrm>
+          <a:prstGeom prst="curvedConnector3">
+            <a:avLst/>
+          </a:prstGeom>
+          <a:ln>
+            <a:solidFill>
+              <a:srgbClr val="665649"/>
+            </a:solidFill>
+            <a:headEnd type="none"/>
+            <a:tailEnd type="triangle"/>
+          </a:ln>
+        </p:spPr>
+        <p:style>
+          <a:lnRef idx="2">
+            <a:schemeClr val="accent1"/>
+          </a:lnRef>
+          <a:fillRef idx="0">
+            <a:schemeClr val="accent1"/>
+          </a:fillRef>
+          <a:effectRef idx="1">
+            <a:schemeClr val="accent1"/>
+          </a:effectRef>
+          <a:fontRef idx="minor">
+            <a:schemeClr val="tx1"/>
+          </a:fontRef>
+        </p:style>
+      </p:cxnSp>
+      <p:cxnSp>
+        <p:nvCxnSpPr>
+          <p:cNvPr id="48" name="Connector: Curved 47">
+            <a:extLst>
+              <a:ext uri="{FF2B5EF4-FFF2-40B4-BE49-F238E27FC236}">
+                <a16:creationId xmlns:a16="http://schemas.microsoft.com/office/drawing/2014/main" id="{6D8CCE87-7EC1-81AB-5421-3BBE9E8C1F51}"/>
+              </a:ext>
+            </a:extLst>
+          </p:cNvPr>
+          <p:cNvCxnSpPr>
+            <a:endCxn id="35" idx="0"/>
+          </p:cNvCxnSpPr>
+          <p:nvPr/>
+        </p:nvCxnSpPr>
+        <p:spPr>
+          <a:xfrm>
+            <a:off x="6096000" y="2541638"/>
+            <a:ext cx="1181102" cy="420314"/>
+          </a:xfrm>
+          <a:prstGeom prst="curvedConnector2">
+            <a:avLst/>
+          </a:prstGeom>
+          <a:ln>
+            <a:solidFill>
+              <a:srgbClr val="665649"/>
+            </a:solidFill>
+            <a:tailEnd type="triangle"/>
+          </a:ln>
+        </p:spPr>
+        <p:style>
+          <a:lnRef idx="2">
+            <a:schemeClr val="accent1"/>
+          </a:lnRef>
+          <a:fillRef idx="0">
+            <a:schemeClr val="accent1"/>
+          </a:fillRef>
+          <a:effectRef idx="1">
+            <a:schemeClr val="accent1"/>
+          </a:effectRef>
+          <a:fontRef idx="minor">
+            <a:schemeClr val="tx1"/>
+          </a:fontRef>
+        </p:style>
+      </p:cxnSp>
+      <p:cxnSp>
+        <p:nvCxnSpPr>
+          <p:cNvPr id="50" name="Connector: Curved 49">
+            <a:extLst>
+              <a:ext uri="{FF2B5EF4-FFF2-40B4-BE49-F238E27FC236}">
+                <a16:creationId xmlns:a16="http://schemas.microsoft.com/office/drawing/2014/main" id="{E17FD592-1793-BC4D-4F2F-FF6678D28A3A}"/>
+              </a:ext>
+            </a:extLst>
+          </p:cNvPr>
+          <p:cNvCxnSpPr>
+            <a:endCxn id="39" idx="0"/>
+          </p:cNvCxnSpPr>
+          <p:nvPr/>
+        </p:nvCxnSpPr>
+        <p:spPr>
+          <a:xfrm>
+            <a:off x="6096000" y="2541638"/>
+            <a:ext cx="3543301" cy="456085"/>
+          </a:xfrm>
+          <a:prstGeom prst="curvedConnector2">
+            <a:avLst/>
+          </a:prstGeom>
+          <a:ln>
+            <a:solidFill>
+              <a:srgbClr val="665649"/>
+            </a:solidFill>
+            <a:tailEnd type="triangle"/>
+          </a:ln>
+        </p:spPr>
+        <p:style>
+          <a:lnRef idx="2">
+            <a:schemeClr val="accent1"/>
+          </a:lnRef>
+          <a:fillRef idx="0">
+            <a:schemeClr val="accent1"/>
+          </a:fillRef>
+          <a:effectRef idx="1">
+            <a:schemeClr val="accent1"/>
+          </a:effectRef>
+          <a:fontRef idx="minor">
+            <a:schemeClr val="tx1"/>
+          </a:fontRef>
+        </p:style>
+      </p:cxnSp>
+      <p:grpSp>
+        <p:nvGrpSpPr>
+          <p:cNvPr id="61" name="Group 60">
+            <a:extLst>
+              <a:ext uri="{FF2B5EF4-FFF2-40B4-BE49-F238E27FC236}">
+                <a16:creationId xmlns:a16="http://schemas.microsoft.com/office/drawing/2014/main" id="{1575DFBF-AB91-4F72-8D13-80A74C1190C0}"/>
+              </a:ext>
+            </a:extLst>
+          </p:cNvPr>
+          <p:cNvGrpSpPr/>
+          <p:nvPr/>
+        </p:nvGrpSpPr>
+        <p:grpSpPr>
+          <a:xfrm>
+            <a:off x="1510482" y="3884512"/>
+            <a:ext cx="9171039" cy="420316"/>
+            <a:chOff x="1510482" y="4189312"/>
+            <a:chExt cx="9171039" cy="420316"/>
+          </a:xfrm>
+        </p:grpSpPr>
+        <p:sp>
+          <p:nvSpPr>
+            <p:cNvPr id="52" name="Rectangle: Rounded Corners 51">
+              <a:extLst>
+                <a:ext uri="{FF2B5EF4-FFF2-40B4-BE49-F238E27FC236}">
+                  <a16:creationId xmlns:a16="http://schemas.microsoft.com/office/drawing/2014/main" id="{AE066BDA-C459-4A37-A195-072C16041B69}"/>
+                </a:ext>
+              </a:extLst>
+            </p:cNvPr>
+            <p:cNvSpPr/>
+            <p:nvPr/>
+          </p:nvSpPr>
+          <p:spPr>
+            <a:xfrm>
+              <a:off x="1510482" y="4189312"/>
+              <a:ext cx="9171039" cy="420316"/>
+            </a:xfrm>
+            <a:prstGeom prst="roundRect">
+              <a:avLst/>
+            </a:prstGeom>
+            <a:noFill/>
+            <a:ln w="28575">
+              <a:solidFill>
+                <a:srgbClr val="DDD7C0"/>
+              </a:solidFill>
+            </a:ln>
+          </p:spPr>
+          <p:style>
+            <a:lnRef idx="2">
+              <a:schemeClr val="accent1">
+                <a:shade val="15000"/>
+              </a:schemeClr>
+            </a:lnRef>
+            <a:fillRef idx="1">
+              <a:schemeClr val="accent1"/>
+            </a:fillRef>
+            <a:effectRef idx="0">
+              <a:schemeClr val="accent1"/>
+            </a:effectRef>
+            <a:fontRef idx="minor">
+              <a:schemeClr val="lt1"/>
+            </a:fontRef>
+          </p:style>
+          <p:txBody>
+            <a:bodyPr rtlCol="0" anchor="ctr"/>
+            <a:lstStyle/>
+            <a:p>
+              <a:pPr algn="ctr"/>
+              <a:endParaRPr lang="en-US"/>
+            </a:p>
+          </p:txBody>
+        </p:sp>
+        <p:sp>
+          <p:nvSpPr>
+            <p:cNvPr id="56" name="TextBox 55">
+              <a:extLst>
+                <a:ext uri="{FF2B5EF4-FFF2-40B4-BE49-F238E27FC236}">
+                  <a16:creationId xmlns:a16="http://schemas.microsoft.com/office/drawing/2014/main" id="{E3B0BBD7-7E79-CB18-0718-3885852A1A07}"/>
+                </a:ext>
+              </a:extLst>
+            </p:cNvPr>
+            <p:cNvSpPr txBox="1"/>
+            <p:nvPr/>
+          </p:nvSpPr>
+          <p:spPr>
+            <a:xfrm>
+              <a:off x="6234882" y="4230193"/>
+              <a:ext cx="1179870" cy="338554"/>
+            </a:xfrm>
+            <a:prstGeom prst="rect">
+              <a:avLst/>
+            </a:prstGeom>
+            <a:noFill/>
+          </p:spPr>
+          <p:txBody>
+            <a:bodyPr wrap="square">
+              <a:spAutoFit/>
+            </a:bodyPr>
+            <a:lstStyle/>
+            <a:p>
+              <a:pPr algn="ctr"/>
+              <a:r>
+                <a:rPr lang="en-US" sz="1600" b="1" dirty="0">
+                  <a:solidFill>
+                    <a:srgbClr val="665649"/>
+                  </a:solidFill>
+                </a:rPr>
+                <a:t>Lunch</a:t>
+              </a:r>
+            </a:p>
+          </p:txBody>
+        </p:sp>
+        <p:sp>
+          <p:nvSpPr>
+            <p:cNvPr id="57" name="TextBox 56">
+              <a:extLst>
+                <a:ext uri="{FF2B5EF4-FFF2-40B4-BE49-F238E27FC236}">
+                  <a16:creationId xmlns:a16="http://schemas.microsoft.com/office/drawing/2014/main" id="{758DDB4C-3BAA-412E-4AE9-A93C5FF7EB6E}"/>
+                </a:ext>
+              </a:extLst>
+            </p:cNvPr>
+            <p:cNvSpPr txBox="1"/>
+            <p:nvPr/>
+          </p:nvSpPr>
+          <p:spPr>
+            <a:xfrm>
+              <a:off x="3872682" y="4241967"/>
+              <a:ext cx="2533035" cy="338554"/>
+            </a:xfrm>
+            <a:prstGeom prst="rect">
+              <a:avLst/>
+            </a:prstGeom>
+            <a:noFill/>
+          </p:spPr>
+          <p:txBody>
+            <a:bodyPr wrap="square">
+              <a:spAutoFit/>
+            </a:bodyPr>
+            <a:lstStyle/>
+            <a:p>
+              <a:pPr algn="ctr"/>
+              <a:r>
+                <a:rPr lang="en-US" sz="1600" dirty="0">
+                  <a:solidFill>
+                    <a:srgbClr val="665649"/>
+                  </a:solidFill>
+                </a:rPr>
+                <a:t>01:00 PM – 01:30 PM</a:t>
+              </a:r>
+            </a:p>
+          </p:txBody>
+        </p:sp>
+      </p:grpSp>
+      <p:grpSp>
+        <p:nvGrpSpPr>
+          <p:cNvPr id="62" name="Group 61">
+            <a:extLst>
+              <a:ext uri="{FF2B5EF4-FFF2-40B4-BE49-F238E27FC236}">
+                <a16:creationId xmlns:a16="http://schemas.microsoft.com/office/drawing/2014/main" id="{2EC9B8EC-9D67-5B97-7D5F-55E8BADECD6B}"/>
+              </a:ext>
+            </a:extLst>
+          </p:cNvPr>
+          <p:cNvGrpSpPr/>
+          <p:nvPr/>
+        </p:nvGrpSpPr>
+        <p:grpSpPr>
+          <a:xfrm>
+            <a:off x="1510482" y="4469287"/>
+            <a:ext cx="9171039" cy="420316"/>
+            <a:chOff x="1510482" y="4189312"/>
+            <a:chExt cx="9171039" cy="420316"/>
+          </a:xfrm>
+        </p:grpSpPr>
+        <p:sp>
+          <p:nvSpPr>
+            <p:cNvPr id="63" name="Rectangle: Rounded Corners 62">
+              <a:extLst>
+                <a:ext uri="{FF2B5EF4-FFF2-40B4-BE49-F238E27FC236}">
+                  <a16:creationId xmlns:a16="http://schemas.microsoft.com/office/drawing/2014/main" id="{EEC75EEA-D14A-E38B-5293-F0144C999B6F}"/>
+                </a:ext>
+              </a:extLst>
+            </p:cNvPr>
+            <p:cNvSpPr/>
+            <p:nvPr/>
+          </p:nvSpPr>
+          <p:spPr>
+            <a:xfrm>
+              <a:off x="1510482" y="4189312"/>
+              <a:ext cx="9171039" cy="420316"/>
+            </a:xfrm>
+            <a:prstGeom prst="roundRect">
+              <a:avLst/>
+            </a:prstGeom>
+            <a:noFill/>
+            <a:ln w="28575">
+              <a:solidFill>
+                <a:srgbClr val="DDD7C0"/>
+              </a:solidFill>
+            </a:ln>
+          </p:spPr>
+          <p:style>
+            <a:lnRef idx="2">
+              <a:schemeClr val="accent1">
+                <a:shade val="15000"/>
+              </a:schemeClr>
+            </a:lnRef>
+            <a:fillRef idx="1">
+              <a:schemeClr val="accent1"/>
+            </a:fillRef>
+            <a:effectRef idx="0">
+              <a:schemeClr val="accent1"/>
+            </a:effectRef>
+            <a:fontRef idx="minor">
+              <a:schemeClr val="lt1"/>
+            </a:fontRef>
+          </p:style>
+          <p:txBody>
+            <a:bodyPr rtlCol="0" anchor="ctr"/>
+            <a:lstStyle/>
+            <a:p>
+              <a:pPr algn="ctr"/>
+              <a:endParaRPr lang="en-US"/>
+            </a:p>
+          </p:txBody>
+        </p:sp>
+        <p:sp>
+          <p:nvSpPr>
+            <p:cNvPr id="64" name="TextBox 63">
+              <a:extLst>
+                <a:ext uri="{FF2B5EF4-FFF2-40B4-BE49-F238E27FC236}">
+                  <a16:creationId xmlns:a16="http://schemas.microsoft.com/office/drawing/2014/main" id="{62B8B39C-98E6-20C2-2157-C1334BC57AC0}"/>
+                </a:ext>
+              </a:extLst>
+            </p:cNvPr>
+            <p:cNvSpPr txBox="1"/>
+            <p:nvPr/>
+          </p:nvSpPr>
+          <p:spPr>
+            <a:xfrm>
+              <a:off x="6234882" y="4230193"/>
+              <a:ext cx="1179870" cy="338554"/>
+            </a:xfrm>
+            <a:prstGeom prst="rect">
+              <a:avLst/>
+            </a:prstGeom>
+            <a:noFill/>
+          </p:spPr>
+          <p:txBody>
+            <a:bodyPr wrap="square">
+              <a:spAutoFit/>
+            </a:bodyPr>
+            <a:lstStyle/>
+            <a:p>
+              <a:pPr algn="ctr"/>
+              <a:r>
+                <a:rPr lang="en-US" sz="1600" b="1" dirty="0">
+                  <a:solidFill>
+                    <a:srgbClr val="665649"/>
+                  </a:solidFill>
+                </a:rPr>
+                <a:t>Sessions</a:t>
+              </a:r>
+            </a:p>
+          </p:txBody>
+        </p:sp>
+        <p:sp>
+          <p:nvSpPr>
+            <p:cNvPr id="65" name="TextBox 64">
+              <a:extLst>
+                <a:ext uri="{FF2B5EF4-FFF2-40B4-BE49-F238E27FC236}">
+                  <a16:creationId xmlns:a16="http://schemas.microsoft.com/office/drawing/2014/main" id="{A00C1239-246F-DE16-87D0-145A8C131517}"/>
+                </a:ext>
+              </a:extLst>
+            </p:cNvPr>
+            <p:cNvSpPr txBox="1"/>
+            <p:nvPr/>
+          </p:nvSpPr>
+          <p:spPr>
+            <a:xfrm>
+              <a:off x="3872682" y="4241967"/>
+              <a:ext cx="2533035" cy="338554"/>
+            </a:xfrm>
+            <a:prstGeom prst="rect">
+              <a:avLst/>
+            </a:prstGeom>
+            <a:noFill/>
+          </p:spPr>
+          <p:txBody>
+            <a:bodyPr wrap="square">
+              <a:spAutoFit/>
+            </a:bodyPr>
+            <a:lstStyle/>
+            <a:p>
+              <a:pPr algn="ctr"/>
+              <a:r>
+                <a:rPr lang="en-US" sz="1600" dirty="0">
+                  <a:solidFill>
+                    <a:srgbClr val="665649"/>
+                  </a:solidFill>
+                </a:rPr>
+                <a:t>01:30 PM – 03:30 PM</a:t>
+              </a:r>
+            </a:p>
+          </p:txBody>
+        </p:sp>
+      </p:grpSp>
+      <p:grpSp>
+        <p:nvGrpSpPr>
+          <p:cNvPr id="66" name="Group 65">
+            <a:extLst>
+              <a:ext uri="{FF2B5EF4-FFF2-40B4-BE49-F238E27FC236}">
+                <a16:creationId xmlns:a16="http://schemas.microsoft.com/office/drawing/2014/main" id="{BA34058C-D754-06F6-EFB1-22295DCA9D38}"/>
+              </a:ext>
+            </a:extLst>
+          </p:cNvPr>
+          <p:cNvGrpSpPr/>
+          <p:nvPr/>
+        </p:nvGrpSpPr>
+        <p:grpSpPr>
+          <a:xfrm>
+            <a:off x="1510482" y="5054062"/>
+            <a:ext cx="9171039" cy="420316"/>
+            <a:chOff x="1510482" y="4189312"/>
+            <a:chExt cx="9171039" cy="420316"/>
+          </a:xfrm>
+        </p:grpSpPr>
+        <p:sp>
+          <p:nvSpPr>
+            <p:cNvPr id="67" name="Rectangle: Rounded Corners 66">
+              <a:extLst>
+                <a:ext uri="{FF2B5EF4-FFF2-40B4-BE49-F238E27FC236}">
+                  <a16:creationId xmlns:a16="http://schemas.microsoft.com/office/drawing/2014/main" id="{BE962498-69E7-D28B-828B-F2C5D9394557}"/>
+                </a:ext>
+              </a:extLst>
+            </p:cNvPr>
+            <p:cNvSpPr/>
+            <p:nvPr/>
+          </p:nvSpPr>
+          <p:spPr>
+            <a:xfrm>
+              <a:off x="1510482" y="4189312"/>
+              <a:ext cx="9171039" cy="420316"/>
+            </a:xfrm>
+            <a:prstGeom prst="roundRect">
+              <a:avLst/>
+            </a:prstGeom>
+            <a:noFill/>
+            <a:ln w="28575">
+              <a:solidFill>
+                <a:srgbClr val="DDD7C0"/>
+              </a:solidFill>
+            </a:ln>
+          </p:spPr>
+          <p:style>
+            <a:lnRef idx="2">
+              <a:schemeClr val="accent1">
+                <a:shade val="15000"/>
+              </a:schemeClr>
+            </a:lnRef>
+            <a:fillRef idx="1">
+              <a:schemeClr val="accent1"/>
+            </a:fillRef>
+            <a:effectRef idx="0">
+              <a:schemeClr val="accent1"/>
+            </a:effectRef>
+            <a:fontRef idx="minor">
+              <a:schemeClr val="lt1"/>
+            </a:fontRef>
+          </p:style>
+          <p:txBody>
+            <a:bodyPr rtlCol="0" anchor="ctr"/>
+            <a:lstStyle/>
+            <a:p>
+              <a:pPr algn="ctr"/>
+              <a:endParaRPr lang="en-US"/>
+            </a:p>
+          </p:txBody>
+        </p:sp>
+        <p:sp>
+          <p:nvSpPr>
+            <p:cNvPr id="68" name="TextBox 67">
+              <a:extLst>
+                <a:ext uri="{FF2B5EF4-FFF2-40B4-BE49-F238E27FC236}">
+                  <a16:creationId xmlns:a16="http://schemas.microsoft.com/office/drawing/2014/main" id="{A58E7400-CE45-FBA1-082D-F9E11CCD0978}"/>
+                </a:ext>
+              </a:extLst>
+            </p:cNvPr>
+            <p:cNvSpPr txBox="1"/>
+            <p:nvPr/>
+          </p:nvSpPr>
+          <p:spPr>
+            <a:xfrm>
+              <a:off x="6234882" y="4230193"/>
+              <a:ext cx="1179870" cy="338554"/>
+            </a:xfrm>
+            <a:prstGeom prst="rect">
+              <a:avLst/>
+            </a:prstGeom>
+            <a:noFill/>
+          </p:spPr>
+          <p:txBody>
+            <a:bodyPr wrap="square">
+              <a:spAutoFit/>
+            </a:bodyPr>
+            <a:lstStyle/>
+            <a:p>
+              <a:pPr algn="ctr"/>
+              <a:r>
+                <a:rPr lang="en-US" sz="1600" b="1" dirty="0">
+                  <a:solidFill>
+                    <a:srgbClr val="665649"/>
+                  </a:solidFill>
+                </a:rPr>
+                <a:t>Break</a:t>
+              </a:r>
+            </a:p>
+          </p:txBody>
+        </p:sp>
+        <p:sp>
+          <p:nvSpPr>
+            <p:cNvPr id="69" name="TextBox 68">
+              <a:extLst>
+                <a:ext uri="{FF2B5EF4-FFF2-40B4-BE49-F238E27FC236}">
+                  <a16:creationId xmlns:a16="http://schemas.microsoft.com/office/drawing/2014/main" id="{BE3A8851-42F9-F8D9-8C7A-C4B5FB991BF7}"/>
+                </a:ext>
+              </a:extLst>
+            </p:cNvPr>
+            <p:cNvSpPr txBox="1"/>
+            <p:nvPr/>
+          </p:nvSpPr>
+          <p:spPr>
+            <a:xfrm>
+              <a:off x="3872682" y="4241967"/>
+              <a:ext cx="2533035" cy="338554"/>
+            </a:xfrm>
+            <a:prstGeom prst="rect">
+              <a:avLst/>
+            </a:prstGeom>
+            <a:noFill/>
+          </p:spPr>
+          <p:txBody>
+            <a:bodyPr wrap="square">
+              <a:spAutoFit/>
+            </a:bodyPr>
+            <a:lstStyle/>
+            <a:p>
+              <a:pPr algn="ctr"/>
+              <a:r>
+                <a:rPr lang="en-US" sz="1600" dirty="0">
+                  <a:solidFill>
+                    <a:srgbClr val="665649"/>
+                  </a:solidFill>
+                </a:rPr>
+                <a:t>03:00 PM – 04:00 PM</a:t>
+              </a:r>
+            </a:p>
+          </p:txBody>
+        </p:sp>
+      </p:grpSp>
+      <p:grpSp>
+        <p:nvGrpSpPr>
+          <p:cNvPr id="70" name="Group 69">
+            <a:extLst>
+              <a:ext uri="{FF2B5EF4-FFF2-40B4-BE49-F238E27FC236}">
+                <a16:creationId xmlns:a16="http://schemas.microsoft.com/office/drawing/2014/main" id="{B96BD13F-3435-8E6A-FA33-07DD682A250D}"/>
+              </a:ext>
+            </a:extLst>
+          </p:cNvPr>
+          <p:cNvGrpSpPr/>
+          <p:nvPr/>
+        </p:nvGrpSpPr>
+        <p:grpSpPr>
+          <a:xfrm>
+            <a:off x="1510482" y="5638837"/>
+            <a:ext cx="9171039" cy="420316"/>
+            <a:chOff x="1510482" y="4189312"/>
+            <a:chExt cx="9171039" cy="420316"/>
+          </a:xfrm>
+        </p:grpSpPr>
+        <p:sp>
+          <p:nvSpPr>
+            <p:cNvPr id="71" name="Rectangle: Rounded Corners 70">
+              <a:extLst>
+                <a:ext uri="{FF2B5EF4-FFF2-40B4-BE49-F238E27FC236}">
+                  <a16:creationId xmlns:a16="http://schemas.microsoft.com/office/drawing/2014/main" id="{337120DE-957B-C396-E754-0DC91053A3DA}"/>
+                </a:ext>
+              </a:extLst>
+            </p:cNvPr>
+            <p:cNvSpPr/>
+            <p:nvPr/>
+          </p:nvSpPr>
+          <p:spPr>
+            <a:xfrm>
+              <a:off x="1510482" y="4189312"/>
+              <a:ext cx="9171039" cy="420316"/>
+            </a:xfrm>
+            <a:prstGeom prst="roundRect">
+              <a:avLst/>
+            </a:prstGeom>
+            <a:noFill/>
+            <a:ln w="28575">
+              <a:solidFill>
+                <a:srgbClr val="DDD7C0"/>
+              </a:solidFill>
+            </a:ln>
+          </p:spPr>
+          <p:style>
+            <a:lnRef idx="2">
+              <a:schemeClr val="accent1">
+                <a:shade val="15000"/>
+              </a:schemeClr>
+            </a:lnRef>
+            <a:fillRef idx="1">
+              <a:schemeClr val="accent1"/>
+            </a:fillRef>
+            <a:effectRef idx="0">
+              <a:schemeClr val="accent1"/>
+            </a:effectRef>
+            <a:fontRef idx="minor">
+              <a:schemeClr val="lt1"/>
+            </a:fontRef>
+          </p:style>
+          <p:txBody>
+            <a:bodyPr rtlCol="0" anchor="ctr"/>
+            <a:lstStyle/>
+            <a:p>
+              <a:pPr algn="ctr"/>
+              <a:endParaRPr lang="en-US"/>
+            </a:p>
+          </p:txBody>
+        </p:sp>
+        <p:sp>
+          <p:nvSpPr>
+            <p:cNvPr id="72" name="TextBox 71">
+              <a:extLst>
+                <a:ext uri="{FF2B5EF4-FFF2-40B4-BE49-F238E27FC236}">
+                  <a16:creationId xmlns:a16="http://schemas.microsoft.com/office/drawing/2014/main" id="{E7E92EE8-34D9-C17F-3AFE-38B17C4D2FFE}"/>
+                </a:ext>
+              </a:extLst>
+            </p:cNvPr>
+            <p:cNvSpPr txBox="1"/>
+            <p:nvPr/>
+          </p:nvSpPr>
+          <p:spPr>
+            <a:xfrm>
+              <a:off x="6234882" y="4230193"/>
+              <a:ext cx="1179870" cy="338554"/>
+            </a:xfrm>
+            <a:prstGeom prst="rect">
+              <a:avLst/>
+            </a:prstGeom>
+            <a:noFill/>
+          </p:spPr>
+          <p:txBody>
+            <a:bodyPr wrap="square">
+              <a:spAutoFit/>
+            </a:bodyPr>
+            <a:lstStyle/>
+            <a:p>
+              <a:pPr algn="ctr"/>
+              <a:r>
+                <a:rPr lang="en-US" sz="1600" b="1" dirty="0">
+                  <a:solidFill>
+                    <a:srgbClr val="665649"/>
+                  </a:solidFill>
+                </a:rPr>
+                <a:t>Sessions</a:t>
+              </a:r>
+            </a:p>
+          </p:txBody>
+        </p:sp>
+        <p:sp>
+          <p:nvSpPr>
+            <p:cNvPr id="73" name="TextBox 72">
+              <a:extLst>
+                <a:ext uri="{FF2B5EF4-FFF2-40B4-BE49-F238E27FC236}">
+                  <a16:creationId xmlns:a16="http://schemas.microsoft.com/office/drawing/2014/main" id="{AFF2BE06-58F3-EABB-A4C0-0BBD1135F38D}"/>
+                </a:ext>
+              </a:extLst>
+            </p:cNvPr>
+            <p:cNvSpPr txBox="1"/>
+            <p:nvPr/>
+          </p:nvSpPr>
+          <p:spPr>
+            <a:xfrm>
+              <a:off x="3872682" y="4241967"/>
+              <a:ext cx="2533035" cy="338554"/>
+            </a:xfrm>
+            <a:prstGeom prst="rect">
+              <a:avLst/>
+            </a:prstGeom>
+            <a:noFill/>
+          </p:spPr>
+          <p:txBody>
+            <a:bodyPr wrap="square">
+              <a:spAutoFit/>
+            </a:bodyPr>
+            <a:lstStyle/>
+            <a:p>
+              <a:pPr algn="ctr"/>
+              <a:r>
+                <a:rPr lang="en-US" sz="1600" dirty="0">
+                  <a:solidFill>
+                    <a:srgbClr val="665649"/>
+                  </a:solidFill>
+                </a:rPr>
+                <a:t>04:00 PM – 04:30 PM</a:t>
+              </a:r>
+            </a:p>
+          </p:txBody>
+        </p:sp>
+      </p:grpSp>
+      <p:grpSp>
+        <p:nvGrpSpPr>
+          <p:cNvPr id="74" name="Group 73">
+            <a:extLst>
+              <a:ext uri="{FF2B5EF4-FFF2-40B4-BE49-F238E27FC236}">
+                <a16:creationId xmlns:a16="http://schemas.microsoft.com/office/drawing/2014/main" id="{F7BF5A96-F64C-48B3-E813-7AC202FF3BCA}"/>
+              </a:ext>
+            </a:extLst>
+          </p:cNvPr>
+          <p:cNvGrpSpPr/>
+          <p:nvPr/>
+        </p:nvGrpSpPr>
+        <p:grpSpPr>
+          <a:xfrm>
+            <a:off x="1510482" y="6232368"/>
+            <a:ext cx="9171039" cy="420316"/>
+            <a:chOff x="1510482" y="4189312"/>
+            <a:chExt cx="9171039" cy="420316"/>
+          </a:xfrm>
+        </p:grpSpPr>
+        <p:sp>
+          <p:nvSpPr>
+            <p:cNvPr id="75" name="Rectangle: Rounded Corners 74">
+              <a:extLst>
+                <a:ext uri="{FF2B5EF4-FFF2-40B4-BE49-F238E27FC236}">
+                  <a16:creationId xmlns:a16="http://schemas.microsoft.com/office/drawing/2014/main" id="{DFEF549F-FB49-3E47-F202-998B26D7A333}"/>
+                </a:ext>
+              </a:extLst>
+            </p:cNvPr>
+            <p:cNvSpPr/>
+            <p:nvPr/>
+          </p:nvSpPr>
+          <p:spPr>
+            <a:xfrm>
+              <a:off x="1510482" y="4189312"/>
+              <a:ext cx="9171039" cy="420316"/>
+            </a:xfrm>
+            <a:prstGeom prst="roundRect">
+              <a:avLst/>
+            </a:prstGeom>
+            <a:noFill/>
+            <a:ln w="28575">
+              <a:solidFill>
+                <a:srgbClr val="DDD7C0"/>
+              </a:solidFill>
+            </a:ln>
+          </p:spPr>
+          <p:style>
+            <a:lnRef idx="2">
+              <a:schemeClr val="accent1">
+                <a:shade val="15000"/>
+              </a:schemeClr>
+            </a:lnRef>
+            <a:fillRef idx="1">
+              <a:schemeClr val="accent1"/>
+            </a:fillRef>
+            <a:effectRef idx="0">
+              <a:schemeClr val="accent1"/>
+            </a:effectRef>
+            <a:fontRef idx="minor">
+              <a:schemeClr val="lt1"/>
+            </a:fontRef>
+          </p:style>
+          <p:txBody>
+            <a:bodyPr rtlCol="0" anchor="ctr"/>
+            <a:lstStyle/>
+            <a:p>
+              <a:pPr algn="ctr"/>
+              <a:endParaRPr lang="en-US"/>
+            </a:p>
+          </p:txBody>
+        </p:sp>
+        <p:sp>
+          <p:nvSpPr>
+            <p:cNvPr id="76" name="TextBox 75">
+              <a:extLst>
+                <a:ext uri="{FF2B5EF4-FFF2-40B4-BE49-F238E27FC236}">
+                  <a16:creationId xmlns:a16="http://schemas.microsoft.com/office/drawing/2014/main" id="{8C6CA0C1-E9AD-349E-0B84-5DD329EFBCFB}"/>
+                </a:ext>
+              </a:extLst>
+            </p:cNvPr>
+            <p:cNvSpPr txBox="1"/>
+            <p:nvPr/>
+          </p:nvSpPr>
+          <p:spPr>
+            <a:xfrm>
+              <a:off x="6234882" y="4230193"/>
+              <a:ext cx="1985193" cy="338554"/>
+            </a:xfrm>
+            <a:prstGeom prst="rect">
+              <a:avLst/>
+            </a:prstGeom>
+            <a:noFill/>
+          </p:spPr>
+          <p:txBody>
+            <a:bodyPr wrap="square">
+              <a:spAutoFit/>
+            </a:bodyPr>
+            <a:lstStyle/>
+            <a:p>
+              <a:pPr algn="ctr"/>
+              <a:r>
+                <a:rPr lang="en-US" sz="1600" b="1" dirty="0">
+                  <a:solidFill>
+                    <a:srgbClr val="665649"/>
+                  </a:solidFill>
+                </a:rPr>
+                <a:t>Raffle and Closing</a:t>
+              </a:r>
+            </a:p>
+          </p:txBody>
+        </p:sp>
+        <p:sp>
+          <p:nvSpPr>
+            <p:cNvPr id="77" name="TextBox 76">
+              <a:extLst>
+                <a:ext uri="{FF2B5EF4-FFF2-40B4-BE49-F238E27FC236}">
+                  <a16:creationId xmlns:a16="http://schemas.microsoft.com/office/drawing/2014/main" id="{05A9BB1C-E269-8576-876E-853400C1B8AD}"/>
+                </a:ext>
+              </a:extLst>
+            </p:cNvPr>
+            <p:cNvSpPr txBox="1"/>
+            <p:nvPr/>
+          </p:nvSpPr>
+          <p:spPr>
+            <a:xfrm>
+              <a:off x="3872682" y="4241967"/>
+              <a:ext cx="2533035" cy="338554"/>
+            </a:xfrm>
+            <a:prstGeom prst="rect">
+              <a:avLst/>
+            </a:prstGeom>
+            <a:noFill/>
+          </p:spPr>
+          <p:txBody>
+            <a:bodyPr wrap="square">
+              <a:spAutoFit/>
+            </a:bodyPr>
+            <a:lstStyle/>
+            <a:p>
+              <a:pPr algn="ctr"/>
+              <a:r>
+                <a:rPr lang="en-US" sz="1600" dirty="0">
+                  <a:solidFill>
+                    <a:srgbClr val="665649"/>
+                  </a:solidFill>
+                </a:rPr>
+                <a:t>05:00 PM</a:t>
+              </a:r>
+            </a:p>
+          </p:txBody>
+        </p:sp>
+      </p:grpSp>
+    </p:spTree>
+    <p:extLst>
+      <p:ext uri="{BB962C8B-B14F-4D97-AF65-F5344CB8AC3E}">
+        <p14:creationId xmlns:p14="http://schemas.microsoft.com/office/powerpoint/2010/main" val="3861863877"/>
+      </p:ext>
+    </p:extLst>
+  </p:cSld>
+  <p:clrMapOvr>
+    <a:masterClrMapping/>
+  </p:clrMapOvr>
+</p:sld>
+</file>
+
+<file path=ppt/slides/slide7.xml><?xml version="1.0" encoding="utf-8"?>
+<p:sld xmlns:a="http://schemas.openxmlformats.org/drawingml/2006/main" xmlns:r="http://schemas.openxmlformats.org/officeDocument/2006/relationships" xmlns:p="http://schemas.openxmlformats.org/presentationml/2006/main">
+  <p:cSld>
+    <p:spTree>
+      <p:nvGrpSpPr>
+        <p:cNvPr id="1" name=""/>
+        <p:cNvGrpSpPr/>
+        <p:nvPr/>
+      </p:nvGrpSpPr>
+      <p:grpSpPr>
+        <a:xfrm>
+          <a:off x="0" y="0"/>
+          <a:ext cx="0" cy="0"/>
+          <a:chOff x="0" y="0"/>
+          <a:chExt cx="0" cy="0"/>
+        </a:xfrm>
+      </p:grpSpPr>
+      <p:sp>
+        <p:nvSpPr>
+          <p:cNvPr id="2" name="Title 1">
+            <a:extLst>
+              <a:ext uri="{FF2B5EF4-FFF2-40B4-BE49-F238E27FC236}">
+                <a16:creationId xmlns:a16="http://schemas.microsoft.com/office/drawing/2014/main" id="{45DE9373-CEC8-8B01-81ED-695E818A1EF1}"/>
+              </a:ext>
+            </a:extLst>
+          </p:cNvPr>
+          <p:cNvSpPr>
+            <a:spLocks noGrp="1"/>
+          </p:cNvSpPr>
+          <p:nvPr>
+            <p:ph type="title"/>
+          </p:nvPr>
+        </p:nvSpPr>
+        <p:spPr/>
+        <p:txBody>
+          <a:bodyPr/>
+          <a:lstStyle/>
+          <a:p>
+            <a:r>
+              <a:rPr lang="en-US" dirty="0"/>
+              <a:t>Your feedback matters</a:t>
+            </a:r>
+          </a:p>
+        </p:txBody>
+      </p:sp>
+      <p:sp>
+        <p:nvSpPr>
+          <p:cNvPr id="3" name="Rectangle: Rounded Corners 2">
+            <a:extLst>
+              <a:ext uri="{FF2B5EF4-FFF2-40B4-BE49-F238E27FC236}">
+                <a16:creationId xmlns:a16="http://schemas.microsoft.com/office/drawing/2014/main" id="{91BDD591-90B9-5258-F790-7F0C3EED6A1A}"/>
+              </a:ext>
+            </a:extLst>
+          </p:cNvPr>
+          <p:cNvSpPr/>
+          <p:nvPr/>
+        </p:nvSpPr>
+        <p:spPr>
+          <a:xfrm>
+            <a:off x="4232422" y="2033894"/>
+            <a:ext cx="3613720" cy="3137704"/>
+          </a:xfrm>
+          <a:prstGeom prst="roundRect">
+            <a:avLst/>
+          </a:prstGeom>
+          <a:noFill/>
+          <a:ln w="28575">
+            <a:solidFill>
+              <a:srgbClr val="DDD7C0"/>
+            </a:solidFill>
+            <a:prstDash val="sysDash"/>
+          </a:ln>
+        </p:spPr>
+        <p:style>
+          <a:lnRef idx="2">
+            <a:schemeClr val="accent1">
+              <a:shade val="15000"/>
+            </a:schemeClr>
+          </a:lnRef>
+          <a:fillRef idx="1">
+            <a:schemeClr val="accent1"/>
+          </a:fillRef>
+          <a:effectRef idx="0">
+            <a:schemeClr val="accent1"/>
+          </a:effectRef>
+          <a:fontRef idx="minor">
+            <a:schemeClr val="lt1"/>
+          </a:fontRef>
+        </p:style>
+        <p:txBody>
+          <a:bodyPr rtlCol="0" anchor="ctr"/>
+          <a:lstStyle/>
+          <a:p>
+            <a:pPr algn="ctr"/>
+            <a:endParaRPr lang="en-US"/>
+          </a:p>
+        </p:txBody>
+      </p:sp>
+      <p:sp>
+        <p:nvSpPr>
+          <p:cNvPr id="4" name="TextBox 3">
+            <a:extLst>
+              <a:ext uri="{FF2B5EF4-FFF2-40B4-BE49-F238E27FC236}">
+                <a16:creationId xmlns:a16="http://schemas.microsoft.com/office/drawing/2014/main" id="{22206383-FF47-B4A8-408C-CE3A9F313DDE}"/>
+              </a:ext>
+            </a:extLst>
+          </p:cNvPr>
+          <p:cNvSpPr txBox="1"/>
+          <p:nvPr/>
+        </p:nvSpPr>
+        <p:spPr>
+          <a:xfrm>
+            <a:off x="4411885" y="5613298"/>
+            <a:ext cx="3368230" cy="369332"/>
+          </a:xfrm>
+          <a:prstGeom prst="rect">
+            <a:avLst/>
+          </a:prstGeom>
+          <a:noFill/>
+        </p:spPr>
+        <p:txBody>
+          <a:bodyPr wrap="none" rtlCol="0">
+            <a:spAutoFit/>
+          </a:bodyPr>
+          <a:lstStyle/>
+          <a:p>
+            <a:r>
+              <a:rPr lang="en-US" dirty="0">
+                <a:solidFill>
+                  <a:srgbClr val="665649"/>
+                </a:solidFill>
+                <a:latin typeface="Lufga" panose="00000500000000000000" pitchFamily="50" charset="0"/>
+              </a:rPr>
+              <a:t>Add feedback QR code here</a:t>
+            </a:r>
+          </a:p>
+        </p:txBody>
+      </p:sp>
+    </p:spTree>
+    <p:extLst>
+      <p:ext uri="{BB962C8B-B14F-4D97-AF65-F5344CB8AC3E}">
+        <p14:creationId xmlns:p14="http://schemas.microsoft.com/office/powerpoint/2010/main" val="1676759351"/>
+      </p:ext>
+    </p:extLst>
+  </p:cSld>
+  <p:clrMapOvr>
+    <a:masterClrMapping/>
+  </p:clrMapOvr>
+</p:sld>
+</file>
+
+<file path=ppt/slides/slide8.xml><?xml version="1.0" encoding="utf-8"?>
+<p:sld xmlns:a="http://schemas.openxmlformats.org/drawingml/2006/main" xmlns:r="http://schemas.openxmlformats.org/officeDocument/2006/relationships" xmlns:p="http://schemas.openxmlformats.org/presentationml/2006/main">
+  <p:cSld>
+    <p:spTree>
+      <p:nvGrpSpPr>
+        <p:cNvPr id="1" name=""/>
+        <p:cNvGrpSpPr/>
+        <p:nvPr/>
+      </p:nvGrpSpPr>
+      <p:grpSpPr>
+        <a:xfrm>
+          <a:off x="0" y="0"/>
+          <a:ext cx="0" cy="0"/>
+          <a:chOff x="0" y="0"/>
+          <a:chExt cx="0" cy="0"/>
+        </a:xfrm>
+      </p:grpSpPr>
+    </p:spTree>
+    <p:extLst>
+      <p:ext uri="{BB962C8B-B14F-4D97-AF65-F5344CB8AC3E}">
+        <p14:creationId xmlns:p14="http://schemas.microsoft.com/office/powerpoint/2010/main" val="1219615795"/>
       </p:ext>
     </p:extLst>
   </p:cSld>
